--- a/документация/Презентация My Diary (не доделана).pptx
+++ b/документация/Презентация My Diary (не доделана).pptx
@@ -272,7 +272,7 @@
   </p:defaultTextStyle>
   <p:extLst>
     <p:ext uri="{EFAFB233-063F-42B5-8137-9DF3F51BA10A}">
-      <p15:sldGuideLst xmlns="" xmlns:mc="http://schemas.openxmlformats.org/markup-compatibility/2006" xmlns:mv="urn:schemas-microsoft-com:mac:vml" xmlns:c="http://schemas.openxmlformats.org/drawingml/2006/chart" xmlns:dgm="http://schemas.openxmlformats.org/drawingml/2006/diagram" xmlns:o="urn:schemas-microsoft-com:office:office" xmlns:v="urn:schemas-microsoft-com:vml" xmlns:pvml="urn:schemas-microsoft-com:office:powerpoint" xmlns:com="http://schemas.openxmlformats.org/drawingml/2006/compatibility" xmlns:p14="http://schemas.microsoft.com/office/powerpoint/2010/main" xmlns:p15="http://schemas.microsoft.com/office/powerpoint/2012/main" xmlns:ahyp="http://schemas.microsoft.com/office/drawing/2018/hyperlinkcolor">
+      <p15:sldGuideLst xmlns:ahyp="http://schemas.microsoft.com/office/drawing/2018/hyperlinkcolor" xmlns:p15="http://schemas.microsoft.com/office/powerpoint/2012/main" xmlns:p14="http://schemas.microsoft.com/office/powerpoint/2010/main" xmlns:com="http://schemas.openxmlformats.org/drawingml/2006/compatibility" xmlns:pvml="urn:schemas-microsoft-com:office:powerpoint" xmlns:v="urn:schemas-microsoft-com:vml" xmlns:o="urn:schemas-microsoft-com:office:office" xmlns:dgm="http://schemas.openxmlformats.org/drawingml/2006/diagram" xmlns:c="http://schemas.openxmlformats.org/drawingml/2006/chart" xmlns:mv="urn:schemas-microsoft-com:mac:vml" xmlns:mc="http://schemas.openxmlformats.org/markup-compatibility/2006" xmlns="">
         <p15:guide id="1" orient="horz" pos="2160">
           <p15:clr>
             <a:srgbClr val="000000"/>
@@ -5516,7 +5516,7 @@
                 <a:solidFill>
                   <a:schemeClr val="tx1"/>
                 </a:solidFill>
-                <a:latin typeface="Arial" pitchFamily="34" charset="0"/>
+                <a:latin typeface="Roboto" charset="0"/>
                 <a:ea typeface="Roboto" charset="0"/>
                 <a:cs typeface="Arial" pitchFamily="34" charset="0"/>
               </a:rPr>
@@ -5526,7 +5526,7 @@
               <a:solidFill>
                 <a:schemeClr val="tx1"/>
               </a:solidFill>
-              <a:latin typeface="Arial" pitchFamily="34" charset="0"/>
+              <a:latin typeface="Roboto" charset="0"/>
               <a:ea typeface="Roboto" charset="0"/>
               <a:cs typeface="Arial" pitchFamily="34" charset="0"/>
             </a:endParaRPr>
@@ -5696,26 +5696,49 @@
                 <a:solidFill>
                   <a:schemeClr val="tx1"/>
                 </a:solidFill>
+                <a:latin typeface="Roboto" charset="0"/>
+                <a:ea typeface="Roboto" charset="0"/>
               </a:rPr>
               <a:t>- </a:t>
             </a:r>
             <a:r>
+              <a:rPr lang="en-US" sz="1600" dirty="0" smtClean="0">
+                <a:solidFill>
+                  <a:schemeClr val="tx1"/>
+                </a:solidFill>
+                <a:latin typeface="Roboto" charset="0"/>
+                <a:ea typeface="Roboto" charset="0"/>
+              </a:rPr>
+              <a:t> </a:t>
+            </a:r>
+            <a:r>
               <a:rPr lang="ru-RU" sz="1500" dirty="0" smtClean="0">
                 <a:solidFill>
                   <a:schemeClr val="tx1"/>
                 </a:solidFill>
-                <a:latin typeface="Arial" pitchFamily="34" charset="0"/>
+                <a:latin typeface="Roboto" charset="0"/>
                 <a:ea typeface="Roboto" charset="0"/>
                 <a:cs typeface="Arial" pitchFamily="34" charset="0"/>
               </a:rPr>
-              <a:t>Проектирование UI на базе </a:t>
+              <a:t>Проектирование </a:t>
+            </a:r>
+            <a:r>
+              <a:rPr lang="ru-RU" sz="1500" dirty="0" smtClean="0">
+                <a:solidFill>
+                  <a:schemeClr val="tx1"/>
+                </a:solidFill>
+                <a:latin typeface="Roboto" charset="0"/>
+                <a:ea typeface="Roboto" charset="0"/>
+                <a:cs typeface="Arial" pitchFamily="34" charset="0"/>
+              </a:rPr>
+              <a:t>UI на базе </a:t>
             </a:r>
             <a:r>
               <a:rPr lang="ru-RU" sz="1500" dirty="0" err="1" smtClean="0">
                 <a:solidFill>
                   <a:schemeClr val="tx1"/>
                 </a:solidFill>
-                <a:latin typeface="Arial" pitchFamily="34" charset="0"/>
+                <a:latin typeface="Roboto" charset="0"/>
                 <a:ea typeface="Roboto" charset="0"/>
                 <a:cs typeface="Arial" pitchFamily="34" charset="0"/>
               </a:rPr>
@@ -5726,7 +5749,7 @@
                 <a:solidFill>
                   <a:schemeClr val="tx1"/>
                 </a:solidFill>
-                <a:latin typeface="Arial" pitchFamily="34" charset="0"/>
+                <a:latin typeface="Roboto" charset="0"/>
                 <a:ea typeface="Roboto" charset="0"/>
                 <a:cs typeface="Arial" pitchFamily="34" charset="0"/>
               </a:rPr>
@@ -5736,7 +5759,7 @@
               <a:solidFill>
                 <a:schemeClr val="tx1"/>
               </a:solidFill>
-              <a:latin typeface="Arial" pitchFamily="34" charset="0"/>
+              <a:latin typeface="Roboto" charset="0"/>
               <a:ea typeface="Roboto" charset="0"/>
               <a:cs typeface="Arial" pitchFamily="34" charset="0"/>
             </a:endParaRPr>
@@ -5752,7 +5775,7 @@
                 <a:solidFill>
                   <a:schemeClr val="tx1"/>
                 </a:solidFill>
-                <a:latin typeface="Arial" pitchFamily="34" charset="0"/>
+                <a:latin typeface="Roboto" charset="0"/>
                 <a:ea typeface="Roboto" charset="0"/>
                 <a:cs typeface="Arial" pitchFamily="34" charset="0"/>
               </a:rPr>
@@ -5763,17 +5786,50 @@
                 <a:solidFill>
                   <a:schemeClr val="tx1"/>
                 </a:solidFill>
-                <a:latin typeface="Arial" pitchFamily="34" charset="0"/>
+                <a:latin typeface="Roboto" charset="0"/>
                 <a:ea typeface="Roboto" charset="0"/>
                 <a:cs typeface="Arial" pitchFamily="34" charset="0"/>
               </a:rPr>
-              <a:t>- Реализация локального хранилища JSON.</a:t>
+              <a:t>- </a:t>
+            </a:r>
+            <a:r>
+              <a:rPr lang="en-US" sz="1500" dirty="0" smtClean="0">
+                <a:solidFill>
+                  <a:schemeClr val="tx1"/>
+                </a:solidFill>
+                <a:latin typeface="Roboto" charset="0"/>
+                <a:ea typeface="Roboto" charset="0"/>
+                <a:cs typeface="Arial" pitchFamily="34" charset="0"/>
+              </a:rPr>
+              <a:t> </a:t>
+            </a:r>
+            <a:r>
+              <a:rPr lang="ru-RU" sz="1500" dirty="0" smtClean="0">
+                <a:solidFill>
+                  <a:schemeClr val="tx1"/>
+                </a:solidFill>
+                <a:latin typeface="Roboto" charset="0"/>
+                <a:ea typeface="Roboto" charset="0"/>
+                <a:cs typeface="Arial" pitchFamily="34" charset="0"/>
+              </a:rPr>
+              <a:t>Реализация </a:t>
+            </a:r>
+            <a:r>
+              <a:rPr lang="ru-RU" sz="1500" dirty="0" smtClean="0">
+                <a:solidFill>
+                  <a:schemeClr val="tx1"/>
+                </a:solidFill>
+                <a:latin typeface="Roboto" charset="0"/>
+                <a:ea typeface="Roboto" charset="0"/>
+                <a:cs typeface="Arial" pitchFamily="34" charset="0"/>
+              </a:rPr>
+              <a:t>локального хранилища JSON.</a:t>
             </a:r>
             <a:endParaRPr lang="en-US" sz="1500" dirty="0" smtClean="0">
               <a:solidFill>
                 <a:schemeClr val="tx1"/>
               </a:solidFill>
-              <a:latin typeface="Arial" pitchFamily="34" charset="0"/>
+              <a:latin typeface="Roboto" charset="0"/>
               <a:ea typeface="Roboto" charset="0"/>
               <a:cs typeface="Arial" pitchFamily="34" charset="0"/>
             </a:endParaRPr>
@@ -5789,7 +5845,7 @@
                 <a:solidFill>
                   <a:schemeClr val="tx1"/>
                 </a:solidFill>
-                <a:latin typeface="Arial" pitchFamily="34" charset="0"/>
+                <a:latin typeface="Roboto" charset="0"/>
                 <a:ea typeface="Roboto" charset="0"/>
                 <a:cs typeface="Arial" pitchFamily="34" charset="0"/>
               </a:rPr>
@@ -5800,17 +5856,50 @@
                 <a:solidFill>
                   <a:schemeClr val="tx1"/>
                 </a:solidFill>
-                <a:latin typeface="Arial" pitchFamily="34" charset="0"/>
+                <a:latin typeface="Roboto" charset="0"/>
                 <a:ea typeface="Roboto" charset="0"/>
                 <a:cs typeface="Arial" pitchFamily="34" charset="0"/>
               </a:rPr>
-              <a:t>- Разработка блочного редактора контента.</a:t>
+              <a:t>- </a:t>
+            </a:r>
+            <a:r>
+              <a:rPr lang="en-US" sz="1500" dirty="0" smtClean="0">
+                <a:solidFill>
+                  <a:schemeClr val="tx1"/>
+                </a:solidFill>
+                <a:latin typeface="Roboto" charset="0"/>
+                <a:ea typeface="Roboto" charset="0"/>
+                <a:cs typeface="Arial" pitchFamily="34" charset="0"/>
+              </a:rPr>
+              <a:t> </a:t>
+            </a:r>
+            <a:r>
+              <a:rPr lang="ru-RU" sz="1500" dirty="0" smtClean="0">
+                <a:solidFill>
+                  <a:schemeClr val="tx1"/>
+                </a:solidFill>
+                <a:latin typeface="Roboto" charset="0"/>
+                <a:ea typeface="Roboto" charset="0"/>
+                <a:cs typeface="Arial" pitchFamily="34" charset="0"/>
+              </a:rPr>
+              <a:t>Разработка </a:t>
+            </a:r>
+            <a:r>
+              <a:rPr lang="ru-RU" sz="1500" dirty="0" smtClean="0">
+                <a:solidFill>
+                  <a:schemeClr val="tx1"/>
+                </a:solidFill>
+                <a:latin typeface="Roboto" charset="0"/>
+                <a:ea typeface="Roboto" charset="0"/>
+                <a:cs typeface="Arial" pitchFamily="34" charset="0"/>
+              </a:rPr>
+              <a:t>блочного редактора контента.</a:t>
             </a:r>
             <a:endParaRPr lang="en-US" sz="1500" dirty="0" smtClean="0">
               <a:solidFill>
                 <a:schemeClr val="tx1"/>
               </a:solidFill>
-              <a:latin typeface="Arial" pitchFamily="34" charset="0"/>
+              <a:latin typeface="Roboto" charset="0"/>
               <a:ea typeface="Roboto" charset="0"/>
               <a:cs typeface="Arial" pitchFamily="34" charset="0"/>
             </a:endParaRPr>
@@ -5826,7 +5915,7 @@
                 <a:solidFill>
                   <a:schemeClr val="tx1"/>
                 </a:solidFill>
-                <a:latin typeface="Arial" pitchFamily="34" charset="0"/>
+                <a:latin typeface="Roboto" charset="0"/>
                 <a:ea typeface="Roboto" charset="0"/>
                 <a:cs typeface="Arial" pitchFamily="34" charset="0"/>
               </a:rPr>
@@ -5837,17 +5926,50 @@
                 <a:solidFill>
                   <a:schemeClr val="tx1"/>
                 </a:solidFill>
-                <a:latin typeface="Arial" pitchFamily="34" charset="0"/>
+                <a:latin typeface="Roboto" charset="0"/>
                 <a:ea typeface="Roboto" charset="0"/>
                 <a:cs typeface="Arial" pitchFamily="34" charset="0"/>
               </a:rPr>
-              <a:t>- Создание интерактивной системы стикеров.</a:t>
+              <a:t>- </a:t>
+            </a:r>
+            <a:r>
+              <a:rPr lang="en-US" sz="1500" dirty="0" smtClean="0">
+                <a:solidFill>
+                  <a:schemeClr val="tx1"/>
+                </a:solidFill>
+                <a:latin typeface="Roboto" charset="0"/>
+                <a:ea typeface="Roboto" charset="0"/>
+                <a:cs typeface="Arial" pitchFamily="34" charset="0"/>
+              </a:rPr>
+              <a:t> </a:t>
+            </a:r>
+            <a:r>
+              <a:rPr lang="ru-RU" sz="1500" dirty="0" smtClean="0">
+                <a:solidFill>
+                  <a:schemeClr val="tx1"/>
+                </a:solidFill>
+                <a:latin typeface="Roboto" charset="0"/>
+                <a:ea typeface="Roboto" charset="0"/>
+                <a:cs typeface="Arial" pitchFamily="34" charset="0"/>
+              </a:rPr>
+              <a:t>Создание </a:t>
+            </a:r>
+            <a:r>
+              <a:rPr lang="ru-RU" sz="1500" dirty="0" smtClean="0">
+                <a:solidFill>
+                  <a:schemeClr val="tx1"/>
+                </a:solidFill>
+                <a:latin typeface="Roboto" charset="0"/>
+                <a:ea typeface="Roboto" charset="0"/>
+                <a:cs typeface="Arial" pitchFamily="34" charset="0"/>
+              </a:rPr>
+              <a:t>интерактивной системы стикеров.</a:t>
             </a:r>
             <a:endParaRPr lang="en-US" sz="1500" dirty="0" smtClean="0">
               <a:solidFill>
                 <a:schemeClr val="tx1"/>
               </a:solidFill>
-              <a:latin typeface="Arial" pitchFamily="34" charset="0"/>
+              <a:latin typeface="Roboto" charset="0"/>
               <a:ea typeface="Roboto" charset="0"/>
               <a:cs typeface="Arial" pitchFamily="34" charset="0"/>
             </a:endParaRPr>
@@ -5863,7 +5985,7 @@
                 <a:solidFill>
                   <a:schemeClr val="tx1"/>
                 </a:solidFill>
-                <a:latin typeface="Arial" pitchFamily="34" charset="0"/>
+                <a:latin typeface="Roboto" charset="0"/>
                 <a:ea typeface="Roboto" charset="0"/>
                 <a:cs typeface="Arial" pitchFamily="34" charset="0"/>
               </a:rPr>
@@ -5874,17 +5996,50 @@
                 <a:solidFill>
                   <a:schemeClr val="tx1"/>
                 </a:solidFill>
-                <a:latin typeface="Arial" pitchFamily="34" charset="0"/>
+                <a:latin typeface="Roboto" charset="0"/>
                 <a:ea typeface="Roboto" charset="0"/>
                 <a:cs typeface="Arial" pitchFamily="34" charset="0"/>
               </a:rPr>
-              <a:t>- Интеграция системы тем и локализации.</a:t>
+              <a:t>- </a:t>
+            </a:r>
+            <a:r>
+              <a:rPr lang="en-US" sz="1500" dirty="0" smtClean="0">
+                <a:solidFill>
+                  <a:schemeClr val="tx1"/>
+                </a:solidFill>
+                <a:latin typeface="Roboto" charset="0"/>
+                <a:ea typeface="Roboto" charset="0"/>
+                <a:cs typeface="Arial" pitchFamily="34" charset="0"/>
+              </a:rPr>
+              <a:t> </a:t>
+            </a:r>
+            <a:r>
+              <a:rPr lang="ru-RU" sz="1500" dirty="0" smtClean="0">
+                <a:solidFill>
+                  <a:schemeClr val="tx1"/>
+                </a:solidFill>
+                <a:latin typeface="Roboto" charset="0"/>
+                <a:ea typeface="Roboto" charset="0"/>
+                <a:cs typeface="Arial" pitchFamily="34" charset="0"/>
+              </a:rPr>
+              <a:t>Интеграция </a:t>
+            </a:r>
+            <a:r>
+              <a:rPr lang="ru-RU" sz="1500" dirty="0" smtClean="0">
+                <a:solidFill>
+                  <a:schemeClr val="tx1"/>
+                </a:solidFill>
+                <a:latin typeface="Roboto" charset="0"/>
+                <a:ea typeface="Roboto" charset="0"/>
+                <a:cs typeface="Arial" pitchFamily="34" charset="0"/>
+              </a:rPr>
+              <a:t>системы тем и локализации.</a:t>
             </a:r>
             <a:endParaRPr sz="1500">
               <a:solidFill>
                 <a:schemeClr val="tx1"/>
               </a:solidFill>
-              <a:latin typeface="Arial" pitchFamily="34" charset="0"/>
+              <a:latin typeface="Roboto" charset="0"/>
               <a:ea typeface="Roboto" charset="0"/>
               <a:cs typeface="Arial" pitchFamily="34" charset="0"/>
             </a:endParaRPr>
@@ -6036,7 +6191,7 @@
         <p:spPr>
           <a:xfrm>
             <a:off x="572712" y="1812175"/>
-            <a:ext cx="5412452" cy="2908489"/>
+            <a:ext cx="5412452" cy="1938992"/>
           </a:xfrm>
           <a:prstGeom prst="rect">
             <a:avLst/>
@@ -6060,32 +6215,88 @@
             <a:r>
               <a:rPr lang="ru-RU" sz="1500" dirty="0" smtClean="0">
                 <a:solidFill>
-                  <a:schemeClr val="tx1"/>
-                </a:solidFill>
-              </a:rPr>
-              <a:t>Ведение личного дневника </a:t>
-            </a:r>
-            <a:r>
-              <a:rPr lang="en-US" sz="1500" dirty="0" smtClean="0">
-                <a:solidFill>
-                  <a:schemeClr val="tx1"/>
-                </a:solidFill>
-              </a:rPr>
-              <a:t>-</a:t>
-            </a:r>
+                  <a:srgbClr val="FFA709"/>
+                </a:solidFill>
+                <a:latin typeface="Roboto" charset="0"/>
+                <a:ea typeface="Roboto" charset="0"/>
+              </a:rPr>
+              <a:t>Предметная область: </a:t>
+            </a:r>
+            <a:endParaRPr lang="en-US" sz="1500" dirty="0" smtClean="0">
+              <a:solidFill>
+                <a:srgbClr val="FFA709"/>
+              </a:solidFill>
+              <a:latin typeface="Roboto" charset="0"/>
+              <a:ea typeface="Roboto" charset="0"/>
+            </a:endParaRPr>
+          </a:p>
+          <a:p>
+            <a:pPr lvl="0">
+              <a:lnSpc>
+                <a:spcPct val="140000"/>
+              </a:lnSpc>
+            </a:pPr>
             <a:r>
               <a:rPr lang="ru-RU" sz="1500" dirty="0" smtClean="0">
                 <a:solidFill>
                   <a:schemeClr val="tx1"/>
                 </a:solidFill>
-              </a:rPr>
-              <a:t> это важный инструмент психологической разгрузки и саморазвития. Современные пользователи нуждаются в безопасном, приватном и творческом цифровом пространстве.</a:t>
+                <a:latin typeface="Roboto" charset="0"/>
+                <a:ea typeface="Roboto" charset="0"/>
+              </a:rPr>
+              <a:t>Создание </a:t>
+            </a:r>
+            <a:r>
+              <a:rPr lang="ru-RU" sz="1500" dirty="0" smtClean="0">
+                <a:solidFill>
+                  <a:schemeClr val="tx1"/>
+                </a:solidFill>
+                <a:latin typeface="Roboto" charset="0"/>
+                <a:ea typeface="Roboto" charset="0"/>
+              </a:rPr>
+              <a:t>личного цифрового дневника для записей и самоанализа</a:t>
+            </a:r>
+            <a:r>
+              <a:rPr lang="ru-RU" sz="1500" dirty="0" smtClean="0">
+                <a:solidFill>
+                  <a:schemeClr val="tx1"/>
+                </a:solidFill>
+                <a:latin typeface="Roboto" charset="0"/>
+                <a:ea typeface="Roboto" charset="0"/>
+              </a:rPr>
+              <a:t>.</a:t>
+            </a:r>
+            <a:endParaRPr lang="en-US" sz="1500" dirty="0" smtClean="0">
+              <a:solidFill>
+                <a:schemeClr val="tx1"/>
+              </a:solidFill>
+              <a:latin typeface="Roboto" charset="0"/>
+              <a:ea typeface="Roboto" charset="0"/>
+            </a:endParaRPr>
+          </a:p>
+          <a:p>
+            <a:pPr lvl="0">
+              <a:lnSpc>
+                <a:spcPct val="140000"/>
+              </a:lnSpc>
+            </a:pPr>
+            <a:r>
+              <a:rPr lang="ru-RU" sz="1500" dirty="0" smtClean="0">
+                <a:solidFill>
+                  <a:schemeClr val="tx1"/>
+                </a:solidFill>
+                <a:latin typeface="Roboto" charset="0"/>
+                <a:ea typeface="Roboto" charset="0"/>
+              </a:rPr>
+              <a:t/>
             </a:r>
             <a:br>
               <a:rPr lang="ru-RU" sz="1500" dirty="0" smtClean="0">
                 <a:solidFill>
                   <a:schemeClr val="tx1"/>
                 </a:solidFill>
+                <a:latin typeface="Roboto" charset="0"/>
+                <a:ea typeface="Roboto" charset="0"/>
               </a:rPr>
             </a:br>
             <a:r>
@@ -6093,6 +6304,28 @@
                 <a:solidFill>
                   <a:schemeClr val="tx1"/>
                 </a:solidFill>
+                <a:latin typeface="Roboto" charset="0"/>
+                <a:ea typeface="Roboto" charset="0"/>
+              </a:rPr>
+              <a:t>​</a:t>
+            </a:r>
+            <a:r>
+              <a:rPr lang="ru-RU" sz="1500" dirty="0" smtClean="0">
+                <a:solidFill>
+                  <a:srgbClr val="FFA709"/>
+                </a:solidFill>
+                <a:latin typeface="Roboto" charset="0"/>
+                <a:ea typeface="Roboto" charset="0"/>
+              </a:rPr>
+              <a:t>Что делает приложение:</a:t>
+            </a:r>
+            <a:r>
+              <a:rPr lang="ru-RU" sz="1500" dirty="0" smtClean="0">
+                <a:solidFill>
+                  <a:schemeClr val="tx1"/>
+                </a:solidFill>
+                <a:latin typeface="Roboto" charset="0"/>
+                <a:ea typeface="Roboto" charset="0"/>
               </a:rPr>
               <a:t/>
             </a:r>
@@ -6101,61 +6334,194 @@
                 <a:solidFill>
                   <a:schemeClr val="tx1"/>
                 </a:solidFill>
+                <a:latin typeface="Roboto" charset="0"/>
+                <a:ea typeface="Roboto" charset="0"/>
               </a:rPr>
             </a:br>
             <a:r>
-              <a:rPr lang="ru-RU" sz="1500" dirty="0" err="1" smtClean="0">
-                <a:solidFill>
-                  <a:schemeClr val="tx1"/>
-                </a:solidFill>
-              </a:rPr>
-              <a:t>My</a:t>
-            </a:r>
-            <a:r>
               <a:rPr lang="ru-RU" sz="1500" dirty="0" smtClean="0">
                 <a:solidFill>
                   <a:schemeClr val="tx1"/>
                 </a:solidFill>
-              </a:rPr>
-              <a:t> </a:t>
-            </a:r>
-            <a:r>
-              <a:rPr lang="ru-RU" sz="1500" dirty="0" err="1" smtClean="0">
-                <a:solidFill>
-                  <a:schemeClr val="tx1"/>
-                </a:solidFill>
-              </a:rPr>
-              <a:t>Diary</a:t>
-            </a:r>
-            <a:r>
-              <a:rPr lang="ru-RU" sz="1500" dirty="0" smtClean="0">
-                <a:solidFill>
-                  <a:schemeClr val="tx1"/>
-                </a:solidFill>
-              </a:rPr>
-              <a:t> решает проблемы приватности, работая полностью автономно (</a:t>
-            </a:r>
-            <a:r>
-              <a:rPr lang="ru-RU" sz="1500" dirty="0" err="1" smtClean="0">
-                <a:solidFill>
-                  <a:schemeClr val="tx1"/>
-                </a:solidFill>
-              </a:rPr>
-              <a:t>offline-first</a:t>
-            </a:r>
-            <a:r>
-              <a:rPr lang="ru-RU" sz="1500" dirty="0" smtClean="0">
-                <a:solidFill>
-                  <a:schemeClr val="tx1"/>
-                </a:solidFill>
-              </a:rPr>
-              <a:t>), и предоставляет уникальные возможности визуального оформления мыслей с помощью стикеров и фото-блоков</a:t>
+                <a:latin typeface="Roboto" charset="0"/>
+                <a:ea typeface="Roboto" charset="0"/>
+              </a:rPr>
+              <a:t>​</a:t>
             </a:r>
             <a:endParaRPr sz="1500">
               <a:solidFill>
                 <a:schemeClr val="tx1"/>
               </a:solidFill>
+              <a:latin typeface="Roboto" charset="0"/>
+              <a:ea typeface="Roboto" charset="0"/>
             </a:endParaRPr>
+          </a:p>
+        </p:txBody>
+      </p:sp>
+      <p:sp>
+        <p:nvSpPr>
+          <p:cNvPr id="4" name="Прямоугольник 3"/>
+          <p:cNvSpPr/>
+          <p:nvPr/>
+        </p:nvSpPr>
+        <p:spPr>
+          <a:xfrm>
+            <a:off x="820189" y="3383281"/>
+            <a:ext cx="4799215" cy="2408970"/>
+          </a:xfrm>
+          <a:prstGeom prst="rect">
+            <a:avLst/>
+          </a:prstGeom>
+        </p:spPr>
+        <p:txBody>
+          <a:bodyPr wrap="square">
+            <a:spAutoFit/>
+          </a:bodyPr>
+          <a:lstStyle/>
+          <a:p>
+            <a:pPr>
+              <a:lnSpc>
+                <a:spcPct val="150000"/>
+              </a:lnSpc>
+              <a:spcBef>
+                <a:spcPts val="1200"/>
+              </a:spcBef>
+              <a:spcAft>
+                <a:spcPts val="1200"/>
+              </a:spcAft>
+            </a:pPr>
+            <a:r>
+              <a:rPr lang="en-US" dirty="0" smtClean="0">
+                <a:solidFill>
+                  <a:schemeClr val="tx1"/>
+                </a:solidFill>
+                <a:latin typeface="Roboto" charset="0"/>
+                <a:ea typeface="Roboto" charset="0"/>
+              </a:rPr>
+              <a:t>-  </a:t>
+            </a:r>
+            <a:r>
+              <a:rPr lang="ru-RU" dirty="0" smtClean="0">
+                <a:solidFill>
+                  <a:schemeClr val="tx1"/>
+                </a:solidFill>
+                <a:latin typeface="Roboto" charset="0"/>
+                <a:ea typeface="Roboto" charset="0"/>
+              </a:rPr>
+              <a:t>Помогает </a:t>
+            </a:r>
+            <a:r>
+              <a:rPr lang="ru-RU" dirty="0" smtClean="0">
+                <a:solidFill>
+                  <a:schemeClr val="tx1"/>
+                </a:solidFill>
+                <a:latin typeface="Roboto" charset="0"/>
+                <a:ea typeface="Roboto" charset="0"/>
+              </a:rPr>
+              <a:t>удобно вести заметки, добавляя в них фото и интерактивные стикеры.</a:t>
+            </a:r>
+            <a:br>
+              <a:rPr lang="ru-RU" dirty="0" smtClean="0">
+                <a:solidFill>
+                  <a:schemeClr val="tx1"/>
+                </a:solidFill>
+                <a:latin typeface="Roboto" charset="0"/>
+                <a:ea typeface="Roboto" charset="0"/>
+              </a:rPr>
+            </a:br>
+            <a:r>
+              <a:rPr lang="ru-RU" dirty="0" smtClean="0">
+                <a:solidFill>
+                  <a:schemeClr val="tx1"/>
+                </a:solidFill>
+                <a:latin typeface="Roboto" charset="0"/>
+                <a:ea typeface="Roboto" charset="0"/>
+              </a:rPr>
+              <a:t>​</a:t>
+            </a:r>
+            <a:r>
+              <a:rPr lang="en-US" dirty="0" smtClean="0">
+                <a:solidFill>
+                  <a:schemeClr val="tx1"/>
+                </a:solidFill>
+                <a:latin typeface="Roboto" charset="0"/>
+                <a:ea typeface="Roboto" charset="0"/>
+              </a:rPr>
+              <a:t>-  </a:t>
+            </a:r>
+            <a:r>
+              <a:rPr lang="ru-RU" dirty="0" smtClean="0">
+                <a:solidFill>
+                  <a:schemeClr val="tx1"/>
+                </a:solidFill>
+                <a:latin typeface="Roboto" charset="0"/>
+                <a:ea typeface="Roboto" charset="0"/>
+              </a:rPr>
+              <a:t>Хранит все данные на устройстве и позволяет быстро находить нужные мысли.</a:t>
+            </a:r>
+            <a:br>
+              <a:rPr lang="ru-RU" dirty="0" smtClean="0">
+                <a:solidFill>
+                  <a:schemeClr val="tx1"/>
+                </a:solidFill>
+                <a:latin typeface="Roboto" charset="0"/>
+                <a:ea typeface="Roboto" charset="0"/>
+              </a:rPr>
+            </a:br>
+            <a:r>
+              <a:rPr lang="ru-RU" dirty="0" smtClean="0">
+                <a:solidFill>
+                  <a:schemeClr val="tx1"/>
+                </a:solidFill>
+                <a:latin typeface="Roboto" charset="0"/>
+                <a:ea typeface="Roboto" charset="0"/>
+              </a:rPr>
+              <a:t>​</a:t>
+            </a:r>
+            <a:r>
+              <a:rPr lang="en-US" dirty="0" smtClean="0">
+                <a:solidFill>
+                  <a:schemeClr val="tx1"/>
+                </a:solidFill>
+                <a:latin typeface="Roboto" charset="0"/>
+                <a:ea typeface="Roboto" charset="0"/>
+              </a:rPr>
+              <a:t>-  </a:t>
+            </a:r>
+            <a:r>
+              <a:rPr lang="ru-RU" dirty="0" smtClean="0">
+                <a:solidFill>
+                  <a:schemeClr val="tx1"/>
+                </a:solidFill>
+                <a:latin typeface="Roboto" charset="0"/>
+                <a:ea typeface="Roboto" charset="0"/>
+              </a:rPr>
+              <a:t>Помогает следить за своим настроением с помощью встроенных эмодзи</a:t>
+            </a:r>
+            <a:r>
+              <a:rPr lang="ru-RU" dirty="0" smtClean="0">
+                <a:solidFill>
+                  <a:schemeClr val="tx1"/>
+                </a:solidFill>
+                <a:latin typeface="Roboto" charset="0"/>
+                <a:ea typeface="Roboto" charset="0"/>
+              </a:rPr>
+              <a:t>.</a:t>
+            </a:r>
+            <a:endParaRPr lang="en-US" dirty="0" smtClean="0">
+              <a:solidFill>
+                <a:schemeClr val="tx1"/>
+              </a:solidFill>
+              <a:latin typeface="Roboto" charset="0"/>
+              <a:ea typeface="Roboto" charset="0"/>
+            </a:endParaRPr>
+          </a:p>
+          <a:p>
+            <a:pPr>
+              <a:buFontTx/>
+              <a:buChar char="-"/>
+            </a:pPr>
+            <a:endParaRPr lang="ru-RU" dirty="0"/>
           </a:p>
         </p:txBody>
       </p:sp>
@@ -7822,8 +8188,8 @@
         </p:nvSpPr>
         <p:spPr>
           <a:xfrm>
-            <a:off x="581025" y="1911927"/>
-            <a:ext cx="4897062" cy="4179606"/>
+            <a:off x="581025" y="1911928"/>
+            <a:ext cx="4897062" cy="1271117"/>
           </a:xfrm>
           <a:prstGeom prst="rect">
             <a:avLst/>
@@ -8079,278 +8445,6 @@
               </a:rPr>
               <a:t>:</a:t>
             </a:r>
-          </a:p>
-          <a:p>
-            <a:pPr lvl="0">
-              <a:lnSpc>
-                <a:spcPct val="140000"/>
-              </a:lnSpc>
-            </a:pPr>
-            <a:r>
-              <a:rPr lang="en-US" sz="1500" dirty="0" smtClean="0">
-                <a:solidFill>
-                  <a:schemeClr val="tx1"/>
-                </a:solidFill>
-                <a:latin typeface="Roboto" charset="0"/>
-                <a:ea typeface="Roboto" charset="0"/>
-              </a:rPr>
-              <a:t>- </a:t>
-            </a:r>
-            <a:r>
-              <a:rPr lang="ru-RU" sz="1500" dirty="0" smtClean="0">
-                <a:solidFill>
-                  <a:schemeClr val="tx1"/>
-                </a:solidFill>
-                <a:latin typeface="Roboto" charset="0"/>
-                <a:ea typeface="Roboto" charset="0"/>
-              </a:rPr>
-              <a:t>Успешный тест </a:t>
-            </a:r>
-            <a:r>
-              <a:rPr lang="ru-RU" sz="1500" dirty="0" err="1" smtClean="0">
-                <a:solidFill>
-                  <a:schemeClr val="tx1"/>
-                </a:solidFill>
-                <a:latin typeface="Roboto" charset="0"/>
-                <a:ea typeface="Roboto" charset="0"/>
-              </a:rPr>
-              <a:t>сериализации</a:t>
-            </a:r>
-            <a:r>
-              <a:rPr lang="ru-RU" sz="1500" dirty="0" smtClean="0">
-                <a:solidFill>
-                  <a:schemeClr val="tx1"/>
-                </a:solidFill>
-                <a:latin typeface="Roboto" charset="0"/>
-                <a:ea typeface="Roboto" charset="0"/>
-              </a:rPr>
-              <a:t> данных </a:t>
-            </a:r>
-            <a:r>
-              <a:rPr lang="ru-RU" sz="1500" dirty="0" err="1" smtClean="0">
-                <a:solidFill>
-                  <a:schemeClr val="tx1"/>
-                </a:solidFill>
-                <a:latin typeface="Roboto" charset="0"/>
-                <a:ea typeface="Roboto" charset="0"/>
-              </a:rPr>
-              <a:t>BlockContent</a:t>
-            </a:r>
-            <a:r>
-              <a:rPr lang="ru-RU" sz="1500" dirty="0" smtClean="0">
-                <a:solidFill>
-                  <a:schemeClr val="tx1"/>
-                </a:solidFill>
-                <a:latin typeface="Roboto" charset="0"/>
-                <a:ea typeface="Roboto" charset="0"/>
-              </a:rPr>
-              <a:t> в JSON для сохранения в память;</a:t>
-            </a:r>
-            <a:br>
-              <a:rPr lang="ru-RU" sz="1500" dirty="0" smtClean="0">
-                <a:solidFill>
-                  <a:schemeClr val="tx1"/>
-                </a:solidFill>
-                <a:latin typeface="Roboto" charset="0"/>
-                <a:ea typeface="Roboto" charset="0"/>
-              </a:rPr>
-            </a:br>
-            <a:r>
-              <a:rPr lang="ru-RU" sz="1500" dirty="0" smtClean="0">
-                <a:solidFill>
-                  <a:schemeClr val="tx1"/>
-                </a:solidFill>
-                <a:latin typeface="Roboto" charset="0"/>
-                <a:ea typeface="Roboto" charset="0"/>
-              </a:rPr>
-              <a:t>​</a:t>
-            </a:r>
-            <a:r>
-              <a:rPr lang="en-US" sz="1500" dirty="0" smtClean="0">
-                <a:solidFill>
-                  <a:schemeClr val="tx1"/>
-                </a:solidFill>
-                <a:latin typeface="Roboto" charset="0"/>
-                <a:ea typeface="Roboto" charset="0"/>
-              </a:rPr>
-              <a:t>- </a:t>
-            </a:r>
-            <a:r>
-              <a:rPr lang="ru-RU" sz="1500" dirty="0" err="1" smtClean="0">
-                <a:solidFill>
-                  <a:schemeClr val="tx1"/>
-                </a:solidFill>
-                <a:latin typeface="Roboto" charset="0"/>
-                <a:ea typeface="Roboto" charset="0"/>
-              </a:rPr>
-              <a:t>Валидация</a:t>
-            </a:r>
-            <a:r>
-              <a:rPr lang="ru-RU" sz="1500" dirty="0" smtClean="0">
-                <a:solidFill>
-                  <a:schemeClr val="tx1"/>
-                </a:solidFill>
-                <a:latin typeface="Roboto" charset="0"/>
-                <a:ea typeface="Roboto" charset="0"/>
-              </a:rPr>
-              <a:t> создания записи </a:t>
-            </a:r>
-            <a:r>
-              <a:rPr lang="ru-RU" sz="1500" dirty="0" err="1" smtClean="0">
-                <a:solidFill>
-                  <a:schemeClr val="tx1"/>
-                </a:solidFill>
-                <a:latin typeface="Roboto" charset="0"/>
-                <a:ea typeface="Roboto" charset="0"/>
-              </a:rPr>
-              <a:t>DiaryEntry</a:t>
-            </a:r>
-            <a:r>
-              <a:rPr lang="ru-RU" sz="1500" dirty="0" smtClean="0">
-                <a:solidFill>
-                  <a:schemeClr val="tx1"/>
-                </a:solidFill>
-                <a:latin typeface="Roboto" charset="0"/>
-                <a:ea typeface="Roboto" charset="0"/>
-              </a:rPr>
-              <a:t>;</a:t>
-            </a:r>
-            <a:br>
-              <a:rPr lang="ru-RU" sz="1500" dirty="0" smtClean="0">
-                <a:solidFill>
-                  <a:schemeClr val="tx1"/>
-                </a:solidFill>
-                <a:latin typeface="Roboto" charset="0"/>
-                <a:ea typeface="Roboto" charset="0"/>
-              </a:rPr>
-            </a:br>
-            <a:r>
-              <a:rPr lang="en-US" sz="1500" dirty="0" smtClean="0">
-                <a:solidFill>
-                  <a:schemeClr val="tx1"/>
-                </a:solidFill>
-                <a:latin typeface="Roboto" charset="0"/>
-                <a:ea typeface="Roboto" charset="0"/>
-              </a:rPr>
-              <a:t>- </a:t>
-            </a:r>
-            <a:r>
-              <a:rPr lang="ru-RU" sz="1500" dirty="0" smtClean="0">
-                <a:solidFill>
-                  <a:schemeClr val="tx1"/>
-                </a:solidFill>
-                <a:latin typeface="Roboto" charset="0"/>
-                <a:ea typeface="Roboto" charset="0"/>
-              </a:rPr>
-              <a:t>Проверка UI: блочный ввод текста, добавление фото и Drag &amp; Drop перемещение стикеров;</a:t>
-            </a:r>
-            <a:br>
-              <a:rPr lang="ru-RU" sz="1500" dirty="0" smtClean="0">
-                <a:solidFill>
-                  <a:schemeClr val="tx1"/>
-                </a:solidFill>
-                <a:latin typeface="Roboto" charset="0"/>
-                <a:ea typeface="Roboto" charset="0"/>
-              </a:rPr>
-            </a:br>
-            <a:r>
-              <a:rPr lang="ru-RU" sz="1500" dirty="0" smtClean="0">
-                <a:solidFill>
-                  <a:schemeClr val="tx1"/>
-                </a:solidFill>
-                <a:latin typeface="Roboto" charset="0"/>
-                <a:ea typeface="Roboto" charset="0"/>
-              </a:rPr>
-              <a:t>​</a:t>
-            </a:r>
-            <a:r>
-              <a:rPr lang="en-US" sz="1500" dirty="0" smtClean="0">
-                <a:solidFill>
-                  <a:schemeClr val="tx1"/>
-                </a:solidFill>
-                <a:latin typeface="Roboto" charset="0"/>
-                <a:ea typeface="Roboto" charset="0"/>
-              </a:rPr>
-              <a:t>- </a:t>
-            </a:r>
-            <a:r>
-              <a:rPr lang="ru-RU" sz="1500" dirty="0" smtClean="0">
-                <a:solidFill>
-                  <a:schemeClr val="tx1"/>
-                </a:solidFill>
-                <a:latin typeface="Roboto" charset="0"/>
-                <a:ea typeface="Roboto" charset="0"/>
-              </a:rPr>
-              <a:t>Проверка логики: сквозное автосохранение, </a:t>
-            </a:r>
-            <a:r>
-              <a:rPr lang="ru-RU" sz="1500" dirty="0" err="1" smtClean="0">
-                <a:solidFill>
-                  <a:schemeClr val="tx1"/>
-                </a:solidFill>
-                <a:latin typeface="Roboto" charset="0"/>
-                <a:ea typeface="Roboto" charset="0"/>
-              </a:rPr>
-              <a:t>real-time</a:t>
-            </a:r>
-            <a:r>
-              <a:rPr lang="ru-RU" sz="1500" dirty="0" smtClean="0">
-                <a:solidFill>
-                  <a:schemeClr val="tx1"/>
-                </a:solidFill>
-                <a:latin typeface="Roboto" charset="0"/>
-                <a:ea typeface="Roboto" charset="0"/>
-              </a:rPr>
-              <a:t> поиск и фильтрация по календарю;</a:t>
-            </a:r>
-            <a:br>
-              <a:rPr lang="ru-RU" sz="1500" dirty="0" smtClean="0">
-                <a:solidFill>
-                  <a:schemeClr val="tx1"/>
-                </a:solidFill>
-                <a:latin typeface="Roboto" charset="0"/>
-                <a:ea typeface="Roboto" charset="0"/>
-              </a:rPr>
-            </a:br>
-            <a:r>
-              <a:rPr lang="ru-RU" sz="1500" dirty="0" smtClean="0">
-                <a:solidFill>
-                  <a:schemeClr val="tx1"/>
-                </a:solidFill>
-                <a:latin typeface="Roboto" charset="0"/>
-                <a:ea typeface="Roboto" charset="0"/>
-              </a:rPr>
-              <a:t>​</a:t>
-            </a:r>
-            <a:r>
-              <a:rPr lang="en-US" sz="1500" dirty="0" smtClean="0">
-                <a:solidFill>
-                  <a:schemeClr val="tx1"/>
-                </a:solidFill>
-                <a:latin typeface="Roboto" charset="0"/>
-                <a:ea typeface="Roboto" charset="0"/>
-              </a:rPr>
-              <a:t>- </a:t>
-            </a:r>
-            <a:r>
-              <a:rPr lang="ru-RU" sz="1500" dirty="0" smtClean="0">
-                <a:solidFill>
-                  <a:schemeClr val="tx1"/>
-                </a:solidFill>
-                <a:latin typeface="Roboto" charset="0"/>
-                <a:ea typeface="Roboto" charset="0"/>
-              </a:rPr>
-              <a:t>Проверка настроек: моментальная смена 3 тем оформления и языков интерфейса.</a:t>
-            </a:r>
-            <a:endParaRPr lang="en-US" sz="1500" b="0" i="0" u="none" strike="noStrike" cap="none" dirty="0" smtClean="0">
-              <a:solidFill>
-                <a:schemeClr val="tx1"/>
-              </a:solidFill>
-              <a:latin typeface="Roboto" charset="0"/>
-              <a:ea typeface="Roboto" charset="0"/>
-              <a:cs typeface="Roboto"/>
-              <a:sym typeface="Roboto"/>
-            </a:endParaRPr>
           </a:p>
           <a:p>
             <a:pPr marL="0" marR="0" lvl="0" indent="0" algn="l" rtl="0">
@@ -8516,6 +8610,300 @@
           <a:noFill/>
         </p:spPr>
       </p:pic>
+      <p:sp>
+        <p:nvSpPr>
+          <p:cNvPr id="7" name="Прямоугольник 6"/>
+          <p:cNvSpPr/>
+          <p:nvPr/>
+        </p:nvSpPr>
+        <p:spPr>
+          <a:xfrm>
+            <a:off x="897774" y="2890063"/>
+            <a:ext cx="4322619" cy="3108543"/>
+          </a:xfrm>
+          <a:prstGeom prst="rect">
+            <a:avLst/>
+          </a:prstGeom>
+        </p:spPr>
+        <p:txBody>
+          <a:bodyPr wrap="square">
+            <a:spAutoFit/>
+          </a:bodyPr>
+          <a:lstStyle/>
+          <a:p>
+            <a:pPr lvl="0">
+              <a:lnSpc>
+                <a:spcPct val="140000"/>
+              </a:lnSpc>
+            </a:pPr>
+            <a:r>
+              <a:rPr lang="en-US" dirty="0" smtClean="0">
+                <a:solidFill>
+                  <a:schemeClr val="tx1"/>
+                </a:solidFill>
+                <a:latin typeface="Roboto" charset="0"/>
+                <a:ea typeface="Roboto" charset="0"/>
+              </a:rPr>
+              <a:t>-  </a:t>
+            </a:r>
+            <a:r>
+              <a:rPr lang="ru-RU" dirty="0" smtClean="0">
+                <a:solidFill>
+                  <a:schemeClr val="tx1"/>
+                </a:solidFill>
+                <a:latin typeface="Roboto" charset="0"/>
+                <a:ea typeface="Roboto" charset="0"/>
+              </a:rPr>
+              <a:t>Успешный тест </a:t>
+            </a:r>
+            <a:r>
+              <a:rPr lang="ru-RU" dirty="0" err="1" smtClean="0">
+                <a:solidFill>
+                  <a:schemeClr val="tx1"/>
+                </a:solidFill>
+                <a:latin typeface="Roboto" charset="0"/>
+                <a:ea typeface="Roboto" charset="0"/>
+              </a:rPr>
+              <a:t>сериализации</a:t>
+            </a:r>
+            <a:r>
+              <a:rPr lang="ru-RU" dirty="0" smtClean="0">
+                <a:solidFill>
+                  <a:schemeClr val="tx1"/>
+                </a:solidFill>
+                <a:latin typeface="Roboto" charset="0"/>
+                <a:ea typeface="Roboto" charset="0"/>
+              </a:rPr>
+              <a:t> данных </a:t>
+            </a:r>
+            <a:r>
+              <a:rPr lang="ru-RU" dirty="0" err="1" smtClean="0">
+                <a:solidFill>
+                  <a:schemeClr val="tx1"/>
+                </a:solidFill>
+                <a:latin typeface="Roboto" charset="0"/>
+                <a:ea typeface="Roboto" charset="0"/>
+              </a:rPr>
+              <a:t>BlockContent</a:t>
+            </a:r>
+            <a:r>
+              <a:rPr lang="ru-RU" dirty="0" smtClean="0">
+                <a:solidFill>
+                  <a:schemeClr val="tx1"/>
+                </a:solidFill>
+                <a:latin typeface="Roboto" charset="0"/>
+                <a:ea typeface="Roboto" charset="0"/>
+              </a:rPr>
+              <a:t> в JSON для сохранения в память;</a:t>
+            </a:r>
+            <a:br>
+              <a:rPr lang="ru-RU" dirty="0" smtClean="0">
+                <a:solidFill>
+                  <a:schemeClr val="tx1"/>
+                </a:solidFill>
+                <a:latin typeface="Roboto" charset="0"/>
+                <a:ea typeface="Roboto" charset="0"/>
+              </a:rPr>
+            </a:br>
+            <a:r>
+              <a:rPr lang="ru-RU" dirty="0" smtClean="0">
+                <a:solidFill>
+                  <a:schemeClr val="tx1"/>
+                </a:solidFill>
+                <a:latin typeface="Roboto" charset="0"/>
+                <a:ea typeface="Roboto" charset="0"/>
+              </a:rPr>
+              <a:t>​</a:t>
+            </a:r>
+            <a:r>
+              <a:rPr lang="en-US" dirty="0" smtClean="0">
+                <a:solidFill>
+                  <a:schemeClr val="tx1"/>
+                </a:solidFill>
+                <a:latin typeface="Roboto" charset="0"/>
+                <a:ea typeface="Roboto" charset="0"/>
+              </a:rPr>
+              <a:t>-  </a:t>
+            </a:r>
+            <a:r>
+              <a:rPr lang="ru-RU" dirty="0" err="1" smtClean="0">
+                <a:solidFill>
+                  <a:schemeClr val="tx1"/>
+                </a:solidFill>
+                <a:latin typeface="Roboto" charset="0"/>
+                <a:ea typeface="Roboto" charset="0"/>
+              </a:rPr>
+              <a:t>Валидация</a:t>
+            </a:r>
+            <a:r>
+              <a:rPr lang="ru-RU" dirty="0" smtClean="0">
+                <a:solidFill>
+                  <a:schemeClr val="tx1"/>
+                </a:solidFill>
+                <a:latin typeface="Roboto" charset="0"/>
+                <a:ea typeface="Roboto" charset="0"/>
+              </a:rPr>
+              <a:t> создания записи </a:t>
+            </a:r>
+            <a:r>
+              <a:rPr lang="ru-RU" dirty="0" err="1" smtClean="0">
+                <a:solidFill>
+                  <a:schemeClr val="tx1"/>
+                </a:solidFill>
+                <a:latin typeface="Roboto" charset="0"/>
+                <a:ea typeface="Roboto" charset="0"/>
+              </a:rPr>
+              <a:t>DiaryEntry</a:t>
+            </a:r>
+            <a:r>
+              <a:rPr lang="ru-RU" dirty="0" smtClean="0">
+                <a:solidFill>
+                  <a:schemeClr val="tx1"/>
+                </a:solidFill>
+                <a:latin typeface="Roboto" charset="0"/>
+                <a:ea typeface="Roboto" charset="0"/>
+              </a:rPr>
+              <a:t>;</a:t>
+            </a:r>
+            <a:br>
+              <a:rPr lang="ru-RU" dirty="0" smtClean="0">
+                <a:solidFill>
+                  <a:schemeClr val="tx1"/>
+                </a:solidFill>
+                <a:latin typeface="Roboto" charset="0"/>
+                <a:ea typeface="Roboto" charset="0"/>
+              </a:rPr>
+            </a:br>
+            <a:r>
+              <a:rPr lang="en-US" dirty="0" smtClean="0">
+                <a:solidFill>
+                  <a:schemeClr val="tx1"/>
+                </a:solidFill>
+                <a:latin typeface="Roboto" charset="0"/>
+                <a:ea typeface="Roboto" charset="0"/>
+              </a:rPr>
+              <a:t>-  </a:t>
+            </a:r>
+            <a:r>
+              <a:rPr lang="ru-RU" dirty="0" smtClean="0">
+                <a:solidFill>
+                  <a:schemeClr val="tx1"/>
+                </a:solidFill>
+                <a:latin typeface="Roboto" charset="0"/>
+                <a:ea typeface="Roboto" charset="0"/>
+              </a:rPr>
+              <a:t>Проверка UI: блочный ввод текста, добавление фото и Drag &amp; Drop перемещение стикеров;</a:t>
+            </a:r>
+            <a:br>
+              <a:rPr lang="ru-RU" dirty="0" smtClean="0">
+                <a:solidFill>
+                  <a:schemeClr val="tx1"/>
+                </a:solidFill>
+                <a:latin typeface="Roboto" charset="0"/>
+                <a:ea typeface="Roboto" charset="0"/>
+              </a:rPr>
+            </a:br>
+            <a:r>
+              <a:rPr lang="ru-RU" dirty="0" smtClean="0">
+                <a:solidFill>
+                  <a:schemeClr val="tx1"/>
+                </a:solidFill>
+                <a:latin typeface="Roboto" charset="0"/>
+                <a:ea typeface="Roboto" charset="0"/>
+              </a:rPr>
+              <a:t>​</a:t>
+            </a:r>
+            <a:r>
+              <a:rPr lang="en-US" dirty="0" smtClean="0">
+                <a:solidFill>
+                  <a:schemeClr val="tx1"/>
+                </a:solidFill>
+                <a:latin typeface="Roboto" charset="0"/>
+                <a:ea typeface="Roboto" charset="0"/>
+              </a:rPr>
+              <a:t>-  </a:t>
+            </a:r>
+            <a:r>
+              <a:rPr lang="ru-RU" dirty="0" smtClean="0">
+                <a:solidFill>
+                  <a:schemeClr val="tx1"/>
+                </a:solidFill>
+                <a:latin typeface="Roboto" charset="0"/>
+                <a:ea typeface="Roboto" charset="0"/>
+              </a:rPr>
+              <a:t>Проверка логики: сквозное автосохранение, </a:t>
+            </a:r>
+            <a:r>
+              <a:rPr lang="ru-RU" dirty="0" err="1" smtClean="0">
+                <a:solidFill>
+                  <a:schemeClr val="tx1"/>
+                </a:solidFill>
+                <a:latin typeface="Roboto" charset="0"/>
+                <a:ea typeface="Roboto" charset="0"/>
+              </a:rPr>
+              <a:t>real-time</a:t>
+            </a:r>
+            <a:r>
+              <a:rPr lang="ru-RU" dirty="0" smtClean="0">
+                <a:solidFill>
+                  <a:schemeClr val="tx1"/>
+                </a:solidFill>
+                <a:latin typeface="Roboto" charset="0"/>
+                <a:ea typeface="Roboto" charset="0"/>
+              </a:rPr>
+              <a:t> поиск и фильтрация по календарю;</a:t>
+            </a:r>
+            <a:br>
+              <a:rPr lang="ru-RU" dirty="0" smtClean="0">
+                <a:solidFill>
+                  <a:schemeClr val="tx1"/>
+                </a:solidFill>
+                <a:latin typeface="Roboto" charset="0"/>
+                <a:ea typeface="Roboto" charset="0"/>
+              </a:rPr>
+            </a:br>
+            <a:r>
+              <a:rPr lang="ru-RU" dirty="0" smtClean="0">
+                <a:solidFill>
+                  <a:schemeClr val="tx1"/>
+                </a:solidFill>
+                <a:latin typeface="Roboto" charset="0"/>
+                <a:ea typeface="Roboto" charset="0"/>
+              </a:rPr>
+              <a:t>​</a:t>
+            </a:r>
+            <a:r>
+              <a:rPr lang="en-US" dirty="0" smtClean="0">
+                <a:solidFill>
+                  <a:schemeClr val="tx1"/>
+                </a:solidFill>
+                <a:latin typeface="Roboto" charset="0"/>
+                <a:ea typeface="Roboto" charset="0"/>
+              </a:rPr>
+              <a:t>-  </a:t>
+            </a:r>
+            <a:r>
+              <a:rPr lang="ru-RU" dirty="0" smtClean="0">
+                <a:solidFill>
+                  <a:schemeClr val="tx1"/>
+                </a:solidFill>
+                <a:latin typeface="Roboto" charset="0"/>
+                <a:ea typeface="Roboto" charset="0"/>
+              </a:rPr>
+              <a:t>Проверка настроек: моментальная смена 3 тем оформления и языков интерфейса.</a:t>
+            </a:r>
+            <a:endParaRPr lang="en-US" dirty="0" smtClean="0">
+              <a:solidFill>
+                <a:schemeClr val="tx1"/>
+              </a:solidFill>
+              <a:latin typeface="Roboto" charset="0"/>
+              <a:ea typeface="Roboto" charset="0"/>
+              <a:cs typeface="Roboto"/>
+              <a:sym typeface="Roboto"/>
+            </a:endParaRPr>
+          </a:p>
+        </p:txBody>
+      </p:sp>
     </p:spTree>
   </p:cSld>
   <p:clrMapOvr>

--- a/документация/Презентация My Diary (не доделана).pptx
+++ b/документация/Презентация My Diary (не доделана).pptx
@@ -5,40 +5,42 @@
     <p:sldMasterId id="2147483660" r:id="rId1"/>
   </p:sldMasterIdLst>
   <p:notesMasterIdLst>
-    <p:notesMasterId r:id="rId9"/>
+    <p:notesMasterId r:id="rId11"/>
   </p:notesMasterIdLst>
   <p:sldIdLst>
     <p:sldId id="256" r:id="rId2"/>
     <p:sldId id="257" r:id="rId3"/>
     <p:sldId id="258" r:id="rId4"/>
     <p:sldId id="259" r:id="rId5"/>
-    <p:sldId id="263" r:id="rId6"/>
-    <p:sldId id="264" r:id="rId7"/>
-    <p:sldId id="265" r:id="rId8"/>
+    <p:sldId id="266" r:id="rId6"/>
+    <p:sldId id="267" r:id="rId7"/>
+    <p:sldId id="263" r:id="rId8"/>
+    <p:sldId id="264" r:id="rId9"/>
+    <p:sldId id="265" r:id="rId10"/>
   </p:sldIdLst>
   <p:sldSz cx="12192000" cy="6858000"/>
   <p:notesSz cx="6858000" cy="9144000"/>
   <p:embeddedFontLst>
     <p:embeddedFont>
       <p:font typeface="Roboto" charset="0"/>
-      <p:regular r:id="rId10"/>
-      <p:bold r:id="rId11"/>
-      <p:italic r:id="rId12"/>
-      <p:boldItalic r:id="rId13"/>
+      <p:regular r:id="rId12"/>
+      <p:bold r:id="rId13"/>
+      <p:italic r:id="rId14"/>
+      <p:boldItalic r:id="rId15"/>
     </p:embeddedFont>
     <p:embeddedFont>
       <p:font typeface="Calibri" pitchFamily="34" charset="0"/>
-      <p:regular r:id="rId14"/>
-      <p:bold r:id="rId15"/>
-      <p:italic r:id="rId16"/>
-      <p:boldItalic r:id="rId17"/>
+      <p:regular r:id="rId16"/>
+      <p:bold r:id="rId17"/>
+      <p:italic r:id="rId18"/>
+      <p:boldItalic r:id="rId19"/>
     </p:embeddedFont>
     <p:embeddedFont>
       <p:font typeface="Merriweather" charset="0"/>
-      <p:regular r:id="rId18"/>
-      <p:bold r:id="rId19"/>
-      <p:italic r:id="rId20"/>
-      <p:boldItalic r:id="rId21"/>
+      <p:regular r:id="rId20"/>
+      <p:bold r:id="rId21"/>
+      <p:italic r:id="rId22"/>
+      <p:boldItalic r:id="rId23"/>
     </p:embeddedFont>
   </p:embeddedFontLst>
   <p:defaultTextStyle>
@@ -272,7 +274,7 @@
   </p:defaultTextStyle>
   <p:extLst>
     <p:ext uri="{EFAFB233-063F-42B5-8137-9DF3F51BA10A}">
-      <p15:sldGuideLst xmlns:ahyp="http://schemas.microsoft.com/office/drawing/2018/hyperlinkcolor" xmlns:p15="http://schemas.microsoft.com/office/powerpoint/2012/main" xmlns:p14="http://schemas.microsoft.com/office/powerpoint/2010/main" xmlns:com="http://schemas.openxmlformats.org/drawingml/2006/compatibility" xmlns:pvml="urn:schemas-microsoft-com:office:powerpoint" xmlns:v="urn:schemas-microsoft-com:vml" xmlns:o="urn:schemas-microsoft-com:office:office" xmlns:dgm="http://schemas.openxmlformats.org/drawingml/2006/diagram" xmlns:c="http://schemas.openxmlformats.org/drawingml/2006/chart" xmlns:mv="urn:schemas-microsoft-com:mac:vml" xmlns:mc="http://schemas.openxmlformats.org/markup-compatibility/2006" xmlns="">
+      <p15:sldGuideLst xmlns="" xmlns:mc="http://schemas.openxmlformats.org/markup-compatibility/2006" xmlns:mv="urn:schemas-microsoft-com:mac:vml" xmlns:c="http://schemas.openxmlformats.org/drawingml/2006/chart" xmlns:dgm="http://schemas.openxmlformats.org/drawingml/2006/diagram" xmlns:o="urn:schemas-microsoft-com:office:office" xmlns:v="urn:schemas-microsoft-com:vml" xmlns:pvml="urn:schemas-microsoft-com:office:powerpoint" xmlns:com="http://schemas.openxmlformats.org/drawingml/2006/compatibility" xmlns:p14="http://schemas.microsoft.com/office/powerpoint/2010/main" xmlns:p15="http://schemas.microsoft.com/office/powerpoint/2012/main" xmlns:ahyp="http://schemas.microsoft.com/office/drawing/2018/hyperlinkcolor">
         <p15:guide id="1" orient="horz" pos="2160">
           <p15:clr>
             <a:srgbClr val="000000"/>
@@ -4788,7 +4790,7 @@
         <p:spPr>
           <a:xfrm>
             <a:off x="581025" y="2362200"/>
-            <a:ext cx="11029950" cy="784830"/>
+            <a:ext cx="11029950" cy="392415"/>
           </a:xfrm>
           <a:prstGeom prst="rect">
             <a:avLst/>
@@ -4814,7 +4816,7 @@
               <a:buNone/>
             </a:pPr>
             <a:r>
-              <a:rPr lang="en-US" sz="2550" b="1" i="0" u="none" strike="noStrike" cap="none" dirty="0" smtClean="0">
+              <a:rPr lang="ru-RU" sz="2550" b="1" dirty="0" err="1" smtClean="0">
                 <a:solidFill>
                   <a:srgbClr val="FFA709"/>
                 </a:solidFill>
@@ -4823,10 +4825,10 @@
                 <a:cs typeface="Roboto"/>
                 <a:sym typeface="Roboto"/>
               </a:rPr>
-              <a:t>Разработка</a:t>
-            </a:r>
-            <a:r>
-              <a:rPr lang="ru-RU" sz="2550" b="1" dirty="0" smtClean="0">
+              <a:t>К</a:t>
+            </a:r>
+            <a:r>
+              <a:rPr lang="ru-RU" sz="2550" b="1" dirty="0" err="1" smtClean="0">
                 <a:solidFill>
                   <a:srgbClr val="FFA709"/>
                 </a:solidFill>
@@ -4835,7 +4837,19 @@
                 <a:cs typeface="Roboto"/>
                 <a:sym typeface="Roboto"/>
               </a:rPr>
-              <a:t> кроссплатформенного программного обеспечения «</a:t>
+              <a:t>россплатформенное</a:t>
+            </a:r>
+            <a:r>
+              <a:rPr lang="ru-RU" sz="2550" b="1" dirty="0" smtClean="0">
+                <a:solidFill>
+                  <a:srgbClr val="FFA709"/>
+                </a:solidFill>
+                <a:latin typeface="Roboto"/>
+                <a:ea typeface="Roboto"/>
+                <a:cs typeface="Roboto"/>
+                <a:sym typeface="Roboto"/>
+              </a:rPr>
+              <a:t> приложение «</a:t>
             </a:r>
             <a:r>
               <a:rPr lang="en-US" sz="2550" b="1" dirty="0" smtClean="0">
@@ -5298,9 +5312,9 @@
                 <a:solidFill>
                   <a:schemeClr val="tx1"/>
                 </a:solidFill>
-                <a:latin typeface="Roboto" charset="0"/>
-                <a:ea typeface="Roboto" charset="0"/>
-                <a:cs typeface="Merriweather"/>
+                <a:latin typeface="Merriweather" charset="0"/>
+                <a:ea typeface="Merriweather" charset="0"/>
+                <a:cs typeface="Merriweather" charset="0"/>
                 <a:sym typeface="Merriweather"/>
               </a:rPr>
               <a:t>Цель</a:t>
@@ -5310,9 +5324,9 @@
                 <a:solidFill>
                   <a:schemeClr val="tx1"/>
                 </a:solidFill>
-                <a:latin typeface="Roboto" charset="0"/>
-                <a:ea typeface="Roboto" charset="0"/>
-                <a:cs typeface="Merriweather"/>
+                <a:latin typeface="Merriweather" charset="0"/>
+                <a:ea typeface="Merriweather" charset="0"/>
+                <a:cs typeface="Merriweather" charset="0"/>
                 <a:sym typeface="Merriweather"/>
               </a:rPr>
               <a:t>, </a:t>
@@ -5322,9 +5336,9 @@
                 <a:solidFill>
                   <a:schemeClr val="tx1"/>
                 </a:solidFill>
-                <a:latin typeface="Roboto" charset="0"/>
-                <a:ea typeface="Roboto" charset="0"/>
-                <a:cs typeface="Merriweather"/>
+                <a:latin typeface="Merriweather" charset="0"/>
+                <a:ea typeface="Merriweather" charset="0"/>
+                <a:cs typeface="Merriweather" charset="0"/>
                 <a:sym typeface="Merriweather"/>
               </a:rPr>
               <a:t>задачи</a:t>
@@ -5334,9 +5348,9 @@
                 <a:solidFill>
                   <a:schemeClr val="tx1"/>
                 </a:solidFill>
-                <a:latin typeface="Roboto" charset="0"/>
-                <a:ea typeface="Roboto" charset="0"/>
-                <a:cs typeface="Merriweather"/>
+                <a:latin typeface="Merriweather" charset="0"/>
+                <a:ea typeface="Merriweather" charset="0"/>
+                <a:cs typeface="Merriweather" charset="0"/>
                 <a:sym typeface="Merriweather"/>
               </a:rPr>
               <a:t> </a:t>
@@ -5346,9 +5360,9 @@
                 <a:solidFill>
                   <a:schemeClr val="tx1"/>
                 </a:solidFill>
-                <a:latin typeface="Roboto" charset="0"/>
-                <a:ea typeface="Roboto" charset="0"/>
-                <a:cs typeface="Merriweather"/>
+                <a:latin typeface="Merriweather" charset="0"/>
+                <a:ea typeface="Merriweather" charset="0"/>
+                <a:cs typeface="Merriweather" charset="0"/>
                 <a:sym typeface="Merriweather"/>
               </a:rPr>
               <a:t>проектного</a:t>
@@ -5358,9 +5372,9 @@
                 <a:solidFill>
                   <a:schemeClr val="tx1"/>
                 </a:solidFill>
-                <a:latin typeface="Roboto" charset="0"/>
-                <a:ea typeface="Roboto" charset="0"/>
-                <a:cs typeface="Merriweather"/>
+                <a:latin typeface="Merriweather" charset="0"/>
+                <a:ea typeface="Merriweather" charset="0"/>
+                <a:cs typeface="Merriweather" charset="0"/>
                 <a:sym typeface="Merriweather"/>
               </a:rPr>
               <a:t> </a:t>
@@ -5370,9 +5384,9 @@
                 <a:solidFill>
                   <a:schemeClr val="tx1"/>
                 </a:solidFill>
-                <a:latin typeface="Roboto" charset="0"/>
-                <a:ea typeface="Roboto" charset="0"/>
-                <a:cs typeface="Merriweather"/>
+                <a:latin typeface="Merriweather" charset="0"/>
+                <a:ea typeface="Merriweather" charset="0"/>
+                <a:cs typeface="Merriweather" charset="0"/>
                 <a:sym typeface="Merriweather"/>
               </a:rPr>
               <a:t>проектирования</a:t>
@@ -5381,8 +5395,9 @@
               <a:solidFill>
                 <a:schemeClr val="tx1"/>
               </a:solidFill>
-              <a:latin typeface="Roboto" charset="0"/>
-              <a:ea typeface="Roboto" charset="0"/>
+              <a:latin typeface="Merriweather" charset="0"/>
+              <a:ea typeface="Merriweather" charset="0"/>
+              <a:cs typeface="Merriweather" charset="0"/>
             </a:endParaRPr>
           </a:p>
         </p:txBody>
@@ -5720,18 +5735,7 @@
                 <a:ea typeface="Roboto" charset="0"/>
                 <a:cs typeface="Arial" pitchFamily="34" charset="0"/>
               </a:rPr>
-              <a:t>Проектирование </a:t>
-            </a:r>
-            <a:r>
-              <a:rPr lang="ru-RU" sz="1500" dirty="0" smtClean="0">
-                <a:solidFill>
-                  <a:schemeClr val="tx1"/>
-                </a:solidFill>
-                <a:latin typeface="Roboto" charset="0"/>
-                <a:ea typeface="Roboto" charset="0"/>
-                <a:cs typeface="Arial" pitchFamily="34" charset="0"/>
-              </a:rPr>
-              <a:t>UI на базе </a:t>
+              <a:t>Проектирование UI на базе </a:t>
             </a:r>
             <a:r>
               <a:rPr lang="ru-RU" sz="1500" dirty="0" err="1" smtClean="0">
@@ -5812,18 +5816,7 @@
                 <a:ea typeface="Roboto" charset="0"/>
                 <a:cs typeface="Arial" pitchFamily="34" charset="0"/>
               </a:rPr>
-              <a:t>Реализация </a:t>
-            </a:r>
-            <a:r>
-              <a:rPr lang="ru-RU" sz="1500" dirty="0" smtClean="0">
-                <a:solidFill>
-                  <a:schemeClr val="tx1"/>
-                </a:solidFill>
-                <a:latin typeface="Roboto" charset="0"/>
-                <a:ea typeface="Roboto" charset="0"/>
-                <a:cs typeface="Arial" pitchFamily="34" charset="0"/>
-              </a:rPr>
-              <a:t>локального хранилища JSON.</a:t>
+              <a:t>Реализация локального хранилища JSON.</a:t>
             </a:r>
             <a:endParaRPr lang="en-US" sz="1500" dirty="0" smtClean="0">
               <a:solidFill>
@@ -5882,18 +5875,7 @@
                 <a:ea typeface="Roboto" charset="0"/>
                 <a:cs typeface="Arial" pitchFamily="34" charset="0"/>
               </a:rPr>
-              <a:t>Разработка </a:t>
-            </a:r>
-            <a:r>
-              <a:rPr lang="ru-RU" sz="1500" dirty="0" smtClean="0">
-                <a:solidFill>
-                  <a:schemeClr val="tx1"/>
-                </a:solidFill>
-                <a:latin typeface="Roboto" charset="0"/>
-                <a:ea typeface="Roboto" charset="0"/>
-                <a:cs typeface="Arial" pitchFamily="34" charset="0"/>
-              </a:rPr>
-              <a:t>блочного редактора контента.</a:t>
+              <a:t>Разработка блочного редактора контента.</a:t>
             </a:r>
             <a:endParaRPr lang="en-US" sz="1500" dirty="0" smtClean="0">
               <a:solidFill>
@@ -5952,18 +5934,7 @@
                 <a:ea typeface="Roboto" charset="0"/>
                 <a:cs typeface="Arial" pitchFamily="34" charset="0"/>
               </a:rPr>
-              <a:t>Создание </a:t>
-            </a:r>
-            <a:r>
-              <a:rPr lang="ru-RU" sz="1500" dirty="0" smtClean="0">
-                <a:solidFill>
-                  <a:schemeClr val="tx1"/>
-                </a:solidFill>
-                <a:latin typeface="Roboto" charset="0"/>
-                <a:ea typeface="Roboto" charset="0"/>
-                <a:cs typeface="Arial" pitchFamily="34" charset="0"/>
-              </a:rPr>
-              <a:t>интерактивной системы стикеров.</a:t>
+              <a:t>Создание интерактивной системы стикеров.</a:t>
             </a:r>
             <a:endParaRPr lang="en-US" sz="1500" dirty="0" smtClean="0">
               <a:solidFill>
@@ -6022,18 +5993,7 @@
                 <a:ea typeface="Roboto" charset="0"/>
                 <a:cs typeface="Arial" pitchFamily="34" charset="0"/>
               </a:rPr>
-              <a:t>Интеграция </a:t>
-            </a:r>
-            <a:r>
-              <a:rPr lang="ru-RU" sz="1500" dirty="0" smtClean="0">
-                <a:solidFill>
-                  <a:schemeClr val="tx1"/>
-                </a:solidFill>
-                <a:latin typeface="Roboto" charset="0"/>
-                <a:ea typeface="Roboto" charset="0"/>
-                <a:cs typeface="Arial" pitchFamily="34" charset="0"/>
-              </a:rPr>
-              <a:t>системы тем и локализации.</a:t>
+              <a:t>Интеграция системы тем и локализации.</a:t>
             </a:r>
             <a:endParaRPr sz="1500">
               <a:solidFill>
@@ -6117,9 +6077,9 @@
                 <a:solidFill>
                   <a:schemeClr val="tx1"/>
                 </a:solidFill>
-                <a:latin typeface="Roboto" charset="0"/>
-                <a:ea typeface="Roboto" charset="0"/>
-                <a:cs typeface="Merriweather"/>
+                <a:latin typeface="Merriweather" charset="0"/>
+                <a:ea typeface="Merriweather" charset="0"/>
+                <a:cs typeface="Merriweather" charset="0"/>
                 <a:sym typeface="Merriweather"/>
               </a:rPr>
               <a:t>Описание</a:t>
@@ -6129,9 +6089,9 @@
                 <a:solidFill>
                   <a:schemeClr val="tx1"/>
                 </a:solidFill>
-                <a:latin typeface="Roboto" charset="0"/>
-                <a:ea typeface="Roboto" charset="0"/>
-                <a:cs typeface="Merriweather"/>
+                <a:latin typeface="Merriweather" charset="0"/>
+                <a:ea typeface="Merriweather" charset="0"/>
+                <a:cs typeface="Merriweather" charset="0"/>
                 <a:sym typeface="Merriweather"/>
               </a:rPr>
               <a:t> </a:t>
@@ -6141,9 +6101,9 @@
                 <a:solidFill>
                   <a:schemeClr val="tx1"/>
                 </a:solidFill>
-                <a:latin typeface="Roboto" charset="0"/>
-                <a:ea typeface="Roboto" charset="0"/>
-                <a:cs typeface="Merriweather"/>
+                <a:latin typeface="Merriweather" charset="0"/>
+                <a:ea typeface="Merriweather" charset="0"/>
+                <a:cs typeface="Merriweather" charset="0"/>
                 <a:sym typeface="Merriweather"/>
               </a:rPr>
               <a:t>предметной</a:t>
@@ -6153,9 +6113,9 @@
                 <a:solidFill>
                   <a:schemeClr val="tx1"/>
                 </a:solidFill>
-                <a:latin typeface="Roboto" charset="0"/>
-                <a:ea typeface="Roboto" charset="0"/>
-                <a:cs typeface="Merriweather"/>
+                <a:latin typeface="Merriweather" charset="0"/>
+                <a:ea typeface="Merriweather" charset="0"/>
+                <a:cs typeface="Merriweather" charset="0"/>
                 <a:sym typeface="Merriweather"/>
               </a:rPr>
               <a:t> </a:t>
@@ -6165,9 +6125,9 @@
                 <a:solidFill>
                   <a:schemeClr val="tx1"/>
                 </a:solidFill>
-                <a:latin typeface="Roboto" charset="0"/>
-                <a:ea typeface="Roboto" charset="0"/>
-                <a:cs typeface="Merriweather"/>
+                <a:latin typeface="Merriweather" charset="0"/>
+                <a:ea typeface="Merriweather" charset="0"/>
+                <a:cs typeface="Merriweather" charset="0"/>
                 <a:sym typeface="Merriweather"/>
               </a:rPr>
               <a:t>области</a:t>
@@ -6176,8 +6136,9 @@
               <a:solidFill>
                 <a:schemeClr val="tx1"/>
               </a:solidFill>
-              <a:latin typeface="Roboto" charset="0"/>
-              <a:ea typeface="Roboto" charset="0"/>
+              <a:latin typeface="Merriweather" charset="0"/>
+              <a:ea typeface="Merriweather" charset="0"/>
+              <a:cs typeface="Merriweather" charset="0"/>
             </a:endParaRPr>
           </a:p>
         </p:txBody>
@@ -6244,27 +6205,7 @@
                 <a:latin typeface="Roboto" charset="0"/>
                 <a:ea typeface="Roboto" charset="0"/>
               </a:rPr>
-              <a:t>Создание </a:t>
-            </a:r>
-            <a:r>
-              <a:rPr lang="ru-RU" sz="1500" dirty="0" smtClean="0">
-                <a:solidFill>
-                  <a:schemeClr val="tx1"/>
-                </a:solidFill>
-                <a:latin typeface="Roboto" charset="0"/>
-                <a:ea typeface="Roboto" charset="0"/>
-              </a:rPr>
-              <a:t>личного цифрового дневника для записей и самоанализа</a:t>
-            </a:r>
-            <a:r>
-              <a:rPr lang="ru-RU" sz="1500" dirty="0" smtClean="0">
-                <a:solidFill>
-                  <a:schemeClr val="tx1"/>
-                </a:solidFill>
-                <a:latin typeface="Roboto" charset="0"/>
-                <a:ea typeface="Roboto" charset="0"/>
-              </a:rPr>
-              <a:t>.</a:t>
+              <a:t>Создание личного цифрового дневника для записей и самоанализа.</a:t>
             </a:r>
             <a:endParaRPr lang="en-US" sz="1500" dirty="0" smtClean="0">
               <a:solidFill>
@@ -6408,9 +6349,9 @@
                 <a:latin typeface="Roboto" charset="0"/>
                 <a:ea typeface="Roboto" charset="0"/>
               </a:rPr>
-              <a:t>Помогает </a:t>
-            </a:r>
-            <a:r>
+              <a:t>Помогает удобно вести заметки, добавляя в них фото и интерактивные стикеры.</a:t>
+            </a:r>
+            <a:br>
               <a:rPr lang="ru-RU" dirty="0" smtClean="0">
                 <a:solidFill>
                   <a:schemeClr val="tx1"/>
@@ -6418,7 +6359,36 @@
                 <a:latin typeface="Roboto" charset="0"/>
                 <a:ea typeface="Roboto" charset="0"/>
               </a:rPr>
-              <a:t>удобно вести заметки, добавляя в них фото и интерактивные стикеры.</a:t>
+            </a:br>
+            <a:r>
+              <a:rPr lang="ru-RU" dirty="0" smtClean="0">
+                <a:solidFill>
+                  <a:schemeClr val="tx1"/>
+                </a:solidFill>
+                <a:latin typeface="Roboto" charset="0"/>
+                <a:ea typeface="Roboto" charset="0"/>
+              </a:rPr>
+              <a:t>​</a:t>
+            </a:r>
+            <a:r>
+              <a:rPr lang="en-US" dirty="0" smtClean="0">
+                <a:solidFill>
+                  <a:schemeClr val="tx1"/>
+                </a:solidFill>
+                <a:latin typeface="Roboto" charset="0"/>
+                <a:ea typeface="Roboto" charset="0"/>
+              </a:rPr>
+              <a:t>-  </a:t>
+            </a:r>
+            <a:r>
+              <a:rPr lang="ru-RU" dirty="0" smtClean="0">
+                <a:solidFill>
+                  <a:schemeClr val="tx1"/>
+                </a:solidFill>
+                <a:latin typeface="Roboto" charset="0"/>
+                <a:ea typeface="Roboto" charset="0"/>
+              </a:rPr>
+              <a:t>Хранит все данные на устройстве и позволяет быстро находить нужные мысли.</a:t>
             </a:r>
             <a:br>
               <a:rPr lang="ru-RU" dirty="0" smtClean="0">
@@ -6457,56 +6427,7 @@
                 <a:latin typeface="Roboto" charset="0"/>
                 <a:ea typeface="Roboto" charset="0"/>
               </a:rPr>
-              <a:t>Хранит все данные на устройстве и позволяет быстро находить нужные мысли.</a:t>
-            </a:r>
-            <a:br>
-              <a:rPr lang="ru-RU" dirty="0" smtClean="0">
-                <a:solidFill>
-                  <a:schemeClr val="tx1"/>
-                </a:solidFill>
-                <a:latin typeface="Roboto" charset="0"/>
-                <a:ea typeface="Roboto" charset="0"/>
-              </a:rPr>
-            </a:br>
-            <a:r>
-              <a:rPr lang="ru-RU" dirty="0" smtClean="0">
-                <a:solidFill>
-                  <a:schemeClr val="tx1"/>
-                </a:solidFill>
-                <a:latin typeface="Roboto" charset="0"/>
-                <a:ea typeface="Roboto" charset="0"/>
-              </a:rPr>
-              <a:t>​</a:t>
-            </a:r>
-            <a:r>
-              <a:rPr lang="en-US" dirty="0" smtClean="0">
-                <a:solidFill>
-                  <a:schemeClr val="tx1"/>
-                </a:solidFill>
-                <a:latin typeface="Roboto" charset="0"/>
-                <a:ea typeface="Roboto" charset="0"/>
-              </a:rPr>
-              <a:t>-  </a:t>
-            </a:r>
-            <a:r>
-              <a:rPr lang="ru-RU" dirty="0" smtClean="0">
-                <a:solidFill>
-                  <a:schemeClr val="tx1"/>
-                </a:solidFill>
-                <a:latin typeface="Roboto" charset="0"/>
-                <a:ea typeface="Roboto" charset="0"/>
-              </a:rPr>
-              <a:t>Помогает следить за своим настроением с помощью встроенных эмодзи</a:t>
-            </a:r>
-            <a:r>
-              <a:rPr lang="ru-RU" dirty="0" smtClean="0">
-                <a:solidFill>
-                  <a:schemeClr val="tx1"/>
-                </a:solidFill>
-                <a:latin typeface="Roboto" charset="0"/>
-                <a:ea typeface="Roboto" charset="0"/>
-              </a:rPr>
-              <a:t>.</a:t>
+              <a:t>Помогает следить за своим настроением с помощью встроенных эмодзи.</a:t>
             </a:r>
             <a:endParaRPr lang="en-US" dirty="0" smtClean="0">
               <a:solidFill>
@@ -6596,9 +6517,9 @@
                 <a:solidFill>
                   <a:schemeClr val="tx1"/>
                 </a:solidFill>
-                <a:latin typeface="Roboto" charset="0"/>
-                <a:ea typeface="Roboto" charset="0"/>
-                <a:cs typeface="Merriweather"/>
+                <a:latin typeface="Merriweather" charset="0"/>
+                <a:ea typeface="Merriweather" charset="0"/>
+                <a:cs typeface="Merriweather" charset="0"/>
                 <a:sym typeface="Merriweather"/>
               </a:rPr>
               <a:t>Инструментальные</a:t>
@@ -6608,9 +6529,9 @@
                 <a:solidFill>
                   <a:schemeClr val="tx1"/>
                 </a:solidFill>
-                <a:latin typeface="Roboto" charset="0"/>
-                <a:ea typeface="Roboto" charset="0"/>
-                <a:cs typeface="Merriweather"/>
+                <a:latin typeface="Merriweather" charset="0"/>
+                <a:ea typeface="Merriweather" charset="0"/>
+                <a:cs typeface="Merriweather" charset="0"/>
                 <a:sym typeface="Merriweather"/>
               </a:rPr>
               <a:t> </a:t>
@@ -6620,9 +6541,9 @@
                 <a:solidFill>
                   <a:schemeClr val="tx1"/>
                 </a:solidFill>
-                <a:latin typeface="Roboto" charset="0"/>
-                <a:ea typeface="Roboto" charset="0"/>
-                <a:cs typeface="Merriweather"/>
+                <a:latin typeface="Merriweather" charset="0"/>
+                <a:ea typeface="Merriweather" charset="0"/>
+                <a:cs typeface="Merriweather" charset="0"/>
                 <a:sym typeface="Merriweather"/>
               </a:rPr>
               <a:t>средства</a:t>
@@ -6632,9 +6553,9 @@
                 <a:solidFill>
                   <a:schemeClr val="tx1"/>
                 </a:solidFill>
-                <a:latin typeface="Roboto" charset="0"/>
-                <a:ea typeface="Roboto" charset="0"/>
-                <a:cs typeface="Merriweather"/>
+                <a:latin typeface="Merriweather" charset="0"/>
+                <a:ea typeface="Merriweather" charset="0"/>
+                <a:cs typeface="Merriweather" charset="0"/>
                 <a:sym typeface="Merriweather"/>
               </a:rPr>
               <a:t> </a:t>
@@ -6644,9 +6565,9 @@
                 <a:solidFill>
                   <a:schemeClr val="tx1"/>
                 </a:solidFill>
-                <a:latin typeface="Roboto" charset="0"/>
-                <a:ea typeface="Roboto" charset="0"/>
-                <a:cs typeface="Merriweather"/>
+                <a:latin typeface="Merriweather" charset="0"/>
+                <a:ea typeface="Merriweather" charset="0"/>
+                <a:cs typeface="Merriweather" charset="0"/>
                 <a:sym typeface="Merriweather"/>
               </a:rPr>
               <a:t>разработки</a:t>
@@ -6655,8 +6576,9 @@
               <a:solidFill>
                 <a:schemeClr val="tx1"/>
               </a:solidFill>
-              <a:latin typeface="Roboto" charset="0"/>
-              <a:ea typeface="Roboto" charset="0"/>
+              <a:latin typeface="Merriweather" charset="0"/>
+              <a:ea typeface="Merriweather" charset="0"/>
+              <a:cs typeface="Merriweather" charset="0"/>
             </a:endParaRPr>
           </a:p>
         </p:txBody>
@@ -8010,6 +7932,170 @@
   <p:cSld>
     <p:spTree>
       <p:nvGrpSpPr>
+        <p:cNvPr id="1" name=""/>
+        <p:cNvGrpSpPr/>
+        <p:nvPr/>
+      </p:nvGrpSpPr>
+      <p:grpSpPr>
+        <a:xfrm>
+          <a:off x="0" y="0"/>
+          <a:ext cx="0" cy="0"/>
+          <a:chOff x="0" y="0"/>
+          <a:chExt cx="0" cy="0"/>
+        </a:xfrm>
+      </p:grpSpPr>
+      <p:sp>
+        <p:nvSpPr>
+          <p:cNvPr id="2" name="Прямоугольник 1"/>
+          <p:cNvSpPr/>
+          <p:nvPr/>
+        </p:nvSpPr>
+        <p:spPr>
+          <a:xfrm>
+            <a:off x="615142" y="465513"/>
+            <a:ext cx="7564582" cy="507831"/>
+          </a:xfrm>
+          <a:prstGeom prst="rect">
+            <a:avLst/>
+          </a:prstGeom>
+        </p:spPr>
+        <p:txBody>
+          <a:bodyPr wrap="square">
+            <a:spAutoFit/>
+          </a:bodyPr>
+          <a:lstStyle/>
+          <a:p>
+            <a:pPr lvl="0"/>
+            <a:r>
+              <a:rPr lang="ru-RU" sz="2700" b="1" dirty="0" smtClean="0">
+                <a:solidFill>
+                  <a:schemeClr val="tx1"/>
+                </a:solidFill>
+                <a:latin typeface="Merriweather" charset="0"/>
+                <a:ea typeface="Merriweather" charset="0"/>
+                <a:cs typeface="Merriweather" charset="0"/>
+                <a:sym typeface="Merriweather"/>
+              </a:rPr>
+              <a:t>---</a:t>
+            </a:r>
+            <a:endParaRPr lang="ru-RU" sz="2700" b="1" dirty="0">
+              <a:solidFill>
+                <a:schemeClr val="tx1"/>
+              </a:solidFill>
+              <a:latin typeface="Merriweather" charset="0"/>
+              <a:ea typeface="Merriweather" charset="0"/>
+              <a:cs typeface="Merriweather" charset="0"/>
+            </a:endParaRPr>
+          </a:p>
+        </p:txBody>
+      </p:sp>
+    </p:spTree>
+  </p:cSld>
+  <p:clrMapOvr>
+    <a:masterClrMapping/>
+  </p:clrMapOvr>
+</p:sld>
+</file>
+
+<file path=ppt/slides/slide6.xml><?xml version="1.0" encoding="utf-8"?>
+<p:sld xmlns:a="http://schemas.openxmlformats.org/drawingml/2006/main" xmlns:r="http://schemas.openxmlformats.org/officeDocument/2006/relationships" xmlns:p="http://schemas.openxmlformats.org/presentationml/2006/main">
+  <p:cSld>
+    <p:spTree>
+      <p:nvGrpSpPr>
+        <p:cNvPr id="1" name=""/>
+        <p:cNvGrpSpPr/>
+        <p:nvPr/>
+      </p:nvGrpSpPr>
+      <p:grpSpPr>
+        <a:xfrm>
+          <a:off x="0" y="0"/>
+          <a:ext cx="0" cy="0"/>
+          <a:chOff x="0" y="0"/>
+          <a:chExt cx="0" cy="0"/>
+        </a:xfrm>
+      </p:grpSpPr>
+      <p:sp>
+        <p:nvSpPr>
+          <p:cNvPr id="2" name="Прямоугольник 1"/>
+          <p:cNvSpPr/>
+          <p:nvPr/>
+        </p:nvSpPr>
+        <p:spPr>
+          <a:xfrm>
+            <a:off x="615142" y="465513"/>
+            <a:ext cx="7564582" cy="507831"/>
+          </a:xfrm>
+          <a:prstGeom prst="rect">
+            <a:avLst/>
+          </a:prstGeom>
+        </p:spPr>
+        <p:txBody>
+          <a:bodyPr wrap="square">
+            <a:spAutoFit/>
+          </a:bodyPr>
+          <a:lstStyle/>
+          <a:p>
+            <a:pPr lvl="0"/>
+            <a:r>
+              <a:rPr lang="ru-RU" sz="2700" b="1" dirty="0" smtClean="0">
+                <a:solidFill>
+                  <a:schemeClr val="tx1"/>
+                </a:solidFill>
+                <a:latin typeface="Merriweather" charset="0"/>
+                <a:ea typeface="Merriweather" charset="0"/>
+                <a:cs typeface="Merriweather" charset="0"/>
+                <a:sym typeface="Merriweather"/>
+              </a:rPr>
+              <a:t>Описание таблиц </a:t>
+            </a:r>
+            <a:r>
+              <a:rPr lang="en-US" sz="2700" b="1" dirty="0" smtClean="0">
+                <a:solidFill>
+                  <a:schemeClr val="tx1"/>
+                </a:solidFill>
+                <a:latin typeface="Merriweather" charset="0"/>
+                <a:ea typeface="Merriweather" charset="0"/>
+                <a:cs typeface="Merriweather" charset="0"/>
+                <a:sym typeface="Merriweather"/>
+              </a:rPr>
+              <a:t>ER-</a:t>
+            </a:r>
+            <a:r>
+              <a:rPr lang="ru-RU" sz="2700" b="1" dirty="0" smtClean="0">
+                <a:solidFill>
+                  <a:schemeClr val="tx1"/>
+                </a:solidFill>
+                <a:latin typeface="Merriweather" charset="0"/>
+                <a:ea typeface="Merriweather" charset="0"/>
+                <a:cs typeface="Merriweather" charset="0"/>
+                <a:sym typeface="Merriweather"/>
+              </a:rPr>
+              <a:t>модели</a:t>
+            </a:r>
+            <a:endParaRPr lang="ru-RU" sz="2700" b="1" dirty="0">
+              <a:solidFill>
+                <a:schemeClr val="tx1"/>
+              </a:solidFill>
+              <a:latin typeface="Merriweather" charset="0"/>
+              <a:ea typeface="Merriweather" charset="0"/>
+              <a:cs typeface="Merriweather" charset="0"/>
+            </a:endParaRPr>
+          </a:p>
+        </p:txBody>
+      </p:sp>
+    </p:spTree>
+  </p:cSld>
+  <p:clrMapOvr>
+    <a:masterClrMapping/>
+  </p:clrMapOvr>
+</p:sld>
+</file>
+
+<file path=ppt/slides/slide7.xml><?xml version="1.0" encoding="utf-8"?>
+<p:sld xmlns:a="http://schemas.openxmlformats.org/drawingml/2006/main" xmlns:r="http://schemas.openxmlformats.org/officeDocument/2006/relationships" xmlns:p="http://schemas.openxmlformats.org/presentationml/2006/main">
+  <p:cSld>
+    <p:spTree>
+      <p:nvGrpSpPr>
         <p:cNvPr id="1" name="Shape 167"/>
         <p:cNvGrpSpPr/>
         <p:nvPr/>
@@ -8919,7 +9005,7 @@
 </p:sld>
 </file>
 
-<file path=ppt/slides/slide6.xml><?xml version="1.0" encoding="utf-8"?>
+<file path=ppt/slides/slide8.xml><?xml version="1.0" encoding="utf-8"?>
 <p:sld xmlns:a="http://schemas.openxmlformats.org/drawingml/2006/main" xmlns:r="http://schemas.openxmlformats.org/officeDocument/2006/relationships" xmlns:p="http://schemas.openxmlformats.org/presentationml/2006/main">
   <p:cSld>
     <p:spTree>
@@ -8945,7 +9031,7 @@
         <p:spPr>
           <a:xfrm>
             <a:off x="305251" y="2736300"/>
-            <a:ext cx="11581500" cy="677108"/>
+            <a:ext cx="11581500" cy="1354217"/>
           </a:xfrm>
           <a:prstGeom prst="rect">
             <a:avLst/>
@@ -8975,9 +9061,9 @@
                 <a:solidFill>
                   <a:schemeClr val="tx1"/>
                 </a:solidFill>
-                <a:latin typeface="Roboto" charset="0"/>
-                <a:ea typeface="Roboto" charset="0"/>
-                <a:cs typeface="Merriweather"/>
+                <a:latin typeface="Merriweather" charset="0"/>
+                <a:ea typeface="Merriweather" charset="0"/>
+                <a:cs typeface="Merriweather" charset="0"/>
                 <a:sym typeface="Merriweather"/>
               </a:rPr>
               <a:t>Демонстрация</a:t>
@@ -8987,9 +9073,9 @@
                 <a:solidFill>
                   <a:schemeClr val="tx1"/>
                 </a:solidFill>
-                <a:latin typeface="Roboto" charset="0"/>
-                <a:ea typeface="Roboto" charset="0"/>
-                <a:cs typeface="Merriweather"/>
+                <a:latin typeface="Merriweather" charset="0"/>
+                <a:ea typeface="Merriweather" charset="0"/>
+                <a:cs typeface="Merriweather" charset="0"/>
                 <a:sym typeface="Merriweather"/>
               </a:rPr>
               <a:t> </a:t>
@@ -8999,9 +9085,9 @@
                 <a:solidFill>
                   <a:schemeClr val="tx1"/>
                 </a:solidFill>
-                <a:latin typeface="Roboto" charset="0"/>
-                <a:ea typeface="Roboto" charset="0"/>
-                <a:cs typeface="Merriweather"/>
+                <a:latin typeface="Merriweather" charset="0"/>
+                <a:ea typeface="Merriweather" charset="0"/>
+                <a:cs typeface="Merriweather" charset="0"/>
                 <a:sym typeface="Merriweather"/>
               </a:rPr>
               <a:t>программного</a:t>
@@ -9011,9 +9097,9 @@
                 <a:solidFill>
                   <a:schemeClr val="tx1"/>
                 </a:solidFill>
-                <a:latin typeface="Roboto" charset="0"/>
-                <a:ea typeface="Roboto" charset="0"/>
-                <a:cs typeface="Merriweather"/>
+                <a:latin typeface="Merriweather" charset="0"/>
+                <a:ea typeface="Merriweather" charset="0"/>
+                <a:cs typeface="Merriweather" charset="0"/>
                 <a:sym typeface="Merriweather"/>
               </a:rPr>
               <a:t> </a:t>
@@ -9023,9 +9109,9 @@
                 <a:solidFill>
                   <a:schemeClr val="tx1"/>
                 </a:solidFill>
-                <a:latin typeface="Roboto" charset="0"/>
-                <a:ea typeface="Roboto" charset="0"/>
-                <a:cs typeface="Merriweather"/>
+                <a:latin typeface="Merriweather" charset="0"/>
+                <a:ea typeface="Merriweather" charset="0"/>
+                <a:cs typeface="Merriweather" charset="0"/>
                 <a:sym typeface="Merriweather"/>
               </a:rPr>
               <a:t>продукта</a:t>
@@ -9034,8 +9120,9 @@
               <a:solidFill>
                 <a:schemeClr val="tx1"/>
               </a:solidFill>
-              <a:latin typeface="Roboto" charset="0"/>
-              <a:ea typeface="Roboto" charset="0"/>
+              <a:latin typeface="Merriweather" charset="0"/>
+              <a:ea typeface="Merriweather" charset="0"/>
+              <a:cs typeface="Merriweather" charset="0"/>
             </a:endParaRPr>
           </a:p>
         </p:txBody>
@@ -9055,7 +9142,7 @@
 </p:sld>
 </file>
 
-<file path=ppt/slides/slide7.xml><?xml version="1.0" encoding="utf-8"?>
+<file path=ppt/slides/slide9.xml><?xml version="1.0" encoding="utf-8"?>
 <p:sld xmlns:a="http://schemas.openxmlformats.org/drawingml/2006/main" xmlns:r="http://schemas.openxmlformats.org/officeDocument/2006/relationships" xmlns:p="http://schemas.openxmlformats.org/presentationml/2006/main">
   <p:cSld>
     <p:spTree>

--- a/документация/Презентация My Diary (не доделана).pptx
+++ b/документация/Презентация My Diary (не доделана).pptx
@@ -15,8 +15,8 @@
     <p:sldId id="266" r:id="rId6"/>
     <p:sldId id="267" r:id="rId7"/>
     <p:sldId id="263" r:id="rId8"/>
-    <p:sldId id="264" r:id="rId9"/>
-    <p:sldId id="265" r:id="rId10"/>
+    <p:sldId id="265" r:id="rId9"/>
+    <p:sldId id="264" r:id="rId10"/>
   </p:sldIdLst>
   <p:sldSz cx="12192000" cy="6858000"/>
   <p:notesSz cx="6858000" cy="9144000"/>
@@ -274,7 +274,7 @@
   </p:defaultTextStyle>
   <p:extLst>
     <p:ext uri="{EFAFB233-063F-42B5-8137-9DF3F51BA10A}">
-      <p15:sldGuideLst xmlns="" xmlns:mc="http://schemas.openxmlformats.org/markup-compatibility/2006" xmlns:mv="urn:schemas-microsoft-com:mac:vml" xmlns:c="http://schemas.openxmlformats.org/drawingml/2006/chart" xmlns:dgm="http://schemas.openxmlformats.org/drawingml/2006/diagram" xmlns:o="urn:schemas-microsoft-com:office:office" xmlns:v="urn:schemas-microsoft-com:vml" xmlns:pvml="urn:schemas-microsoft-com:office:powerpoint" xmlns:com="http://schemas.openxmlformats.org/drawingml/2006/compatibility" xmlns:p14="http://schemas.microsoft.com/office/powerpoint/2010/main" xmlns:p15="http://schemas.microsoft.com/office/powerpoint/2012/main" xmlns:ahyp="http://schemas.microsoft.com/office/drawing/2018/hyperlinkcolor">
+      <p15:sldGuideLst xmlns:ahyp="http://schemas.microsoft.com/office/drawing/2018/hyperlinkcolor" xmlns:p15="http://schemas.microsoft.com/office/powerpoint/2012/main" xmlns:p14="http://schemas.microsoft.com/office/powerpoint/2010/main" xmlns:com="http://schemas.openxmlformats.org/drawingml/2006/compatibility" xmlns:pvml="urn:schemas-microsoft-com:office:powerpoint" xmlns:v="urn:schemas-microsoft-com:vml" xmlns:o="urn:schemas-microsoft-com:office:office" xmlns:dgm="http://schemas.openxmlformats.org/drawingml/2006/diagram" xmlns:c="http://schemas.openxmlformats.org/drawingml/2006/chart" xmlns:mv="urn:schemas-microsoft-com:mac:vml" xmlns:mc="http://schemas.openxmlformats.org/markup-compatibility/2006" xmlns="">
         <p15:guide id="1" orient="horz" pos="2160">
           <p15:clr>
             <a:srgbClr val="000000"/>
@@ -1257,7 +1257,7 @@
   <p:cSld>
     <p:spTree>
       <p:nvGrpSpPr>
-        <p:cNvPr id="1" name="Shape 180"/>
+        <p:cNvPr id="1" name="Shape 185"/>
         <p:cNvGrpSpPr/>
         <p:nvPr/>
       </p:nvGrpSpPr>
@@ -1271,7 +1271,7 @@
       </p:grpSpPr>
       <p:sp>
         <p:nvSpPr>
-          <p:cNvPr id="181" name="Google Shape;181;p9:notes"/>
+          <p:cNvPr id="186" name="Google Shape;186;p10:notes"/>
           <p:cNvSpPr txBox="1">
             <a:spLocks noGrp="1"/>
           </p:cNvSpPr>
@@ -1309,7 +1309,7 @@
       </p:sp>
       <p:sp>
         <p:nvSpPr>
-          <p:cNvPr id="182" name="Google Shape;182;p9:notes"/>
+          <p:cNvPr id="187" name="Google Shape;187;p10:notes"/>
           <p:cNvSpPr>
             <a:spLocks noGrp="1" noRot="1" noChangeAspect="1"/>
           </p:cNvSpPr>
@@ -1361,7 +1361,7 @@
   <p:cSld>
     <p:spTree>
       <p:nvGrpSpPr>
-        <p:cNvPr id="1" name="Shape 185"/>
+        <p:cNvPr id="1" name="Shape 180"/>
         <p:cNvGrpSpPr/>
         <p:nvPr/>
       </p:nvGrpSpPr>
@@ -1375,7 +1375,7 @@
       </p:grpSpPr>
       <p:sp>
         <p:nvSpPr>
-          <p:cNvPr id="186" name="Google Shape;186;p10:notes"/>
+          <p:cNvPr id="181" name="Google Shape;181;p9:notes"/>
           <p:cNvSpPr txBox="1">
             <a:spLocks noGrp="1"/>
           </p:cNvSpPr>
@@ -1413,7 +1413,7 @@
       </p:sp>
       <p:sp>
         <p:nvSpPr>
-          <p:cNvPr id="187" name="Google Shape;187;p10:notes"/>
+          <p:cNvPr id="182" name="Google Shape;182;p9:notes"/>
           <p:cNvSpPr>
             <a:spLocks noGrp="1" noRot="1" noChangeAspect="1"/>
           </p:cNvSpPr>
@@ -4825,19 +4825,7 @@
                 <a:cs typeface="Roboto"/>
                 <a:sym typeface="Roboto"/>
               </a:rPr>
-              <a:t>К</a:t>
-            </a:r>
-            <a:r>
-              <a:rPr lang="ru-RU" sz="2550" b="1" dirty="0" err="1" smtClean="0">
-                <a:solidFill>
-                  <a:srgbClr val="FFA709"/>
-                </a:solidFill>
-                <a:latin typeface="Roboto"/>
-                <a:ea typeface="Roboto"/>
-                <a:cs typeface="Roboto"/>
-                <a:sym typeface="Roboto"/>
-              </a:rPr>
-              <a:t>россплатформенное</a:t>
+              <a:t>Кроссплатформенное</a:t>
             </a:r>
             <a:r>
               <a:rPr lang="ru-RU" sz="2550" b="1" dirty="0" smtClean="0">
@@ -9010,7 +8998,7 @@
   <p:cSld>
     <p:spTree>
       <p:nvGrpSpPr>
-        <p:cNvPr id="1" name="Shape 183"/>
+        <p:cNvPr id="1" name="Shape 188"/>
         <p:cNvGrpSpPr/>
         <p:nvPr/>
       </p:nvGrpSpPr>
@@ -9024,14 +9012,14 @@
       </p:grpSpPr>
       <p:sp>
         <p:nvSpPr>
-          <p:cNvPr id="184" name="Google Shape;184;p21"/>
+          <p:cNvPr id="189" name="Google Shape;189;p22"/>
           <p:cNvSpPr txBox="1"/>
           <p:nvPr/>
         </p:nvSpPr>
         <p:spPr>
           <a:xfrm>
-            <a:off x="305251" y="2736300"/>
-            <a:ext cx="11581500" cy="1354217"/>
+            <a:off x="590204" y="548639"/>
+            <a:ext cx="11296571" cy="415498"/>
           </a:xfrm>
           <a:prstGeom prst="rect">
             <a:avLst/>
@@ -9047,7 +9035,7 @@
           </a:bodyPr>
           <a:lstStyle/>
           <a:p>
-            <a:pPr marL="0" marR="0" lvl="0" indent="0" algn="ctr" rtl="0">
+            <a:pPr marL="0" marR="0" lvl="0" indent="0" rtl="0">
               <a:spcBef>
                 <a:spcPts val="0"/>
               </a:spcBef>
@@ -9057,72 +9045,370 @@
               <a:buNone/>
             </a:pPr>
             <a:r>
-              <a:rPr lang="en-US" sz="4400" b="1" i="0" u="none" strike="noStrike" cap="none" dirty="0" err="1">
-                <a:solidFill>
-                  <a:schemeClr val="tx1"/>
-                </a:solidFill>
-                <a:latin typeface="Merriweather" charset="0"/>
-                <a:ea typeface="Merriweather" charset="0"/>
-                <a:cs typeface="Merriweather" charset="0"/>
+              <a:rPr lang="en-US" sz="2700" b="1" i="0" u="none" strike="noStrike" cap="none" dirty="0" err="1">
+                <a:solidFill>
+                  <a:schemeClr val="tx1"/>
+                </a:solidFill>
+                <a:latin typeface="Merriweather"/>
+                <a:ea typeface="Merriweather"/>
+                <a:cs typeface="Merriweather"/>
                 <a:sym typeface="Merriweather"/>
               </a:rPr>
-              <a:t>Демонстрация</a:t>
-            </a:r>
-            <a:r>
-              <a:rPr lang="en-US" sz="4400" b="1" i="0" u="none" strike="noStrike" cap="none" dirty="0">
-                <a:solidFill>
-                  <a:schemeClr val="tx1"/>
-                </a:solidFill>
-                <a:latin typeface="Merriweather" charset="0"/>
-                <a:ea typeface="Merriweather" charset="0"/>
-                <a:cs typeface="Merriweather" charset="0"/>
-                <a:sym typeface="Merriweather"/>
-              </a:rPr>
-              <a:t> </a:t>
-            </a:r>
-            <a:r>
-              <a:rPr lang="en-US" sz="4400" b="1" i="0" u="none" strike="noStrike" cap="none" dirty="0" err="1">
-                <a:solidFill>
-                  <a:schemeClr val="tx1"/>
-                </a:solidFill>
-                <a:latin typeface="Merriweather" charset="0"/>
-                <a:ea typeface="Merriweather" charset="0"/>
-                <a:cs typeface="Merriweather" charset="0"/>
-                <a:sym typeface="Merriweather"/>
-              </a:rPr>
-              <a:t>программного</a:t>
-            </a:r>
-            <a:r>
-              <a:rPr lang="en-US" sz="4400" b="1" i="0" u="none" strike="noStrike" cap="none" dirty="0">
-                <a:solidFill>
-                  <a:schemeClr val="tx1"/>
-                </a:solidFill>
-                <a:latin typeface="Merriweather" charset="0"/>
-                <a:ea typeface="Merriweather" charset="0"/>
-                <a:cs typeface="Merriweather" charset="0"/>
-                <a:sym typeface="Merriweather"/>
-              </a:rPr>
-              <a:t> </a:t>
-            </a:r>
-            <a:r>
-              <a:rPr lang="en-US" sz="4400" b="1" i="0" u="none" strike="noStrike" cap="none" dirty="0" err="1">
-                <a:solidFill>
-                  <a:schemeClr val="tx1"/>
-                </a:solidFill>
-                <a:latin typeface="Merriweather" charset="0"/>
-                <a:ea typeface="Merriweather" charset="0"/>
-                <a:cs typeface="Merriweather" charset="0"/>
-                <a:sym typeface="Merriweather"/>
-              </a:rPr>
-              <a:t>продукта</a:t>
-            </a:r>
-            <a:endParaRPr sz="1200">
+              <a:t>Вывод</a:t>
+            </a:r>
+            <a:endParaRPr>
               <a:solidFill>
                 <a:schemeClr val="tx1"/>
               </a:solidFill>
-              <a:latin typeface="Merriweather" charset="0"/>
-              <a:ea typeface="Merriweather" charset="0"/>
-              <a:cs typeface="Merriweather" charset="0"/>
+            </a:endParaRPr>
+          </a:p>
+        </p:txBody>
+      </p:sp>
+      <p:sp>
+        <p:nvSpPr>
+          <p:cNvPr id="191" name="Google Shape;191;p22"/>
+          <p:cNvSpPr txBox="1"/>
+          <p:nvPr/>
+        </p:nvSpPr>
+        <p:spPr>
+          <a:xfrm>
+            <a:off x="581025" y="1554480"/>
+            <a:ext cx="11030100" cy="969496"/>
+          </a:xfrm>
+          <a:prstGeom prst="rect">
+            <a:avLst/>
+          </a:prstGeom>
+          <a:noFill/>
+          <a:ln>
+            <a:noFill/>
+          </a:ln>
+        </p:spPr>
+        <p:txBody>
+          <a:bodyPr spcFirstLastPara="1" wrap="square" lIns="0" tIns="0" rIns="0" bIns="0" anchor="t" anchorCtr="0">
+            <a:spAutoFit/>
+          </a:bodyPr>
+          <a:lstStyle/>
+          <a:p>
+            <a:pPr marL="0" marR="0" lvl="0" indent="0" rtl="0">
+              <a:lnSpc>
+                <a:spcPct val="139958"/>
+              </a:lnSpc>
+              <a:spcBef>
+                <a:spcPts val="0"/>
+              </a:spcBef>
+              <a:spcAft>
+                <a:spcPts val="0"/>
+              </a:spcAft>
+              <a:buNone/>
+            </a:pPr>
+            <a:r>
+              <a:rPr lang="en-US" sz="1500" i="0" u="none" strike="noStrike" cap="none" dirty="0">
+                <a:solidFill>
+                  <a:schemeClr val="tx1"/>
+                </a:solidFill>
+                <a:latin typeface="Roboto"/>
+                <a:ea typeface="Roboto"/>
+                <a:cs typeface="Roboto"/>
+                <a:sym typeface="Roboto"/>
+              </a:rPr>
+              <a:t>В </a:t>
+            </a:r>
+            <a:r>
+              <a:rPr lang="en-US" sz="1500" i="0" u="none" strike="noStrike" cap="none" dirty="0" err="1">
+                <a:solidFill>
+                  <a:schemeClr val="tx1"/>
+                </a:solidFill>
+                <a:latin typeface="Roboto"/>
+                <a:ea typeface="Roboto"/>
+                <a:cs typeface="Roboto"/>
+                <a:sym typeface="Roboto"/>
+              </a:rPr>
+              <a:t>ходе</a:t>
+            </a:r>
+            <a:r>
+              <a:rPr lang="en-US" sz="1500" i="0" u="none" strike="noStrike" cap="none" dirty="0">
+                <a:solidFill>
+                  <a:schemeClr val="tx1"/>
+                </a:solidFill>
+                <a:latin typeface="Roboto"/>
+                <a:ea typeface="Roboto"/>
+                <a:cs typeface="Roboto"/>
+                <a:sym typeface="Roboto"/>
+              </a:rPr>
+              <a:t> </a:t>
+            </a:r>
+            <a:r>
+              <a:rPr lang="en-US" sz="1500" i="0" u="none" strike="noStrike" cap="none" dirty="0" err="1">
+                <a:solidFill>
+                  <a:schemeClr val="tx1"/>
+                </a:solidFill>
+                <a:latin typeface="Roboto"/>
+                <a:ea typeface="Roboto"/>
+                <a:cs typeface="Roboto"/>
+                <a:sym typeface="Roboto"/>
+              </a:rPr>
+              <a:t>проектной</a:t>
+            </a:r>
+            <a:r>
+              <a:rPr lang="en-US" sz="1500" i="0" u="none" strike="noStrike" cap="none" dirty="0">
+                <a:solidFill>
+                  <a:schemeClr val="tx1"/>
+                </a:solidFill>
+                <a:latin typeface="Roboto"/>
+                <a:ea typeface="Roboto"/>
+                <a:cs typeface="Roboto"/>
+                <a:sym typeface="Roboto"/>
+              </a:rPr>
+              <a:t> </a:t>
+            </a:r>
+            <a:r>
+              <a:rPr lang="en-US" sz="1500" i="0" u="none" strike="noStrike" cap="none" dirty="0" err="1">
+                <a:solidFill>
+                  <a:schemeClr val="tx1"/>
+                </a:solidFill>
+                <a:latin typeface="Roboto"/>
+                <a:ea typeface="Roboto"/>
+                <a:cs typeface="Roboto"/>
+                <a:sym typeface="Roboto"/>
+              </a:rPr>
+              <a:t>работы</a:t>
+            </a:r>
+            <a:r>
+              <a:rPr lang="en-US" sz="1500" i="0" u="none" strike="noStrike" cap="none" dirty="0">
+                <a:solidFill>
+                  <a:schemeClr val="tx1"/>
+                </a:solidFill>
+                <a:latin typeface="Roboto"/>
+                <a:ea typeface="Roboto"/>
+                <a:cs typeface="Roboto"/>
+                <a:sym typeface="Roboto"/>
+              </a:rPr>
+              <a:t> </a:t>
+            </a:r>
+            <a:r>
+              <a:rPr lang="en-US" sz="1500" i="0" u="none" strike="noStrike" cap="none" dirty="0" err="1" smtClean="0">
+                <a:solidFill>
+                  <a:schemeClr val="tx1"/>
+                </a:solidFill>
+                <a:latin typeface="Roboto"/>
+                <a:ea typeface="Roboto"/>
+                <a:cs typeface="Roboto"/>
+                <a:sym typeface="Roboto"/>
+              </a:rPr>
+              <a:t>был</a:t>
+            </a:r>
+            <a:r>
+              <a:rPr lang="ru-RU" sz="1500" i="0" u="none" strike="noStrike" cap="none" dirty="0" smtClean="0">
+                <a:solidFill>
+                  <a:schemeClr val="tx1"/>
+                </a:solidFill>
+                <a:latin typeface="Roboto"/>
+                <a:ea typeface="Roboto"/>
+                <a:cs typeface="Roboto"/>
+                <a:sym typeface="Roboto"/>
+              </a:rPr>
+              <a:t>о</a:t>
+            </a:r>
+            <a:r>
+              <a:rPr lang="en-US" sz="1500" i="0" u="none" strike="noStrike" cap="none" dirty="0" smtClean="0">
+                <a:solidFill>
+                  <a:schemeClr val="tx1"/>
+                </a:solidFill>
+                <a:latin typeface="Roboto"/>
+                <a:ea typeface="Roboto"/>
+                <a:cs typeface="Roboto"/>
+                <a:sym typeface="Roboto"/>
+              </a:rPr>
+              <a:t> </a:t>
+            </a:r>
+            <a:r>
+              <a:rPr lang="en-US" sz="1500" i="0" u="none" strike="noStrike" cap="none" dirty="0" err="1" smtClean="0">
+                <a:solidFill>
+                  <a:schemeClr val="tx1"/>
+                </a:solidFill>
+                <a:latin typeface="Roboto"/>
+                <a:ea typeface="Roboto"/>
+                <a:cs typeface="Roboto"/>
+                <a:sym typeface="Roboto"/>
+              </a:rPr>
+              <a:t>разработан</a:t>
+            </a:r>
+            <a:r>
+              <a:rPr lang="ru-RU" sz="1500" i="0" u="none" strike="noStrike" cap="none" dirty="0" smtClean="0">
+                <a:solidFill>
+                  <a:schemeClr val="tx1"/>
+                </a:solidFill>
+                <a:latin typeface="Roboto"/>
+                <a:ea typeface="Roboto"/>
+                <a:cs typeface="Roboto"/>
+                <a:sym typeface="Roboto"/>
+              </a:rPr>
+              <a:t>о</a:t>
+            </a:r>
+            <a:r>
+              <a:rPr lang="en-US" sz="1500" i="0" u="none" strike="noStrike" cap="none" dirty="0" smtClean="0">
+                <a:solidFill>
+                  <a:schemeClr val="tx1"/>
+                </a:solidFill>
+                <a:latin typeface="Roboto"/>
+                <a:ea typeface="Roboto"/>
+                <a:cs typeface="Roboto"/>
+                <a:sym typeface="Roboto"/>
+              </a:rPr>
+              <a:t> </a:t>
+            </a:r>
+            <a:r>
+              <a:rPr lang="en-US" sz="1500" i="0" u="none" strike="noStrike" cap="none" dirty="0" err="1" smtClean="0">
+                <a:solidFill>
+                  <a:schemeClr val="tx1"/>
+                </a:solidFill>
+                <a:latin typeface="Roboto"/>
+                <a:ea typeface="Roboto"/>
+                <a:cs typeface="Roboto"/>
+                <a:sym typeface="Roboto"/>
+              </a:rPr>
+              <a:t>полноценн</a:t>
+            </a:r>
+            <a:r>
+              <a:rPr lang="ru-RU" sz="1500" i="0" u="none" strike="noStrike" cap="none" dirty="0" err="1" smtClean="0">
+                <a:solidFill>
+                  <a:schemeClr val="tx1"/>
+                </a:solidFill>
+                <a:latin typeface="Roboto"/>
+                <a:ea typeface="Roboto"/>
+                <a:cs typeface="Roboto"/>
+                <a:sym typeface="Roboto"/>
+              </a:rPr>
+              <a:t>ое</a:t>
+            </a:r>
+            <a:r>
+              <a:rPr lang="ru-RU" sz="1500" i="0" u="none" strike="noStrike" cap="none" dirty="0" smtClean="0">
+                <a:solidFill>
+                  <a:schemeClr val="tx1"/>
+                </a:solidFill>
+                <a:latin typeface="Roboto"/>
+                <a:ea typeface="Roboto"/>
+                <a:cs typeface="Roboto"/>
+                <a:sym typeface="Roboto"/>
+              </a:rPr>
+              <a:t> </a:t>
+            </a:r>
+            <a:r>
+              <a:rPr lang="ru-RU" sz="1500" i="0" u="none" strike="noStrike" cap="none" dirty="0" err="1" smtClean="0">
+                <a:solidFill>
+                  <a:schemeClr val="tx1"/>
+                </a:solidFill>
+                <a:latin typeface="Roboto"/>
+                <a:ea typeface="Roboto"/>
+                <a:cs typeface="Roboto"/>
+                <a:sym typeface="Roboto"/>
+              </a:rPr>
+              <a:t>кроссплатформанное</a:t>
+            </a:r>
+            <a:r>
+              <a:rPr lang="ru-RU" sz="1500" i="0" u="none" strike="noStrike" cap="none" dirty="0" smtClean="0">
+                <a:solidFill>
+                  <a:schemeClr val="tx1"/>
+                </a:solidFill>
+                <a:latin typeface="Roboto"/>
+                <a:ea typeface="Roboto"/>
+                <a:cs typeface="Roboto"/>
+                <a:sym typeface="Roboto"/>
+              </a:rPr>
+              <a:t> приложение </a:t>
+            </a:r>
+          </a:p>
+          <a:p>
+            <a:pPr marL="0" marR="0" lvl="0" indent="0" rtl="0">
+              <a:lnSpc>
+                <a:spcPct val="139958"/>
+              </a:lnSpc>
+              <a:spcBef>
+                <a:spcPts val="0"/>
+              </a:spcBef>
+              <a:spcAft>
+                <a:spcPts val="0"/>
+              </a:spcAft>
+              <a:buNone/>
+            </a:pPr>
+            <a:r>
+              <a:rPr lang="ru-RU" sz="1500" i="0" u="none" strike="noStrike" cap="none" dirty="0" smtClean="0">
+                <a:solidFill>
+                  <a:schemeClr val="tx1"/>
+                </a:solidFill>
+                <a:latin typeface="Roboto"/>
+                <a:ea typeface="Roboto"/>
+                <a:cs typeface="Roboto"/>
+                <a:sym typeface="Roboto"/>
+              </a:rPr>
+              <a:t>«</a:t>
+            </a:r>
+            <a:r>
+              <a:rPr lang="en-US" sz="1500" i="0" u="none" strike="noStrike" cap="none" dirty="0" smtClean="0">
+                <a:solidFill>
+                  <a:schemeClr val="tx1"/>
+                </a:solidFill>
+                <a:latin typeface="Roboto"/>
+                <a:ea typeface="Roboto"/>
+                <a:cs typeface="Roboto"/>
+                <a:sym typeface="Roboto"/>
+              </a:rPr>
+              <a:t>My Diary</a:t>
+            </a:r>
+            <a:r>
+              <a:rPr lang="ru-RU" sz="1500" i="0" u="none" strike="noStrike" cap="none" dirty="0" smtClean="0">
+                <a:solidFill>
+                  <a:schemeClr val="tx1"/>
+                </a:solidFill>
+                <a:latin typeface="Roboto"/>
+                <a:ea typeface="Roboto"/>
+                <a:cs typeface="Roboto"/>
+                <a:sym typeface="Roboto"/>
+              </a:rPr>
+              <a:t>».</a:t>
+            </a:r>
+          </a:p>
+          <a:p>
+            <a:pPr marL="0" marR="0" lvl="0" indent="0" rtl="0">
+              <a:lnSpc>
+                <a:spcPct val="139958"/>
+              </a:lnSpc>
+              <a:spcBef>
+                <a:spcPts val="0"/>
+              </a:spcBef>
+              <a:spcAft>
+                <a:spcPts val="0"/>
+              </a:spcAft>
+              <a:buNone/>
+            </a:pPr>
+            <a:r>
+              <a:rPr lang="ru-RU" sz="1500" dirty="0" smtClean="0">
+                <a:solidFill>
+                  <a:schemeClr val="tx1"/>
+                </a:solidFill>
+                <a:latin typeface="Roboto"/>
+                <a:ea typeface="Roboto"/>
+                <a:cs typeface="Roboto"/>
+                <a:sym typeface="Roboto"/>
+              </a:rPr>
+              <a:t>В результате все цели достигнуты.</a:t>
+            </a:r>
+            <a:r>
+              <a:rPr lang="ru-RU" sz="1500" b="0" i="0" u="none" strike="noStrike" cap="none" dirty="0" smtClean="0">
+                <a:solidFill>
+                  <a:schemeClr val="tx1"/>
+                </a:solidFill>
+                <a:latin typeface="Roboto"/>
+                <a:ea typeface="Roboto"/>
+                <a:cs typeface="Roboto"/>
+                <a:sym typeface="Roboto"/>
+              </a:rPr>
+              <a:t> </a:t>
+            </a:r>
+            <a:endParaRPr sz="1500">
+              <a:solidFill>
+                <a:srgbClr val="108000"/>
+              </a:solidFill>
             </a:endParaRPr>
           </a:p>
         </p:txBody>
@@ -9147,7 +9433,7 @@
   <p:cSld>
     <p:spTree>
       <p:nvGrpSpPr>
-        <p:cNvPr id="1" name="Shape 188"/>
+        <p:cNvPr id="1" name="Shape 183"/>
         <p:cNvGrpSpPr/>
         <p:nvPr/>
       </p:nvGrpSpPr>
@@ -9161,14 +9447,14 @@
       </p:grpSpPr>
       <p:sp>
         <p:nvSpPr>
-          <p:cNvPr id="189" name="Google Shape;189;p22"/>
+          <p:cNvPr id="184" name="Google Shape;184;p21"/>
           <p:cNvSpPr txBox="1"/>
           <p:nvPr/>
         </p:nvSpPr>
         <p:spPr>
           <a:xfrm>
-            <a:off x="590204" y="548639"/>
-            <a:ext cx="11296571" cy="415498"/>
+            <a:off x="305251" y="2736300"/>
+            <a:ext cx="11581500" cy="1354217"/>
           </a:xfrm>
           <a:prstGeom prst="rect">
             <a:avLst/>
@@ -9184,7 +9470,7 @@
           </a:bodyPr>
           <a:lstStyle/>
           <a:p>
-            <a:pPr marL="0" marR="0" lvl="0" indent="0" rtl="0">
+            <a:pPr marL="0" marR="0" lvl="0" indent="0" algn="ctr" rtl="0">
               <a:spcBef>
                 <a:spcPts val="0"/>
               </a:spcBef>
@@ -9194,370 +9480,72 @@
               <a:buNone/>
             </a:pPr>
             <a:r>
-              <a:rPr lang="en-US" sz="2700" b="1" i="0" u="none" strike="noStrike" cap="none" dirty="0" err="1">
-                <a:solidFill>
-                  <a:schemeClr val="tx1"/>
-                </a:solidFill>
-                <a:latin typeface="Merriweather"/>
-                <a:ea typeface="Merriweather"/>
-                <a:cs typeface="Merriweather"/>
+              <a:rPr lang="en-US" sz="4400" b="1" i="0" u="none" strike="noStrike" cap="none" dirty="0" err="1">
+                <a:solidFill>
+                  <a:schemeClr val="tx1"/>
+                </a:solidFill>
+                <a:latin typeface="Merriweather" charset="0"/>
+                <a:ea typeface="Merriweather" charset="0"/>
+                <a:cs typeface="Merriweather" charset="0"/>
                 <a:sym typeface="Merriweather"/>
               </a:rPr>
-              <a:t>Вывод</a:t>
-            </a:r>
-            <a:endParaRPr>
+              <a:t>Демонстрация</a:t>
+            </a:r>
+            <a:r>
+              <a:rPr lang="en-US" sz="4400" b="1" i="0" u="none" strike="noStrike" cap="none" dirty="0">
+                <a:solidFill>
+                  <a:schemeClr val="tx1"/>
+                </a:solidFill>
+                <a:latin typeface="Merriweather" charset="0"/>
+                <a:ea typeface="Merriweather" charset="0"/>
+                <a:cs typeface="Merriweather" charset="0"/>
+                <a:sym typeface="Merriweather"/>
+              </a:rPr>
+              <a:t> </a:t>
+            </a:r>
+            <a:r>
+              <a:rPr lang="en-US" sz="4400" b="1" i="0" u="none" strike="noStrike" cap="none" dirty="0" err="1">
+                <a:solidFill>
+                  <a:schemeClr val="tx1"/>
+                </a:solidFill>
+                <a:latin typeface="Merriweather" charset="0"/>
+                <a:ea typeface="Merriweather" charset="0"/>
+                <a:cs typeface="Merriweather" charset="0"/>
+                <a:sym typeface="Merriweather"/>
+              </a:rPr>
+              <a:t>программного</a:t>
+            </a:r>
+            <a:r>
+              <a:rPr lang="en-US" sz="4400" b="1" i="0" u="none" strike="noStrike" cap="none" dirty="0">
+                <a:solidFill>
+                  <a:schemeClr val="tx1"/>
+                </a:solidFill>
+                <a:latin typeface="Merriweather" charset="0"/>
+                <a:ea typeface="Merriweather" charset="0"/>
+                <a:cs typeface="Merriweather" charset="0"/>
+                <a:sym typeface="Merriweather"/>
+              </a:rPr>
+              <a:t> </a:t>
+            </a:r>
+            <a:r>
+              <a:rPr lang="en-US" sz="4400" b="1" i="0" u="none" strike="noStrike" cap="none" dirty="0" err="1">
+                <a:solidFill>
+                  <a:schemeClr val="tx1"/>
+                </a:solidFill>
+                <a:latin typeface="Merriweather" charset="0"/>
+                <a:ea typeface="Merriweather" charset="0"/>
+                <a:cs typeface="Merriweather" charset="0"/>
+                <a:sym typeface="Merriweather"/>
+              </a:rPr>
+              <a:t>продукта</a:t>
+            </a:r>
+            <a:endParaRPr sz="1200">
               <a:solidFill>
                 <a:schemeClr val="tx1"/>
               </a:solidFill>
-            </a:endParaRPr>
-          </a:p>
-        </p:txBody>
-      </p:sp>
-      <p:sp>
-        <p:nvSpPr>
-          <p:cNvPr id="191" name="Google Shape;191;p22"/>
-          <p:cNvSpPr txBox="1"/>
-          <p:nvPr/>
-        </p:nvSpPr>
-        <p:spPr>
-          <a:xfrm>
-            <a:off x="581025" y="1554480"/>
-            <a:ext cx="11030100" cy="969496"/>
-          </a:xfrm>
-          <a:prstGeom prst="rect">
-            <a:avLst/>
-          </a:prstGeom>
-          <a:noFill/>
-          <a:ln>
-            <a:noFill/>
-          </a:ln>
-        </p:spPr>
-        <p:txBody>
-          <a:bodyPr spcFirstLastPara="1" wrap="square" lIns="0" tIns="0" rIns="0" bIns="0" anchor="t" anchorCtr="0">
-            <a:spAutoFit/>
-          </a:bodyPr>
-          <a:lstStyle/>
-          <a:p>
-            <a:pPr marL="0" marR="0" lvl="0" indent="0" rtl="0">
-              <a:lnSpc>
-                <a:spcPct val="139958"/>
-              </a:lnSpc>
-              <a:spcBef>
-                <a:spcPts val="0"/>
-              </a:spcBef>
-              <a:spcAft>
-                <a:spcPts val="0"/>
-              </a:spcAft>
-              <a:buNone/>
-            </a:pPr>
-            <a:r>
-              <a:rPr lang="en-US" sz="1500" i="0" u="none" strike="noStrike" cap="none" dirty="0">
-                <a:solidFill>
-                  <a:schemeClr val="tx1"/>
-                </a:solidFill>
-                <a:latin typeface="Roboto"/>
-                <a:ea typeface="Roboto"/>
-                <a:cs typeface="Roboto"/>
-                <a:sym typeface="Roboto"/>
-              </a:rPr>
-              <a:t>В </a:t>
-            </a:r>
-            <a:r>
-              <a:rPr lang="en-US" sz="1500" i="0" u="none" strike="noStrike" cap="none" dirty="0" err="1">
-                <a:solidFill>
-                  <a:schemeClr val="tx1"/>
-                </a:solidFill>
-                <a:latin typeface="Roboto"/>
-                <a:ea typeface="Roboto"/>
-                <a:cs typeface="Roboto"/>
-                <a:sym typeface="Roboto"/>
-              </a:rPr>
-              <a:t>ходе</a:t>
-            </a:r>
-            <a:r>
-              <a:rPr lang="en-US" sz="1500" i="0" u="none" strike="noStrike" cap="none" dirty="0">
-                <a:solidFill>
-                  <a:schemeClr val="tx1"/>
-                </a:solidFill>
-                <a:latin typeface="Roboto"/>
-                <a:ea typeface="Roboto"/>
-                <a:cs typeface="Roboto"/>
-                <a:sym typeface="Roboto"/>
-              </a:rPr>
-              <a:t> </a:t>
-            </a:r>
-            <a:r>
-              <a:rPr lang="en-US" sz="1500" i="0" u="none" strike="noStrike" cap="none" dirty="0" err="1">
-                <a:solidFill>
-                  <a:schemeClr val="tx1"/>
-                </a:solidFill>
-                <a:latin typeface="Roboto"/>
-                <a:ea typeface="Roboto"/>
-                <a:cs typeface="Roboto"/>
-                <a:sym typeface="Roboto"/>
-              </a:rPr>
-              <a:t>проектной</a:t>
-            </a:r>
-            <a:r>
-              <a:rPr lang="en-US" sz="1500" i="0" u="none" strike="noStrike" cap="none" dirty="0">
-                <a:solidFill>
-                  <a:schemeClr val="tx1"/>
-                </a:solidFill>
-                <a:latin typeface="Roboto"/>
-                <a:ea typeface="Roboto"/>
-                <a:cs typeface="Roboto"/>
-                <a:sym typeface="Roboto"/>
-              </a:rPr>
-              <a:t> </a:t>
-            </a:r>
-            <a:r>
-              <a:rPr lang="en-US" sz="1500" i="0" u="none" strike="noStrike" cap="none" dirty="0" err="1">
-                <a:solidFill>
-                  <a:schemeClr val="tx1"/>
-                </a:solidFill>
-                <a:latin typeface="Roboto"/>
-                <a:ea typeface="Roboto"/>
-                <a:cs typeface="Roboto"/>
-                <a:sym typeface="Roboto"/>
-              </a:rPr>
-              <a:t>работы</a:t>
-            </a:r>
-            <a:r>
-              <a:rPr lang="en-US" sz="1500" i="0" u="none" strike="noStrike" cap="none" dirty="0">
-                <a:solidFill>
-                  <a:schemeClr val="tx1"/>
-                </a:solidFill>
-                <a:latin typeface="Roboto"/>
-                <a:ea typeface="Roboto"/>
-                <a:cs typeface="Roboto"/>
-                <a:sym typeface="Roboto"/>
-              </a:rPr>
-              <a:t> </a:t>
-            </a:r>
-            <a:r>
-              <a:rPr lang="en-US" sz="1500" i="0" u="none" strike="noStrike" cap="none" dirty="0" err="1" smtClean="0">
-                <a:solidFill>
-                  <a:schemeClr val="tx1"/>
-                </a:solidFill>
-                <a:latin typeface="Roboto"/>
-                <a:ea typeface="Roboto"/>
-                <a:cs typeface="Roboto"/>
-                <a:sym typeface="Roboto"/>
-              </a:rPr>
-              <a:t>был</a:t>
-            </a:r>
-            <a:r>
-              <a:rPr lang="ru-RU" sz="1500" i="0" u="none" strike="noStrike" cap="none" dirty="0" smtClean="0">
-                <a:solidFill>
-                  <a:schemeClr val="tx1"/>
-                </a:solidFill>
-                <a:latin typeface="Roboto"/>
-                <a:ea typeface="Roboto"/>
-                <a:cs typeface="Roboto"/>
-                <a:sym typeface="Roboto"/>
-              </a:rPr>
-              <a:t>о</a:t>
-            </a:r>
-            <a:r>
-              <a:rPr lang="en-US" sz="1500" i="0" u="none" strike="noStrike" cap="none" dirty="0" smtClean="0">
-                <a:solidFill>
-                  <a:schemeClr val="tx1"/>
-                </a:solidFill>
-                <a:latin typeface="Roboto"/>
-                <a:ea typeface="Roboto"/>
-                <a:cs typeface="Roboto"/>
-                <a:sym typeface="Roboto"/>
-              </a:rPr>
-              <a:t> </a:t>
-            </a:r>
-            <a:r>
-              <a:rPr lang="en-US" sz="1500" i="0" u="none" strike="noStrike" cap="none" dirty="0" err="1" smtClean="0">
-                <a:solidFill>
-                  <a:schemeClr val="tx1"/>
-                </a:solidFill>
-                <a:latin typeface="Roboto"/>
-                <a:ea typeface="Roboto"/>
-                <a:cs typeface="Roboto"/>
-                <a:sym typeface="Roboto"/>
-              </a:rPr>
-              <a:t>разработан</a:t>
-            </a:r>
-            <a:r>
-              <a:rPr lang="ru-RU" sz="1500" i="0" u="none" strike="noStrike" cap="none" dirty="0" smtClean="0">
-                <a:solidFill>
-                  <a:schemeClr val="tx1"/>
-                </a:solidFill>
-                <a:latin typeface="Roboto"/>
-                <a:ea typeface="Roboto"/>
-                <a:cs typeface="Roboto"/>
-                <a:sym typeface="Roboto"/>
-              </a:rPr>
-              <a:t>о</a:t>
-            </a:r>
-            <a:r>
-              <a:rPr lang="en-US" sz="1500" i="0" u="none" strike="noStrike" cap="none" dirty="0" smtClean="0">
-                <a:solidFill>
-                  <a:schemeClr val="tx1"/>
-                </a:solidFill>
-                <a:latin typeface="Roboto"/>
-                <a:ea typeface="Roboto"/>
-                <a:cs typeface="Roboto"/>
-                <a:sym typeface="Roboto"/>
-              </a:rPr>
-              <a:t> </a:t>
-            </a:r>
-            <a:r>
-              <a:rPr lang="en-US" sz="1500" i="0" u="none" strike="noStrike" cap="none" dirty="0" err="1" smtClean="0">
-                <a:solidFill>
-                  <a:schemeClr val="tx1"/>
-                </a:solidFill>
-                <a:latin typeface="Roboto"/>
-                <a:ea typeface="Roboto"/>
-                <a:cs typeface="Roboto"/>
-                <a:sym typeface="Roboto"/>
-              </a:rPr>
-              <a:t>полноценн</a:t>
-            </a:r>
-            <a:r>
-              <a:rPr lang="ru-RU" sz="1500" i="0" u="none" strike="noStrike" cap="none" dirty="0" err="1" smtClean="0">
-                <a:solidFill>
-                  <a:schemeClr val="tx1"/>
-                </a:solidFill>
-                <a:latin typeface="Roboto"/>
-                <a:ea typeface="Roboto"/>
-                <a:cs typeface="Roboto"/>
-                <a:sym typeface="Roboto"/>
-              </a:rPr>
-              <a:t>ое</a:t>
-            </a:r>
-            <a:r>
-              <a:rPr lang="ru-RU" sz="1500" i="0" u="none" strike="noStrike" cap="none" dirty="0" smtClean="0">
-                <a:solidFill>
-                  <a:schemeClr val="tx1"/>
-                </a:solidFill>
-                <a:latin typeface="Roboto"/>
-                <a:ea typeface="Roboto"/>
-                <a:cs typeface="Roboto"/>
-                <a:sym typeface="Roboto"/>
-              </a:rPr>
-              <a:t> </a:t>
-            </a:r>
-            <a:r>
-              <a:rPr lang="ru-RU" sz="1500" i="0" u="none" strike="noStrike" cap="none" dirty="0" err="1" smtClean="0">
-                <a:solidFill>
-                  <a:schemeClr val="tx1"/>
-                </a:solidFill>
-                <a:latin typeface="Roboto"/>
-                <a:ea typeface="Roboto"/>
-                <a:cs typeface="Roboto"/>
-                <a:sym typeface="Roboto"/>
-              </a:rPr>
-              <a:t>кроссплатформанное</a:t>
-            </a:r>
-            <a:r>
-              <a:rPr lang="ru-RU" sz="1500" i="0" u="none" strike="noStrike" cap="none" dirty="0" smtClean="0">
-                <a:solidFill>
-                  <a:schemeClr val="tx1"/>
-                </a:solidFill>
-                <a:latin typeface="Roboto"/>
-                <a:ea typeface="Roboto"/>
-                <a:cs typeface="Roboto"/>
-                <a:sym typeface="Roboto"/>
-              </a:rPr>
-              <a:t> приложение </a:t>
-            </a:r>
-          </a:p>
-          <a:p>
-            <a:pPr marL="0" marR="0" lvl="0" indent="0" rtl="0">
-              <a:lnSpc>
-                <a:spcPct val="139958"/>
-              </a:lnSpc>
-              <a:spcBef>
-                <a:spcPts val="0"/>
-              </a:spcBef>
-              <a:spcAft>
-                <a:spcPts val="0"/>
-              </a:spcAft>
-              <a:buNone/>
-            </a:pPr>
-            <a:r>
-              <a:rPr lang="ru-RU" sz="1500" i="0" u="none" strike="noStrike" cap="none" dirty="0" smtClean="0">
-                <a:solidFill>
-                  <a:schemeClr val="tx1"/>
-                </a:solidFill>
-                <a:latin typeface="Roboto"/>
-                <a:ea typeface="Roboto"/>
-                <a:cs typeface="Roboto"/>
-                <a:sym typeface="Roboto"/>
-              </a:rPr>
-              <a:t>«</a:t>
-            </a:r>
-            <a:r>
-              <a:rPr lang="en-US" sz="1500" i="0" u="none" strike="noStrike" cap="none" dirty="0" smtClean="0">
-                <a:solidFill>
-                  <a:schemeClr val="tx1"/>
-                </a:solidFill>
-                <a:latin typeface="Roboto"/>
-                <a:ea typeface="Roboto"/>
-                <a:cs typeface="Roboto"/>
-                <a:sym typeface="Roboto"/>
-              </a:rPr>
-              <a:t>My Diary</a:t>
-            </a:r>
-            <a:r>
-              <a:rPr lang="ru-RU" sz="1500" i="0" u="none" strike="noStrike" cap="none" dirty="0" smtClean="0">
-                <a:solidFill>
-                  <a:schemeClr val="tx1"/>
-                </a:solidFill>
-                <a:latin typeface="Roboto"/>
-                <a:ea typeface="Roboto"/>
-                <a:cs typeface="Roboto"/>
-                <a:sym typeface="Roboto"/>
-              </a:rPr>
-              <a:t>».</a:t>
-            </a:r>
-          </a:p>
-          <a:p>
-            <a:pPr marL="0" marR="0" lvl="0" indent="0" rtl="0">
-              <a:lnSpc>
-                <a:spcPct val="139958"/>
-              </a:lnSpc>
-              <a:spcBef>
-                <a:spcPts val="0"/>
-              </a:spcBef>
-              <a:spcAft>
-                <a:spcPts val="0"/>
-              </a:spcAft>
-              <a:buNone/>
-            </a:pPr>
-            <a:r>
-              <a:rPr lang="ru-RU" sz="1500" dirty="0" smtClean="0">
-                <a:solidFill>
-                  <a:schemeClr val="tx1"/>
-                </a:solidFill>
-                <a:latin typeface="Roboto"/>
-                <a:ea typeface="Roboto"/>
-                <a:cs typeface="Roboto"/>
-                <a:sym typeface="Roboto"/>
-              </a:rPr>
-              <a:t>В результате все цели достигнуты.</a:t>
-            </a:r>
-            <a:r>
-              <a:rPr lang="ru-RU" sz="1500" b="0" i="0" u="none" strike="noStrike" cap="none" dirty="0" smtClean="0">
-                <a:solidFill>
-                  <a:schemeClr val="tx1"/>
-                </a:solidFill>
-                <a:latin typeface="Roboto"/>
-                <a:ea typeface="Roboto"/>
-                <a:cs typeface="Roboto"/>
-                <a:sym typeface="Roboto"/>
-              </a:rPr>
-              <a:t> </a:t>
-            </a:r>
-            <a:endParaRPr sz="1500">
-              <a:solidFill>
-                <a:srgbClr val="108000"/>
-              </a:solidFill>
+              <a:latin typeface="Merriweather" charset="0"/>
+              <a:ea typeface="Merriweather" charset="0"/>
+              <a:cs typeface="Merriweather" charset="0"/>
             </a:endParaRPr>
           </a:p>
         </p:txBody>

--- a/документация/Презентация My Diary (не доделана).pptx
+++ b/документация/Презентация My Diary (не доделана).pptx
@@ -15,8 +15,8 @@
     <p:sldId id="266" r:id="rId6"/>
     <p:sldId id="267" r:id="rId7"/>
     <p:sldId id="263" r:id="rId8"/>
-    <p:sldId id="265" r:id="rId9"/>
-    <p:sldId id="264" r:id="rId10"/>
+    <p:sldId id="264" r:id="rId9"/>
+    <p:sldId id="265" r:id="rId10"/>
   </p:sldIdLst>
   <p:sldSz cx="12192000" cy="6858000"/>
   <p:notesSz cx="6858000" cy="9144000"/>
@@ -274,7 +274,7 @@
   </p:defaultTextStyle>
   <p:extLst>
     <p:ext uri="{EFAFB233-063F-42B5-8137-9DF3F51BA10A}">
-      <p15:sldGuideLst xmlns:ahyp="http://schemas.microsoft.com/office/drawing/2018/hyperlinkcolor" xmlns:p15="http://schemas.microsoft.com/office/powerpoint/2012/main" xmlns:p14="http://schemas.microsoft.com/office/powerpoint/2010/main" xmlns:com="http://schemas.openxmlformats.org/drawingml/2006/compatibility" xmlns:pvml="urn:schemas-microsoft-com:office:powerpoint" xmlns:v="urn:schemas-microsoft-com:vml" xmlns:o="urn:schemas-microsoft-com:office:office" xmlns:dgm="http://schemas.openxmlformats.org/drawingml/2006/diagram" xmlns:c="http://schemas.openxmlformats.org/drawingml/2006/chart" xmlns:mv="urn:schemas-microsoft-com:mac:vml" xmlns:mc="http://schemas.openxmlformats.org/markup-compatibility/2006" xmlns="">
+      <p15:sldGuideLst xmlns="" xmlns:mc="http://schemas.openxmlformats.org/markup-compatibility/2006" xmlns:mv="urn:schemas-microsoft-com:mac:vml" xmlns:c="http://schemas.openxmlformats.org/drawingml/2006/chart" xmlns:dgm="http://schemas.openxmlformats.org/drawingml/2006/diagram" xmlns:o="urn:schemas-microsoft-com:office:office" xmlns:v="urn:schemas-microsoft-com:vml" xmlns:pvml="urn:schemas-microsoft-com:office:powerpoint" xmlns:com="http://schemas.openxmlformats.org/drawingml/2006/compatibility" xmlns:p14="http://schemas.microsoft.com/office/powerpoint/2010/main" xmlns:p15="http://schemas.microsoft.com/office/powerpoint/2012/main" xmlns:ahyp="http://schemas.microsoft.com/office/drawing/2018/hyperlinkcolor">
         <p15:guide id="1" orient="horz" pos="2160">
           <p15:clr>
             <a:srgbClr val="000000"/>
@@ -1257,7 +1257,7 @@
   <p:cSld>
     <p:spTree>
       <p:nvGrpSpPr>
-        <p:cNvPr id="1" name="Shape 185"/>
+        <p:cNvPr id="1" name="Shape 180"/>
         <p:cNvGrpSpPr/>
         <p:nvPr/>
       </p:nvGrpSpPr>
@@ -1271,7 +1271,7 @@
       </p:grpSpPr>
       <p:sp>
         <p:nvSpPr>
-          <p:cNvPr id="186" name="Google Shape;186;p10:notes"/>
+          <p:cNvPr id="181" name="Google Shape;181;p9:notes"/>
           <p:cNvSpPr txBox="1">
             <a:spLocks noGrp="1"/>
           </p:cNvSpPr>
@@ -1309,7 +1309,7 @@
       </p:sp>
       <p:sp>
         <p:nvSpPr>
-          <p:cNvPr id="187" name="Google Shape;187;p10:notes"/>
+          <p:cNvPr id="182" name="Google Shape;182;p9:notes"/>
           <p:cNvSpPr>
             <a:spLocks noGrp="1" noRot="1" noChangeAspect="1"/>
           </p:cNvSpPr>
@@ -1361,7 +1361,7 @@
   <p:cSld>
     <p:spTree>
       <p:nvGrpSpPr>
-        <p:cNvPr id="1" name="Shape 180"/>
+        <p:cNvPr id="1" name="Shape 185"/>
         <p:cNvGrpSpPr/>
         <p:nvPr/>
       </p:nvGrpSpPr>
@@ -1375,7 +1375,7 @@
       </p:grpSpPr>
       <p:sp>
         <p:nvSpPr>
-          <p:cNvPr id="181" name="Google Shape;181;p9:notes"/>
+          <p:cNvPr id="186" name="Google Shape;186;p10:notes"/>
           <p:cNvSpPr txBox="1">
             <a:spLocks noGrp="1"/>
           </p:cNvSpPr>
@@ -1413,7 +1413,7 @@
       </p:sp>
       <p:sp>
         <p:nvSpPr>
-          <p:cNvPr id="182" name="Google Shape;182;p9:notes"/>
+          <p:cNvPr id="187" name="Google Shape;187;p10:notes"/>
           <p:cNvSpPr>
             <a:spLocks noGrp="1" noRot="1" noChangeAspect="1"/>
           </p:cNvSpPr>
@@ -6434,6 +6434,32 @@
           </a:p>
         </p:txBody>
       </p:sp>
+      <p:pic>
+        <p:nvPicPr>
+          <p:cNvPr id="2052" name="Picture 4" descr="C:\Users\Milina\Downloads\rounded-in-photoretrica.png"/>
+          <p:cNvPicPr>
+            <a:picLocks noChangeAspect="1" noChangeArrowheads="1"/>
+          </p:cNvPicPr>
+          <p:nvPr/>
+        </p:nvPicPr>
+        <p:blipFill>
+          <a:blip r:embed="rId3"/>
+          <a:srcRect/>
+          <a:stretch>
+            <a:fillRect/>
+          </a:stretch>
+        </p:blipFill>
+        <p:spPr bwMode="auto">
+          <a:xfrm>
+            <a:off x="6198293" y="1621850"/>
+            <a:ext cx="5356398" cy="4035249"/>
+          </a:xfrm>
+          <a:prstGeom prst="rect">
+            <a:avLst/>
+          </a:prstGeom>
+          <a:noFill/>
+        </p:spPr>
+      </p:pic>
     </p:spTree>
   </p:cSld>
   <p:clrMapOvr>
@@ -7982,6 +8008,13 @@
   <p:clrMapOvr>
     <a:masterClrMapping/>
   </p:clrMapOvr>
+  <p:timing>
+    <p:tnLst>
+      <p:par>
+        <p:cTn id="1" dur="indefinite" restart="never" nodeType="tmRoot"/>
+      </p:par>
+    </p:tnLst>
+  </p:timing>
 </p:sld>
 </file>
 
@@ -8071,11 +8104,445 @@
           </a:p>
         </p:txBody>
       </p:sp>
+      <p:pic>
+        <p:nvPicPr>
+          <p:cNvPr id="1026" name="Picture 2"/>
+          <p:cNvPicPr>
+            <a:picLocks noChangeAspect="1" noChangeArrowheads="1"/>
+          </p:cNvPicPr>
+          <p:nvPr/>
+        </p:nvPicPr>
+        <p:blipFill>
+          <a:blip r:embed="rId2"/>
+          <a:srcRect/>
+          <a:stretch>
+            <a:fillRect/>
+          </a:stretch>
+        </p:blipFill>
+        <p:spPr bwMode="auto">
+          <a:xfrm>
+            <a:off x="7225259" y="2282381"/>
+            <a:ext cx="3528024" cy="1700392"/>
+          </a:xfrm>
+          <a:prstGeom prst="rect">
+            <a:avLst/>
+          </a:prstGeom>
+          <a:noFill/>
+          <a:ln w="9525">
+            <a:noFill/>
+            <a:miter lim="800000"/>
+            <a:headEnd/>
+            <a:tailEnd/>
+          </a:ln>
+          <a:effectLst/>
+        </p:spPr>
+      </p:pic>
+      <p:pic>
+        <p:nvPicPr>
+          <p:cNvPr id="1027" name="Picture 3"/>
+          <p:cNvPicPr>
+            <a:picLocks noChangeAspect="1" noChangeArrowheads="1"/>
+          </p:cNvPicPr>
+          <p:nvPr/>
+        </p:nvPicPr>
+        <p:blipFill>
+          <a:blip r:embed="rId3"/>
+          <a:srcRect/>
+          <a:stretch>
+            <a:fillRect/>
+          </a:stretch>
+        </p:blipFill>
+        <p:spPr bwMode="auto">
+          <a:xfrm>
+            <a:off x="487674" y="5006714"/>
+            <a:ext cx="5876158" cy="1475491"/>
+          </a:xfrm>
+          <a:prstGeom prst="rect">
+            <a:avLst/>
+          </a:prstGeom>
+          <a:noFill/>
+          <a:ln w="9525">
+            <a:noFill/>
+            <a:miter lim="800000"/>
+            <a:headEnd/>
+            <a:tailEnd/>
+          </a:ln>
+          <a:effectLst/>
+        </p:spPr>
+      </p:pic>
+      <p:pic>
+        <p:nvPicPr>
+          <p:cNvPr id="1028" name="Picture 4"/>
+          <p:cNvPicPr>
+            <a:picLocks noChangeAspect="1" noChangeArrowheads="1"/>
+          </p:cNvPicPr>
+          <p:nvPr/>
+        </p:nvPicPr>
+        <p:blipFill>
+          <a:blip r:embed="rId4"/>
+          <a:srcRect/>
+          <a:stretch>
+            <a:fillRect/>
+          </a:stretch>
+        </p:blipFill>
+        <p:spPr bwMode="auto">
+          <a:xfrm>
+            <a:off x="497902" y="2278505"/>
+            <a:ext cx="5836845" cy="1680144"/>
+          </a:xfrm>
+          <a:prstGeom prst="rect">
+            <a:avLst/>
+          </a:prstGeom>
+          <a:noFill/>
+          <a:ln w="9525">
+            <a:noFill/>
+            <a:miter lim="800000"/>
+            <a:headEnd/>
+            <a:tailEnd/>
+          </a:ln>
+          <a:effectLst/>
+        </p:spPr>
+      </p:pic>
+      <p:sp>
+        <p:nvSpPr>
+          <p:cNvPr id="6" name="Прямоугольник 5"/>
+          <p:cNvSpPr/>
+          <p:nvPr/>
+        </p:nvSpPr>
+        <p:spPr>
+          <a:xfrm>
+            <a:off x="7140315" y="1109272"/>
+            <a:ext cx="4731896" cy="1131079"/>
+          </a:xfrm>
+          <a:prstGeom prst="rect">
+            <a:avLst/>
+          </a:prstGeom>
+        </p:spPr>
+        <p:txBody>
+          <a:bodyPr wrap="square">
+            <a:spAutoFit/>
+          </a:bodyPr>
+          <a:lstStyle/>
+          <a:p>
+            <a:pPr>
+              <a:lnSpc>
+                <a:spcPct val="150000"/>
+              </a:lnSpc>
+            </a:pPr>
+            <a:r>
+              <a:rPr lang="ru-RU" sz="1500" b="1" dirty="0" smtClean="0">
+                <a:solidFill>
+                  <a:srgbClr val="FFA709"/>
+                </a:solidFill>
+                <a:latin typeface="Roboto" charset="0"/>
+                <a:ea typeface="Roboto" charset="0"/>
+              </a:rPr>
+              <a:t>Таблица </a:t>
+            </a:r>
+            <a:r>
+              <a:rPr lang="ru-RU" sz="1500" b="1" dirty="0" err="1" smtClean="0">
+                <a:solidFill>
+                  <a:srgbClr val="FFA709"/>
+                </a:solidFill>
+                <a:latin typeface="Roboto" charset="0"/>
+                <a:ea typeface="Roboto" charset="0"/>
+              </a:rPr>
+              <a:t>DiaryEntries</a:t>
+            </a:r>
+            <a:r>
+              <a:rPr lang="ru-RU" sz="1500" b="1" dirty="0" smtClean="0">
+                <a:solidFill>
+                  <a:srgbClr val="FFA709"/>
+                </a:solidFill>
+                <a:latin typeface="Roboto" charset="0"/>
+                <a:ea typeface="Roboto" charset="0"/>
+              </a:rPr>
+              <a:t>: </a:t>
+            </a:r>
+            <a:r>
+              <a:rPr lang="ru-RU" sz="1500" dirty="0" smtClean="0">
+                <a:solidFill>
+                  <a:schemeClr val="tx1"/>
+                </a:solidFill>
+                <a:latin typeface="Roboto" charset="0"/>
+                <a:ea typeface="Roboto" charset="0"/>
+              </a:rPr>
+              <a:t>Основная таблица записей дневника. Хранит заголовок, дату создания и выбранное настроение.</a:t>
+            </a:r>
+            <a:endParaRPr lang="ru-RU" sz="1500" dirty="0">
+              <a:solidFill>
+                <a:schemeClr val="tx1"/>
+              </a:solidFill>
+              <a:latin typeface="Roboto" charset="0"/>
+              <a:ea typeface="Roboto" charset="0"/>
+            </a:endParaRPr>
+          </a:p>
+        </p:txBody>
+      </p:sp>
+      <p:sp>
+        <p:nvSpPr>
+          <p:cNvPr id="7" name="Прямоугольник 6"/>
+          <p:cNvSpPr/>
+          <p:nvPr/>
+        </p:nvSpPr>
+        <p:spPr>
+          <a:xfrm>
+            <a:off x="484682" y="4096779"/>
+            <a:ext cx="6096000" cy="784830"/>
+          </a:xfrm>
+          <a:prstGeom prst="rect">
+            <a:avLst/>
+          </a:prstGeom>
+        </p:spPr>
+        <p:txBody>
+          <a:bodyPr>
+            <a:spAutoFit/>
+          </a:bodyPr>
+          <a:lstStyle/>
+          <a:p>
+            <a:pPr>
+              <a:lnSpc>
+                <a:spcPct val="150000"/>
+              </a:lnSpc>
+            </a:pPr>
+            <a:r>
+              <a:rPr lang="ru-RU" sz="1500" b="1" dirty="0" smtClean="0">
+                <a:solidFill>
+                  <a:srgbClr val="FFA709"/>
+                </a:solidFill>
+                <a:latin typeface="Roboto" charset="0"/>
+                <a:ea typeface="Roboto" charset="0"/>
+              </a:rPr>
+              <a:t>Таблица </a:t>
+            </a:r>
+            <a:r>
+              <a:rPr lang="ru-RU" sz="1500" b="1" dirty="0" err="1" smtClean="0">
+                <a:solidFill>
+                  <a:srgbClr val="FFA709"/>
+                </a:solidFill>
+                <a:latin typeface="Roboto" charset="0"/>
+                <a:ea typeface="Roboto" charset="0"/>
+              </a:rPr>
+              <a:t>BlockContents</a:t>
+            </a:r>
+            <a:r>
+              <a:rPr lang="ru-RU" sz="1500" b="1" dirty="0" smtClean="0">
+                <a:solidFill>
+                  <a:srgbClr val="FFA709"/>
+                </a:solidFill>
+                <a:latin typeface="Roboto" charset="0"/>
+                <a:ea typeface="Roboto" charset="0"/>
+              </a:rPr>
+              <a:t>: </a:t>
+            </a:r>
+            <a:r>
+              <a:rPr lang="ru-RU" sz="1500" dirty="0" smtClean="0">
+                <a:solidFill>
+                  <a:schemeClr val="tx1"/>
+                </a:solidFill>
+                <a:latin typeface="Roboto" charset="0"/>
+                <a:ea typeface="Roboto" charset="0"/>
+              </a:rPr>
+              <a:t>Реестр всех блоков контента. Связана с </a:t>
+            </a:r>
+            <a:r>
+              <a:rPr lang="ru-RU" sz="1500" dirty="0" err="1" smtClean="0">
+                <a:solidFill>
+                  <a:schemeClr val="tx1"/>
+                </a:solidFill>
+                <a:latin typeface="Roboto" charset="0"/>
+                <a:ea typeface="Roboto" charset="0"/>
+              </a:rPr>
+              <a:t>DiaryEntries</a:t>
+            </a:r>
+            <a:r>
+              <a:rPr lang="ru-RU" sz="1500" dirty="0" smtClean="0">
+                <a:solidFill>
+                  <a:schemeClr val="tx1"/>
+                </a:solidFill>
+                <a:latin typeface="Roboto" charset="0"/>
+                <a:ea typeface="Roboto" charset="0"/>
+              </a:rPr>
+              <a:t> отношением 1:M.</a:t>
+            </a:r>
+            <a:endParaRPr lang="ru-RU" sz="1500" dirty="0">
+              <a:solidFill>
+                <a:schemeClr val="tx1"/>
+              </a:solidFill>
+              <a:latin typeface="Roboto" charset="0"/>
+              <a:ea typeface="Roboto" charset="0"/>
+            </a:endParaRPr>
+          </a:p>
+        </p:txBody>
+      </p:sp>
+      <p:sp>
+        <p:nvSpPr>
+          <p:cNvPr id="8" name="Прямоугольник 7"/>
+          <p:cNvSpPr/>
+          <p:nvPr/>
+        </p:nvSpPr>
+        <p:spPr>
+          <a:xfrm>
+            <a:off x="454701" y="1109272"/>
+            <a:ext cx="6096000" cy="1131079"/>
+          </a:xfrm>
+          <a:prstGeom prst="rect">
+            <a:avLst/>
+          </a:prstGeom>
+        </p:spPr>
+        <p:txBody>
+          <a:bodyPr wrap="square">
+            <a:spAutoFit/>
+          </a:bodyPr>
+          <a:lstStyle/>
+          <a:p>
+            <a:pPr>
+              <a:lnSpc>
+                <a:spcPct val="150000"/>
+              </a:lnSpc>
+            </a:pPr>
+            <a:r>
+              <a:rPr lang="ru-RU" sz="1500" b="1" dirty="0" smtClean="0">
+                <a:solidFill>
+                  <a:srgbClr val="FFA709"/>
+                </a:solidFill>
+                <a:latin typeface="Roboto" charset="0"/>
+                <a:ea typeface="Roboto" charset="0"/>
+              </a:rPr>
+              <a:t>Таблица </a:t>
+            </a:r>
+            <a:r>
+              <a:rPr lang="ru-RU" sz="1500" b="1" dirty="0" err="1" smtClean="0">
+                <a:solidFill>
+                  <a:srgbClr val="FFA709"/>
+                </a:solidFill>
+                <a:latin typeface="Roboto" charset="0"/>
+                <a:ea typeface="Roboto" charset="0"/>
+              </a:rPr>
+              <a:t>PlacedStickers</a:t>
+            </a:r>
+            <a:r>
+              <a:rPr lang="ru-RU" sz="1500" b="1" dirty="0" smtClean="0">
+                <a:solidFill>
+                  <a:srgbClr val="FFA709"/>
+                </a:solidFill>
+                <a:latin typeface="Roboto" charset="0"/>
+                <a:ea typeface="Roboto" charset="0"/>
+              </a:rPr>
+              <a:t>: </a:t>
+            </a:r>
+            <a:r>
+              <a:rPr lang="ru-RU" sz="1500" dirty="0" smtClean="0">
+                <a:solidFill>
+                  <a:schemeClr val="tx1"/>
+                </a:solidFill>
+                <a:latin typeface="Roboto" charset="0"/>
+                <a:ea typeface="Roboto" charset="0"/>
+              </a:rPr>
+              <a:t>Данные о </a:t>
+            </a:r>
+            <a:r>
+              <a:rPr lang="ru-RU" sz="1500" dirty="0" err="1" smtClean="0">
+                <a:solidFill>
+                  <a:schemeClr val="tx1"/>
+                </a:solidFill>
+                <a:latin typeface="Roboto" charset="0"/>
+                <a:ea typeface="Roboto" charset="0"/>
+              </a:rPr>
+              <a:t>стикерах</a:t>
+            </a:r>
+            <a:r>
+              <a:rPr lang="ru-RU" sz="1500" dirty="0" smtClean="0">
+                <a:solidFill>
+                  <a:schemeClr val="tx1"/>
+                </a:solidFill>
+                <a:latin typeface="Roboto" charset="0"/>
+                <a:ea typeface="Roboto" charset="0"/>
+              </a:rPr>
+              <a:t>, размещенных на холсте записи (координаты </a:t>
+            </a:r>
+            <a:r>
+              <a:rPr lang="ru-RU" sz="1500" dirty="0" err="1" smtClean="0">
+                <a:solidFill>
+                  <a:schemeClr val="tx1"/>
+                </a:solidFill>
+                <a:latin typeface="Roboto" charset="0"/>
+                <a:ea typeface="Roboto" charset="0"/>
+              </a:rPr>
+              <a:t>dx</a:t>
+            </a:r>
+            <a:r>
+              <a:rPr lang="ru-RU" sz="1500" dirty="0" smtClean="0">
+                <a:solidFill>
+                  <a:schemeClr val="tx1"/>
+                </a:solidFill>
+                <a:latin typeface="Roboto" charset="0"/>
+                <a:ea typeface="Roboto" charset="0"/>
+              </a:rPr>
+              <a:t>/</a:t>
+            </a:r>
+            <a:r>
+              <a:rPr lang="ru-RU" sz="1500" dirty="0" err="1" smtClean="0">
+                <a:solidFill>
+                  <a:schemeClr val="tx1"/>
+                </a:solidFill>
+                <a:latin typeface="Roboto" charset="0"/>
+                <a:ea typeface="Roboto" charset="0"/>
+              </a:rPr>
+              <a:t>dy</a:t>
+            </a:r>
+            <a:r>
+              <a:rPr lang="ru-RU" sz="1500" dirty="0" smtClean="0">
+                <a:solidFill>
+                  <a:schemeClr val="tx1"/>
+                </a:solidFill>
+                <a:latin typeface="Roboto" charset="0"/>
+                <a:ea typeface="Roboto" charset="0"/>
+              </a:rPr>
+              <a:t>). Связана с </a:t>
+            </a:r>
+            <a:r>
+              <a:rPr lang="ru-RU" sz="1500" dirty="0" err="1" smtClean="0">
+                <a:solidFill>
+                  <a:schemeClr val="tx1"/>
+                </a:solidFill>
+                <a:latin typeface="Roboto" charset="0"/>
+                <a:ea typeface="Roboto" charset="0"/>
+              </a:rPr>
+              <a:t>DiaryEntries</a:t>
+            </a:r>
+            <a:r>
+              <a:rPr lang="ru-RU" sz="1500" dirty="0" smtClean="0">
+                <a:solidFill>
+                  <a:schemeClr val="tx1"/>
+                </a:solidFill>
+                <a:latin typeface="Roboto" charset="0"/>
+                <a:ea typeface="Roboto" charset="0"/>
+              </a:rPr>
+              <a:t> отношением 1:M.</a:t>
+            </a:r>
+            <a:endParaRPr lang="ru-RU" sz="1500" dirty="0">
+              <a:solidFill>
+                <a:schemeClr val="tx1"/>
+              </a:solidFill>
+              <a:latin typeface="Roboto" charset="0"/>
+              <a:ea typeface="Roboto" charset="0"/>
+            </a:endParaRPr>
+          </a:p>
+        </p:txBody>
+      </p:sp>
     </p:spTree>
   </p:cSld>
   <p:clrMapOvr>
     <a:masterClrMapping/>
   </p:clrMapOvr>
+  <p:timing>
+    <p:tnLst>
+      <p:par>
+        <p:cTn id="1" dur="indefinite" restart="never" nodeType="tmRoot"/>
+      </p:par>
+    </p:tnLst>
+  </p:timing>
 </p:sld>
 </file>
 
@@ -8998,7 +9465,7 @@
   <p:cSld>
     <p:spTree>
       <p:nvGrpSpPr>
-        <p:cNvPr id="1" name="Shape 188"/>
+        <p:cNvPr id="1" name="Shape 183"/>
         <p:cNvGrpSpPr/>
         <p:nvPr/>
       </p:nvGrpSpPr>
@@ -9012,14 +9479,14 @@
       </p:grpSpPr>
       <p:sp>
         <p:nvSpPr>
-          <p:cNvPr id="189" name="Google Shape;189;p22"/>
+          <p:cNvPr id="184" name="Google Shape;184;p21"/>
           <p:cNvSpPr txBox="1"/>
           <p:nvPr/>
         </p:nvSpPr>
         <p:spPr>
           <a:xfrm>
-            <a:off x="590204" y="548639"/>
-            <a:ext cx="11296571" cy="415498"/>
+            <a:off x="305251" y="2736300"/>
+            <a:ext cx="11581500" cy="1354217"/>
           </a:xfrm>
           <a:prstGeom prst="rect">
             <a:avLst/>
@@ -9035,7 +9502,7 @@
           </a:bodyPr>
           <a:lstStyle/>
           <a:p>
-            <a:pPr marL="0" marR="0" lvl="0" indent="0" rtl="0">
+            <a:pPr marL="0" marR="0" lvl="0" indent="0" algn="ctr" rtl="0">
               <a:spcBef>
                 <a:spcPts val="0"/>
               </a:spcBef>
@@ -9045,370 +9512,72 @@
               <a:buNone/>
             </a:pPr>
             <a:r>
-              <a:rPr lang="en-US" sz="2700" b="1" i="0" u="none" strike="noStrike" cap="none" dirty="0" err="1">
-                <a:solidFill>
-                  <a:schemeClr val="tx1"/>
-                </a:solidFill>
-                <a:latin typeface="Merriweather"/>
-                <a:ea typeface="Merriweather"/>
-                <a:cs typeface="Merriweather"/>
+              <a:rPr lang="en-US" sz="4400" b="1" i="0" u="none" strike="noStrike" cap="none" dirty="0" err="1">
+                <a:solidFill>
+                  <a:schemeClr val="tx1"/>
+                </a:solidFill>
+                <a:latin typeface="Merriweather" charset="0"/>
+                <a:ea typeface="Merriweather" charset="0"/>
+                <a:cs typeface="Merriweather" charset="0"/>
                 <a:sym typeface="Merriweather"/>
               </a:rPr>
-              <a:t>Вывод</a:t>
-            </a:r>
-            <a:endParaRPr>
+              <a:t>Демонстрация</a:t>
+            </a:r>
+            <a:r>
+              <a:rPr lang="en-US" sz="4400" b="1" i="0" u="none" strike="noStrike" cap="none" dirty="0">
+                <a:solidFill>
+                  <a:schemeClr val="tx1"/>
+                </a:solidFill>
+                <a:latin typeface="Merriweather" charset="0"/>
+                <a:ea typeface="Merriweather" charset="0"/>
+                <a:cs typeface="Merriweather" charset="0"/>
+                <a:sym typeface="Merriweather"/>
+              </a:rPr>
+              <a:t> </a:t>
+            </a:r>
+            <a:r>
+              <a:rPr lang="en-US" sz="4400" b="1" i="0" u="none" strike="noStrike" cap="none" dirty="0" err="1">
+                <a:solidFill>
+                  <a:schemeClr val="tx1"/>
+                </a:solidFill>
+                <a:latin typeface="Merriweather" charset="0"/>
+                <a:ea typeface="Merriweather" charset="0"/>
+                <a:cs typeface="Merriweather" charset="0"/>
+                <a:sym typeface="Merriweather"/>
+              </a:rPr>
+              <a:t>программного</a:t>
+            </a:r>
+            <a:r>
+              <a:rPr lang="en-US" sz="4400" b="1" i="0" u="none" strike="noStrike" cap="none" dirty="0">
+                <a:solidFill>
+                  <a:schemeClr val="tx1"/>
+                </a:solidFill>
+                <a:latin typeface="Merriweather" charset="0"/>
+                <a:ea typeface="Merriweather" charset="0"/>
+                <a:cs typeface="Merriweather" charset="0"/>
+                <a:sym typeface="Merriweather"/>
+              </a:rPr>
+              <a:t> </a:t>
+            </a:r>
+            <a:r>
+              <a:rPr lang="en-US" sz="4400" b="1" i="0" u="none" strike="noStrike" cap="none" dirty="0" err="1">
+                <a:solidFill>
+                  <a:schemeClr val="tx1"/>
+                </a:solidFill>
+                <a:latin typeface="Merriweather" charset="0"/>
+                <a:ea typeface="Merriweather" charset="0"/>
+                <a:cs typeface="Merriweather" charset="0"/>
+                <a:sym typeface="Merriweather"/>
+              </a:rPr>
+              <a:t>продукта</a:t>
+            </a:r>
+            <a:endParaRPr sz="1200">
               <a:solidFill>
                 <a:schemeClr val="tx1"/>
               </a:solidFill>
-            </a:endParaRPr>
-          </a:p>
-        </p:txBody>
-      </p:sp>
-      <p:sp>
-        <p:nvSpPr>
-          <p:cNvPr id="191" name="Google Shape;191;p22"/>
-          <p:cNvSpPr txBox="1"/>
-          <p:nvPr/>
-        </p:nvSpPr>
-        <p:spPr>
-          <a:xfrm>
-            <a:off x="581025" y="1554480"/>
-            <a:ext cx="11030100" cy="969496"/>
-          </a:xfrm>
-          <a:prstGeom prst="rect">
-            <a:avLst/>
-          </a:prstGeom>
-          <a:noFill/>
-          <a:ln>
-            <a:noFill/>
-          </a:ln>
-        </p:spPr>
-        <p:txBody>
-          <a:bodyPr spcFirstLastPara="1" wrap="square" lIns="0" tIns="0" rIns="0" bIns="0" anchor="t" anchorCtr="0">
-            <a:spAutoFit/>
-          </a:bodyPr>
-          <a:lstStyle/>
-          <a:p>
-            <a:pPr marL="0" marR="0" lvl="0" indent="0" rtl="0">
-              <a:lnSpc>
-                <a:spcPct val="139958"/>
-              </a:lnSpc>
-              <a:spcBef>
-                <a:spcPts val="0"/>
-              </a:spcBef>
-              <a:spcAft>
-                <a:spcPts val="0"/>
-              </a:spcAft>
-              <a:buNone/>
-            </a:pPr>
-            <a:r>
-              <a:rPr lang="en-US" sz="1500" i="0" u="none" strike="noStrike" cap="none" dirty="0">
-                <a:solidFill>
-                  <a:schemeClr val="tx1"/>
-                </a:solidFill>
-                <a:latin typeface="Roboto"/>
-                <a:ea typeface="Roboto"/>
-                <a:cs typeface="Roboto"/>
-                <a:sym typeface="Roboto"/>
-              </a:rPr>
-              <a:t>В </a:t>
-            </a:r>
-            <a:r>
-              <a:rPr lang="en-US" sz="1500" i="0" u="none" strike="noStrike" cap="none" dirty="0" err="1">
-                <a:solidFill>
-                  <a:schemeClr val="tx1"/>
-                </a:solidFill>
-                <a:latin typeface="Roboto"/>
-                <a:ea typeface="Roboto"/>
-                <a:cs typeface="Roboto"/>
-                <a:sym typeface="Roboto"/>
-              </a:rPr>
-              <a:t>ходе</a:t>
-            </a:r>
-            <a:r>
-              <a:rPr lang="en-US" sz="1500" i="0" u="none" strike="noStrike" cap="none" dirty="0">
-                <a:solidFill>
-                  <a:schemeClr val="tx1"/>
-                </a:solidFill>
-                <a:latin typeface="Roboto"/>
-                <a:ea typeface="Roboto"/>
-                <a:cs typeface="Roboto"/>
-                <a:sym typeface="Roboto"/>
-              </a:rPr>
-              <a:t> </a:t>
-            </a:r>
-            <a:r>
-              <a:rPr lang="en-US" sz="1500" i="0" u="none" strike="noStrike" cap="none" dirty="0" err="1">
-                <a:solidFill>
-                  <a:schemeClr val="tx1"/>
-                </a:solidFill>
-                <a:latin typeface="Roboto"/>
-                <a:ea typeface="Roboto"/>
-                <a:cs typeface="Roboto"/>
-                <a:sym typeface="Roboto"/>
-              </a:rPr>
-              <a:t>проектной</a:t>
-            </a:r>
-            <a:r>
-              <a:rPr lang="en-US" sz="1500" i="0" u="none" strike="noStrike" cap="none" dirty="0">
-                <a:solidFill>
-                  <a:schemeClr val="tx1"/>
-                </a:solidFill>
-                <a:latin typeface="Roboto"/>
-                <a:ea typeface="Roboto"/>
-                <a:cs typeface="Roboto"/>
-                <a:sym typeface="Roboto"/>
-              </a:rPr>
-              <a:t> </a:t>
-            </a:r>
-            <a:r>
-              <a:rPr lang="en-US" sz="1500" i="0" u="none" strike="noStrike" cap="none" dirty="0" err="1">
-                <a:solidFill>
-                  <a:schemeClr val="tx1"/>
-                </a:solidFill>
-                <a:latin typeface="Roboto"/>
-                <a:ea typeface="Roboto"/>
-                <a:cs typeface="Roboto"/>
-                <a:sym typeface="Roboto"/>
-              </a:rPr>
-              <a:t>работы</a:t>
-            </a:r>
-            <a:r>
-              <a:rPr lang="en-US" sz="1500" i="0" u="none" strike="noStrike" cap="none" dirty="0">
-                <a:solidFill>
-                  <a:schemeClr val="tx1"/>
-                </a:solidFill>
-                <a:latin typeface="Roboto"/>
-                <a:ea typeface="Roboto"/>
-                <a:cs typeface="Roboto"/>
-                <a:sym typeface="Roboto"/>
-              </a:rPr>
-              <a:t> </a:t>
-            </a:r>
-            <a:r>
-              <a:rPr lang="en-US" sz="1500" i="0" u="none" strike="noStrike" cap="none" dirty="0" err="1" smtClean="0">
-                <a:solidFill>
-                  <a:schemeClr val="tx1"/>
-                </a:solidFill>
-                <a:latin typeface="Roboto"/>
-                <a:ea typeface="Roboto"/>
-                <a:cs typeface="Roboto"/>
-                <a:sym typeface="Roboto"/>
-              </a:rPr>
-              <a:t>был</a:t>
-            </a:r>
-            <a:r>
-              <a:rPr lang="ru-RU" sz="1500" i="0" u="none" strike="noStrike" cap="none" dirty="0" smtClean="0">
-                <a:solidFill>
-                  <a:schemeClr val="tx1"/>
-                </a:solidFill>
-                <a:latin typeface="Roboto"/>
-                <a:ea typeface="Roboto"/>
-                <a:cs typeface="Roboto"/>
-                <a:sym typeface="Roboto"/>
-              </a:rPr>
-              <a:t>о</a:t>
-            </a:r>
-            <a:r>
-              <a:rPr lang="en-US" sz="1500" i="0" u="none" strike="noStrike" cap="none" dirty="0" smtClean="0">
-                <a:solidFill>
-                  <a:schemeClr val="tx1"/>
-                </a:solidFill>
-                <a:latin typeface="Roboto"/>
-                <a:ea typeface="Roboto"/>
-                <a:cs typeface="Roboto"/>
-                <a:sym typeface="Roboto"/>
-              </a:rPr>
-              <a:t> </a:t>
-            </a:r>
-            <a:r>
-              <a:rPr lang="en-US" sz="1500" i="0" u="none" strike="noStrike" cap="none" dirty="0" err="1" smtClean="0">
-                <a:solidFill>
-                  <a:schemeClr val="tx1"/>
-                </a:solidFill>
-                <a:latin typeface="Roboto"/>
-                <a:ea typeface="Roboto"/>
-                <a:cs typeface="Roboto"/>
-                <a:sym typeface="Roboto"/>
-              </a:rPr>
-              <a:t>разработан</a:t>
-            </a:r>
-            <a:r>
-              <a:rPr lang="ru-RU" sz="1500" i="0" u="none" strike="noStrike" cap="none" dirty="0" smtClean="0">
-                <a:solidFill>
-                  <a:schemeClr val="tx1"/>
-                </a:solidFill>
-                <a:latin typeface="Roboto"/>
-                <a:ea typeface="Roboto"/>
-                <a:cs typeface="Roboto"/>
-                <a:sym typeface="Roboto"/>
-              </a:rPr>
-              <a:t>о</a:t>
-            </a:r>
-            <a:r>
-              <a:rPr lang="en-US" sz="1500" i="0" u="none" strike="noStrike" cap="none" dirty="0" smtClean="0">
-                <a:solidFill>
-                  <a:schemeClr val="tx1"/>
-                </a:solidFill>
-                <a:latin typeface="Roboto"/>
-                <a:ea typeface="Roboto"/>
-                <a:cs typeface="Roboto"/>
-                <a:sym typeface="Roboto"/>
-              </a:rPr>
-              <a:t> </a:t>
-            </a:r>
-            <a:r>
-              <a:rPr lang="en-US" sz="1500" i="0" u="none" strike="noStrike" cap="none" dirty="0" err="1" smtClean="0">
-                <a:solidFill>
-                  <a:schemeClr val="tx1"/>
-                </a:solidFill>
-                <a:latin typeface="Roboto"/>
-                <a:ea typeface="Roboto"/>
-                <a:cs typeface="Roboto"/>
-                <a:sym typeface="Roboto"/>
-              </a:rPr>
-              <a:t>полноценн</a:t>
-            </a:r>
-            <a:r>
-              <a:rPr lang="ru-RU" sz="1500" i="0" u="none" strike="noStrike" cap="none" dirty="0" err="1" smtClean="0">
-                <a:solidFill>
-                  <a:schemeClr val="tx1"/>
-                </a:solidFill>
-                <a:latin typeface="Roboto"/>
-                <a:ea typeface="Roboto"/>
-                <a:cs typeface="Roboto"/>
-                <a:sym typeface="Roboto"/>
-              </a:rPr>
-              <a:t>ое</a:t>
-            </a:r>
-            <a:r>
-              <a:rPr lang="ru-RU" sz="1500" i="0" u="none" strike="noStrike" cap="none" dirty="0" smtClean="0">
-                <a:solidFill>
-                  <a:schemeClr val="tx1"/>
-                </a:solidFill>
-                <a:latin typeface="Roboto"/>
-                <a:ea typeface="Roboto"/>
-                <a:cs typeface="Roboto"/>
-                <a:sym typeface="Roboto"/>
-              </a:rPr>
-              <a:t> </a:t>
-            </a:r>
-            <a:r>
-              <a:rPr lang="ru-RU" sz="1500" i="0" u="none" strike="noStrike" cap="none" dirty="0" err="1" smtClean="0">
-                <a:solidFill>
-                  <a:schemeClr val="tx1"/>
-                </a:solidFill>
-                <a:latin typeface="Roboto"/>
-                <a:ea typeface="Roboto"/>
-                <a:cs typeface="Roboto"/>
-                <a:sym typeface="Roboto"/>
-              </a:rPr>
-              <a:t>кроссплатформанное</a:t>
-            </a:r>
-            <a:r>
-              <a:rPr lang="ru-RU" sz="1500" i="0" u="none" strike="noStrike" cap="none" dirty="0" smtClean="0">
-                <a:solidFill>
-                  <a:schemeClr val="tx1"/>
-                </a:solidFill>
-                <a:latin typeface="Roboto"/>
-                <a:ea typeface="Roboto"/>
-                <a:cs typeface="Roboto"/>
-                <a:sym typeface="Roboto"/>
-              </a:rPr>
-              <a:t> приложение </a:t>
-            </a:r>
-          </a:p>
-          <a:p>
-            <a:pPr marL="0" marR="0" lvl="0" indent="0" rtl="0">
-              <a:lnSpc>
-                <a:spcPct val="139958"/>
-              </a:lnSpc>
-              <a:spcBef>
-                <a:spcPts val="0"/>
-              </a:spcBef>
-              <a:spcAft>
-                <a:spcPts val="0"/>
-              </a:spcAft>
-              <a:buNone/>
-            </a:pPr>
-            <a:r>
-              <a:rPr lang="ru-RU" sz="1500" i="0" u="none" strike="noStrike" cap="none" dirty="0" smtClean="0">
-                <a:solidFill>
-                  <a:schemeClr val="tx1"/>
-                </a:solidFill>
-                <a:latin typeface="Roboto"/>
-                <a:ea typeface="Roboto"/>
-                <a:cs typeface="Roboto"/>
-                <a:sym typeface="Roboto"/>
-              </a:rPr>
-              <a:t>«</a:t>
-            </a:r>
-            <a:r>
-              <a:rPr lang="en-US" sz="1500" i="0" u="none" strike="noStrike" cap="none" dirty="0" smtClean="0">
-                <a:solidFill>
-                  <a:schemeClr val="tx1"/>
-                </a:solidFill>
-                <a:latin typeface="Roboto"/>
-                <a:ea typeface="Roboto"/>
-                <a:cs typeface="Roboto"/>
-                <a:sym typeface="Roboto"/>
-              </a:rPr>
-              <a:t>My Diary</a:t>
-            </a:r>
-            <a:r>
-              <a:rPr lang="ru-RU" sz="1500" i="0" u="none" strike="noStrike" cap="none" dirty="0" smtClean="0">
-                <a:solidFill>
-                  <a:schemeClr val="tx1"/>
-                </a:solidFill>
-                <a:latin typeface="Roboto"/>
-                <a:ea typeface="Roboto"/>
-                <a:cs typeface="Roboto"/>
-                <a:sym typeface="Roboto"/>
-              </a:rPr>
-              <a:t>».</a:t>
-            </a:r>
-          </a:p>
-          <a:p>
-            <a:pPr marL="0" marR="0" lvl="0" indent="0" rtl="0">
-              <a:lnSpc>
-                <a:spcPct val="139958"/>
-              </a:lnSpc>
-              <a:spcBef>
-                <a:spcPts val="0"/>
-              </a:spcBef>
-              <a:spcAft>
-                <a:spcPts val="0"/>
-              </a:spcAft>
-              <a:buNone/>
-            </a:pPr>
-            <a:r>
-              <a:rPr lang="ru-RU" sz="1500" dirty="0" smtClean="0">
-                <a:solidFill>
-                  <a:schemeClr val="tx1"/>
-                </a:solidFill>
-                <a:latin typeface="Roboto"/>
-                <a:ea typeface="Roboto"/>
-                <a:cs typeface="Roboto"/>
-                <a:sym typeface="Roboto"/>
-              </a:rPr>
-              <a:t>В результате все цели достигнуты.</a:t>
-            </a:r>
-            <a:r>
-              <a:rPr lang="ru-RU" sz="1500" b="0" i="0" u="none" strike="noStrike" cap="none" dirty="0" smtClean="0">
-                <a:solidFill>
-                  <a:schemeClr val="tx1"/>
-                </a:solidFill>
-                <a:latin typeface="Roboto"/>
-                <a:ea typeface="Roboto"/>
-                <a:cs typeface="Roboto"/>
-                <a:sym typeface="Roboto"/>
-              </a:rPr>
-              <a:t> </a:t>
-            </a:r>
-            <a:endParaRPr sz="1500">
-              <a:solidFill>
-                <a:srgbClr val="108000"/>
-              </a:solidFill>
+              <a:latin typeface="Merriweather" charset="0"/>
+              <a:ea typeface="Merriweather" charset="0"/>
+              <a:cs typeface="Merriweather" charset="0"/>
             </a:endParaRPr>
           </a:p>
         </p:txBody>
@@ -9433,7 +9602,7 @@
   <p:cSld>
     <p:spTree>
       <p:nvGrpSpPr>
-        <p:cNvPr id="1" name="Shape 183"/>
+        <p:cNvPr id="1" name="Shape 188"/>
         <p:cNvGrpSpPr/>
         <p:nvPr/>
       </p:nvGrpSpPr>
@@ -9447,14 +9616,14 @@
       </p:grpSpPr>
       <p:sp>
         <p:nvSpPr>
-          <p:cNvPr id="184" name="Google Shape;184;p21"/>
+          <p:cNvPr id="189" name="Google Shape;189;p22"/>
           <p:cNvSpPr txBox="1"/>
           <p:nvPr/>
         </p:nvSpPr>
         <p:spPr>
           <a:xfrm>
-            <a:off x="305251" y="2736300"/>
-            <a:ext cx="11581500" cy="1354217"/>
+            <a:off x="590204" y="548639"/>
+            <a:ext cx="11296571" cy="415498"/>
           </a:xfrm>
           <a:prstGeom prst="rect">
             <a:avLst/>
@@ -9470,7 +9639,7 @@
           </a:bodyPr>
           <a:lstStyle/>
           <a:p>
-            <a:pPr marL="0" marR="0" lvl="0" indent="0" algn="ctr" rtl="0">
+            <a:pPr marL="0" marR="0" lvl="0" indent="0" rtl="0">
               <a:spcBef>
                 <a:spcPts val="0"/>
               </a:spcBef>
@@ -9480,72 +9649,370 @@
               <a:buNone/>
             </a:pPr>
             <a:r>
-              <a:rPr lang="en-US" sz="4400" b="1" i="0" u="none" strike="noStrike" cap="none" dirty="0" err="1">
-                <a:solidFill>
-                  <a:schemeClr val="tx1"/>
-                </a:solidFill>
-                <a:latin typeface="Merriweather" charset="0"/>
-                <a:ea typeface="Merriweather" charset="0"/>
-                <a:cs typeface="Merriweather" charset="0"/>
+              <a:rPr lang="en-US" sz="2700" b="1" i="0" u="none" strike="noStrike" cap="none" dirty="0" err="1">
+                <a:solidFill>
+                  <a:schemeClr val="tx1"/>
+                </a:solidFill>
+                <a:latin typeface="Merriweather"/>
+                <a:ea typeface="Merriweather"/>
+                <a:cs typeface="Merriweather"/>
                 <a:sym typeface="Merriweather"/>
               </a:rPr>
-              <a:t>Демонстрация</a:t>
-            </a:r>
-            <a:r>
-              <a:rPr lang="en-US" sz="4400" b="1" i="0" u="none" strike="noStrike" cap="none" dirty="0">
-                <a:solidFill>
-                  <a:schemeClr val="tx1"/>
-                </a:solidFill>
-                <a:latin typeface="Merriweather" charset="0"/>
-                <a:ea typeface="Merriweather" charset="0"/>
-                <a:cs typeface="Merriweather" charset="0"/>
-                <a:sym typeface="Merriweather"/>
-              </a:rPr>
-              <a:t> </a:t>
-            </a:r>
-            <a:r>
-              <a:rPr lang="en-US" sz="4400" b="1" i="0" u="none" strike="noStrike" cap="none" dirty="0" err="1">
-                <a:solidFill>
-                  <a:schemeClr val="tx1"/>
-                </a:solidFill>
-                <a:latin typeface="Merriweather" charset="0"/>
-                <a:ea typeface="Merriweather" charset="0"/>
-                <a:cs typeface="Merriweather" charset="0"/>
-                <a:sym typeface="Merriweather"/>
-              </a:rPr>
-              <a:t>программного</a:t>
-            </a:r>
-            <a:r>
-              <a:rPr lang="en-US" sz="4400" b="1" i="0" u="none" strike="noStrike" cap="none" dirty="0">
-                <a:solidFill>
-                  <a:schemeClr val="tx1"/>
-                </a:solidFill>
-                <a:latin typeface="Merriweather" charset="0"/>
-                <a:ea typeface="Merriweather" charset="0"/>
-                <a:cs typeface="Merriweather" charset="0"/>
-                <a:sym typeface="Merriweather"/>
-              </a:rPr>
-              <a:t> </a:t>
-            </a:r>
-            <a:r>
-              <a:rPr lang="en-US" sz="4400" b="1" i="0" u="none" strike="noStrike" cap="none" dirty="0" err="1">
-                <a:solidFill>
-                  <a:schemeClr val="tx1"/>
-                </a:solidFill>
-                <a:latin typeface="Merriweather" charset="0"/>
-                <a:ea typeface="Merriweather" charset="0"/>
-                <a:cs typeface="Merriweather" charset="0"/>
-                <a:sym typeface="Merriweather"/>
-              </a:rPr>
-              <a:t>продукта</a:t>
-            </a:r>
-            <a:endParaRPr sz="1200">
+              <a:t>Вывод</a:t>
+            </a:r>
+            <a:endParaRPr>
               <a:solidFill>
                 <a:schemeClr val="tx1"/>
               </a:solidFill>
-              <a:latin typeface="Merriweather" charset="0"/>
-              <a:ea typeface="Merriweather" charset="0"/>
-              <a:cs typeface="Merriweather" charset="0"/>
+            </a:endParaRPr>
+          </a:p>
+        </p:txBody>
+      </p:sp>
+      <p:sp>
+        <p:nvSpPr>
+          <p:cNvPr id="191" name="Google Shape;191;p22"/>
+          <p:cNvSpPr txBox="1"/>
+          <p:nvPr/>
+        </p:nvSpPr>
+        <p:spPr>
+          <a:xfrm>
+            <a:off x="581025" y="1554480"/>
+            <a:ext cx="11030100" cy="969496"/>
+          </a:xfrm>
+          <a:prstGeom prst="rect">
+            <a:avLst/>
+          </a:prstGeom>
+          <a:noFill/>
+          <a:ln>
+            <a:noFill/>
+          </a:ln>
+        </p:spPr>
+        <p:txBody>
+          <a:bodyPr spcFirstLastPara="1" wrap="square" lIns="0" tIns="0" rIns="0" bIns="0" anchor="t" anchorCtr="0">
+            <a:spAutoFit/>
+          </a:bodyPr>
+          <a:lstStyle/>
+          <a:p>
+            <a:pPr marL="0" marR="0" lvl="0" indent="0" rtl="0">
+              <a:lnSpc>
+                <a:spcPct val="139958"/>
+              </a:lnSpc>
+              <a:spcBef>
+                <a:spcPts val="0"/>
+              </a:spcBef>
+              <a:spcAft>
+                <a:spcPts val="0"/>
+              </a:spcAft>
+              <a:buNone/>
+            </a:pPr>
+            <a:r>
+              <a:rPr lang="en-US" sz="1500" i="0" u="none" strike="noStrike" cap="none" dirty="0">
+                <a:solidFill>
+                  <a:schemeClr val="tx1"/>
+                </a:solidFill>
+                <a:latin typeface="Roboto"/>
+                <a:ea typeface="Roboto"/>
+                <a:cs typeface="Roboto"/>
+                <a:sym typeface="Roboto"/>
+              </a:rPr>
+              <a:t>В </a:t>
+            </a:r>
+            <a:r>
+              <a:rPr lang="en-US" sz="1500" i="0" u="none" strike="noStrike" cap="none" dirty="0" err="1">
+                <a:solidFill>
+                  <a:schemeClr val="tx1"/>
+                </a:solidFill>
+                <a:latin typeface="Roboto"/>
+                <a:ea typeface="Roboto"/>
+                <a:cs typeface="Roboto"/>
+                <a:sym typeface="Roboto"/>
+              </a:rPr>
+              <a:t>ходе</a:t>
+            </a:r>
+            <a:r>
+              <a:rPr lang="en-US" sz="1500" i="0" u="none" strike="noStrike" cap="none" dirty="0">
+                <a:solidFill>
+                  <a:schemeClr val="tx1"/>
+                </a:solidFill>
+                <a:latin typeface="Roboto"/>
+                <a:ea typeface="Roboto"/>
+                <a:cs typeface="Roboto"/>
+                <a:sym typeface="Roboto"/>
+              </a:rPr>
+              <a:t> </a:t>
+            </a:r>
+            <a:r>
+              <a:rPr lang="en-US" sz="1500" i="0" u="none" strike="noStrike" cap="none" dirty="0" err="1">
+                <a:solidFill>
+                  <a:schemeClr val="tx1"/>
+                </a:solidFill>
+                <a:latin typeface="Roboto"/>
+                <a:ea typeface="Roboto"/>
+                <a:cs typeface="Roboto"/>
+                <a:sym typeface="Roboto"/>
+              </a:rPr>
+              <a:t>проектной</a:t>
+            </a:r>
+            <a:r>
+              <a:rPr lang="en-US" sz="1500" i="0" u="none" strike="noStrike" cap="none" dirty="0">
+                <a:solidFill>
+                  <a:schemeClr val="tx1"/>
+                </a:solidFill>
+                <a:latin typeface="Roboto"/>
+                <a:ea typeface="Roboto"/>
+                <a:cs typeface="Roboto"/>
+                <a:sym typeface="Roboto"/>
+              </a:rPr>
+              <a:t> </a:t>
+            </a:r>
+            <a:r>
+              <a:rPr lang="en-US" sz="1500" i="0" u="none" strike="noStrike" cap="none" dirty="0" err="1">
+                <a:solidFill>
+                  <a:schemeClr val="tx1"/>
+                </a:solidFill>
+                <a:latin typeface="Roboto"/>
+                <a:ea typeface="Roboto"/>
+                <a:cs typeface="Roboto"/>
+                <a:sym typeface="Roboto"/>
+              </a:rPr>
+              <a:t>работы</a:t>
+            </a:r>
+            <a:r>
+              <a:rPr lang="en-US" sz="1500" i="0" u="none" strike="noStrike" cap="none" dirty="0">
+                <a:solidFill>
+                  <a:schemeClr val="tx1"/>
+                </a:solidFill>
+                <a:latin typeface="Roboto"/>
+                <a:ea typeface="Roboto"/>
+                <a:cs typeface="Roboto"/>
+                <a:sym typeface="Roboto"/>
+              </a:rPr>
+              <a:t> </a:t>
+            </a:r>
+            <a:r>
+              <a:rPr lang="en-US" sz="1500" i="0" u="none" strike="noStrike" cap="none" dirty="0" err="1" smtClean="0">
+                <a:solidFill>
+                  <a:schemeClr val="tx1"/>
+                </a:solidFill>
+                <a:latin typeface="Roboto"/>
+                <a:ea typeface="Roboto"/>
+                <a:cs typeface="Roboto"/>
+                <a:sym typeface="Roboto"/>
+              </a:rPr>
+              <a:t>был</a:t>
+            </a:r>
+            <a:r>
+              <a:rPr lang="ru-RU" sz="1500" i="0" u="none" strike="noStrike" cap="none" dirty="0" smtClean="0">
+                <a:solidFill>
+                  <a:schemeClr val="tx1"/>
+                </a:solidFill>
+                <a:latin typeface="Roboto"/>
+                <a:ea typeface="Roboto"/>
+                <a:cs typeface="Roboto"/>
+                <a:sym typeface="Roboto"/>
+              </a:rPr>
+              <a:t>о</a:t>
+            </a:r>
+            <a:r>
+              <a:rPr lang="en-US" sz="1500" i="0" u="none" strike="noStrike" cap="none" dirty="0" smtClean="0">
+                <a:solidFill>
+                  <a:schemeClr val="tx1"/>
+                </a:solidFill>
+                <a:latin typeface="Roboto"/>
+                <a:ea typeface="Roboto"/>
+                <a:cs typeface="Roboto"/>
+                <a:sym typeface="Roboto"/>
+              </a:rPr>
+              <a:t> </a:t>
+            </a:r>
+            <a:r>
+              <a:rPr lang="en-US" sz="1500" i="0" u="none" strike="noStrike" cap="none" dirty="0" err="1" smtClean="0">
+                <a:solidFill>
+                  <a:schemeClr val="tx1"/>
+                </a:solidFill>
+                <a:latin typeface="Roboto"/>
+                <a:ea typeface="Roboto"/>
+                <a:cs typeface="Roboto"/>
+                <a:sym typeface="Roboto"/>
+              </a:rPr>
+              <a:t>разработан</a:t>
+            </a:r>
+            <a:r>
+              <a:rPr lang="ru-RU" sz="1500" i="0" u="none" strike="noStrike" cap="none" dirty="0" smtClean="0">
+                <a:solidFill>
+                  <a:schemeClr val="tx1"/>
+                </a:solidFill>
+                <a:latin typeface="Roboto"/>
+                <a:ea typeface="Roboto"/>
+                <a:cs typeface="Roboto"/>
+                <a:sym typeface="Roboto"/>
+              </a:rPr>
+              <a:t>о</a:t>
+            </a:r>
+            <a:r>
+              <a:rPr lang="en-US" sz="1500" i="0" u="none" strike="noStrike" cap="none" dirty="0" smtClean="0">
+                <a:solidFill>
+                  <a:schemeClr val="tx1"/>
+                </a:solidFill>
+                <a:latin typeface="Roboto"/>
+                <a:ea typeface="Roboto"/>
+                <a:cs typeface="Roboto"/>
+                <a:sym typeface="Roboto"/>
+              </a:rPr>
+              <a:t> </a:t>
+            </a:r>
+            <a:r>
+              <a:rPr lang="en-US" sz="1500" i="0" u="none" strike="noStrike" cap="none" dirty="0" err="1" smtClean="0">
+                <a:solidFill>
+                  <a:schemeClr val="tx1"/>
+                </a:solidFill>
+                <a:latin typeface="Roboto"/>
+                <a:ea typeface="Roboto"/>
+                <a:cs typeface="Roboto"/>
+                <a:sym typeface="Roboto"/>
+              </a:rPr>
+              <a:t>полноценн</a:t>
+            </a:r>
+            <a:r>
+              <a:rPr lang="ru-RU" sz="1500" i="0" u="none" strike="noStrike" cap="none" dirty="0" err="1" smtClean="0">
+                <a:solidFill>
+                  <a:schemeClr val="tx1"/>
+                </a:solidFill>
+                <a:latin typeface="Roboto"/>
+                <a:ea typeface="Roboto"/>
+                <a:cs typeface="Roboto"/>
+                <a:sym typeface="Roboto"/>
+              </a:rPr>
+              <a:t>ое</a:t>
+            </a:r>
+            <a:r>
+              <a:rPr lang="ru-RU" sz="1500" i="0" u="none" strike="noStrike" cap="none" dirty="0" smtClean="0">
+                <a:solidFill>
+                  <a:schemeClr val="tx1"/>
+                </a:solidFill>
+                <a:latin typeface="Roboto"/>
+                <a:ea typeface="Roboto"/>
+                <a:cs typeface="Roboto"/>
+                <a:sym typeface="Roboto"/>
+              </a:rPr>
+              <a:t> </a:t>
+            </a:r>
+            <a:r>
+              <a:rPr lang="ru-RU" sz="1500" i="0" u="none" strike="noStrike" cap="none" dirty="0" err="1" smtClean="0">
+                <a:solidFill>
+                  <a:schemeClr val="tx1"/>
+                </a:solidFill>
+                <a:latin typeface="Roboto"/>
+                <a:ea typeface="Roboto"/>
+                <a:cs typeface="Roboto"/>
+                <a:sym typeface="Roboto"/>
+              </a:rPr>
+              <a:t>кроссплатформанное</a:t>
+            </a:r>
+            <a:r>
+              <a:rPr lang="ru-RU" sz="1500" i="0" u="none" strike="noStrike" cap="none" dirty="0" smtClean="0">
+                <a:solidFill>
+                  <a:schemeClr val="tx1"/>
+                </a:solidFill>
+                <a:latin typeface="Roboto"/>
+                <a:ea typeface="Roboto"/>
+                <a:cs typeface="Roboto"/>
+                <a:sym typeface="Roboto"/>
+              </a:rPr>
+              <a:t> приложение </a:t>
+            </a:r>
+          </a:p>
+          <a:p>
+            <a:pPr marL="0" marR="0" lvl="0" indent="0" rtl="0">
+              <a:lnSpc>
+                <a:spcPct val="139958"/>
+              </a:lnSpc>
+              <a:spcBef>
+                <a:spcPts val="0"/>
+              </a:spcBef>
+              <a:spcAft>
+                <a:spcPts val="0"/>
+              </a:spcAft>
+              <a:buNone/>
+            </a:pPr>
+            <a:r>
+              <a:rPr lang="ru-RU" sz="1500" i="0" u="none" strike="noStrike" cap="none" dirty="0" smtClean="0">
+                <a:solidFill>
+                  <a:schemeClr val="tx1"/>
+                </a:solidFill>
+                <a:latin typeface="Roboto"/>
+                <a:ea typeface="Roboto"/>
+                <a:cs typeface="Roboto"/>
+                <a:sym typeface="Roboto"/>
+              </a:rPr>
+              <a:t>«</a:t>
+            </a:r>
+            <a:r>
+              <a:rPr lang="en-US" sz="1500" i="0" u="none" strike="noStrike" cap="none" dirty="0" smtClean="0">
+                <a:solidFill>
+                  <a:schemeClr val="tx1"/>
+                </a:solidFill>
+                <a:latin typeface="Roboto"/>
+                <a:ea typeface="Roboto"/>
+                <a:cs typeface="Roboto"/>
+                <a:sym typeface="Roboto"/>
+              </a:rPr>
+              <a:t>My Diary</a:t>
+            </a:r>
+            <a:r>
+              <a:rPr lang="ru-RU" sz="1500" i="0" u="none" strike="noStrike" cap="none" dirty="0" smtClean="0">
+                <a:solidFill>
+                  <a:schemeClr val="tx1"/>
+                </a:solidFill>
+                <a:latin typeface="Roboto"/>
+                <a:ea typeface="Roboto"/>
+                <a:cs typeface="Roboto"/>
+                <a:sym typeface="Roboto"/>
+              </a:rPr>
+              <a:t>».</a:t>
+            </a:r>
+          </a:p>
+          <a:p>
+            <a:pPr marL="0" marR="0" lvl="0" indent="0" rtl="0">
+              <a:lnSpc>
+                <a:spcPct val="139958"/>
+              </a:lnSpc>
+              <a:spcBef>
+                <a:spcPts val="0"/>
+              </a:spcBef>
+              <a:spcAft>
+                <a:spcPts val="0"/>
+              </a:spcAft>
+              <a:buNone/>
+            </a:pPr>
+            <a:r>
+              <a:rPr lang="ru-RU" sz="1500" dirty="0" smtClean="0">
+                <a:solidFill>
+                  <a:schemeClr val="tx1"/>
+                </a:solidFill>
+                <a:latin typeface="Roboto"/>
+                <a:ea typeface="Roboto"/>
+                <a:cs typeface="Roboto"/>
+                <a:sym typeface="Roboto"/>
+              </a:rPr>
+              <a:t>В результате все цели достигнуты.</a:t>
+            </a:r>
+            <a:r>
+              <a:rPr lang="ru-RU" sz="1500" b="0" i="0" u="none" strike="noStrike" cap="none" dirty="0" smtClean="0">
+                <a:solidFill>
+                  <a:schemeClr val="tx1"/>
+                </a:solidFill>
+                <a:latin typeface="Roboto"/>
+                <a:ea typeface="Roboto"/>
+                <a:cs typeface="Roboto"/>
+                <a:sym typeface="Roboto"/>
+              </a:rPr>
+              <a:t> </a:t>
+            </a:r>
+            <a:endParaRPr sz="1500">
+              <a:solidFill>
+                <a:srgbClr val="108000"/>
+              </a:solidFill>
             </a:endParaRPr>
           </a:p>
         </p:txBody>

--- a/документация/Презентация My Diary (не доделана).pptx
+++ b/документация/Презентация My Diary (не доделана).pptx
@@ -5,42 +5,43 @@
     <p:sldMasterId id="2147483660" r:id="rId1"/>
   </p:sldMasterIdLst>
   <p:notesMasterIdLst>
-    <p:notesMasterId r:id="rId11"/>
+    <p:notesMasterId r:id="rId12"/>
   </p:notesMasterIdLst>
   <p:sldIdLst>
     <p:sldId id="256" r:id="rId2"/>
     <p:sldId id="257" r:id="rId3"/>
     <p:sldId id="258" r:id="rId4"/>
     <p:sldId id="259" r:id="rId5"/>
-    <p:sldId id="266" r:id="rId6"/>
-    <p:sldId id="267" r:id="rId7"/>
-    <p:sldId id="263" r:id="rId8"/>
-    <p:sldId id="264" r:id="rId9"/>
-    <p:sldId id="265" r:id="rId10"/>
+    <p:sldId id="268" r:id="rId6"/>
+    <p:sldId id="269" r:id="rId7"/>
+    <p:sldId id="267" r:id="rId8"/>
+    <p:sldId id="263" r:id="rId9"/>
+    <p:sldId id="264" r:id="rId10"/>
+    <p:sldId id="265" r:id="rId11"/>
   </p:sldIdLst>
   <p:sldSz cx="12192000" cy="6858000"/>
   <p:notesSz cx="6858000" cy="9144000"/>
   <p:embeddedFontLst>
     <p:embeddedFont>
       <p:font typeface="Roboto" charset="0"/>
-      <p:regular r:id="rId12"/>
-      <p:bold r:id="rId13"/>
-      <p:italic r:id="rId14"/>
-      <p:boldItalic r:id="rId15"/>
+      <p:regular r:id="rId13"/>
+      <p:bold r:id="rId14"/>
+      <p:italic r:id="rId15"/>
+      <p:boldItalic r:id="rId16"/>
     </p:embeddedFont>
     <p:embeddedFont>
       <p:font typeface="Calibri" pitchFamily="34" charset="0"/>
-      <p:regular r:id="rId16"/>
-      <p:bold r:id="rId17"/>
-      <p:italic r:id="rId18"/>
-      <p:boldItalic r:id="rId19"/>
+      <p:regular r:id="rId17"/>
+      <p:bold r:id="rId18"/>
+      <p:italic r:id="rId19"/>
+      <p:boldItalic r:id="rId20"/>
     </p:embeddedFont>
     <p:embeddedFont>
       <p:font typeface="Merriweather" charset="0"/>
-      <p:regular r:id="rId20"/>
-      <p:bold r:id="rId21"/>
-      <p:italic r:id="rId22"/>
-      <p:boldItalic r:id="rId23"/>
+      <p:regular r:id="rId21"/>
+      <p:bold r:id="rId22"/>
+      <p:italic r:id="rId23"/>
+      <p:boldItalic r:id="rId24"/>
     </p:embeddedFont>
   </p:embeddedFontLst>
   <p:defaultTextStyle>
@@ -1153,7 +1154,7 @@
   <p:cSld>
     <p:spTree>
       <p:nvGrpSpPr>
-        <p:cNvPr id="1" name="Shape 164"/>
+        <p:cNvPr id="1" name="Shape 118"/>
         <p:cNvGrpSpPr/>
         <p:nvPr/>
       </p:nvGrpSpPr>
@@ -1167,7 +1168,7 @@
       </p:grpSpPr>
       <p:sp>
         <p:nvSpPr>
-          <p:cNvPr id="165" name="Google Shape;165;p8:notes"/>
+          <p:cNvPr id="119" name="Google Shape;119;p4:notes"/>
           <p:cNvSpPr txBox="1">
             <a:spLocks noGrp="1"/>
           </p:cNvSpPr>
@@ -1205,7 +1206,7 @@
       </p:sp>
       <p:sp>
         <p:nvSpPr>
-          <p:cNvPr id="166" name="Google Shape;166;p8:notes"/>
+          <p:cNvPr id="120" name="Google Shape;120;p4:notes"/>
           <p:cNvSpPr>
             <a:spLocks noGrp="1" noRot="1" noChangeAspect="1"/>
           </p:cNvSpPr>
@@ -1257,7 +1258,7 @@
   <p:cSld>
     <p:spTree>
       <p:nvGrpSpPr>
-        <p:cNvPr id="1" name="Shape 180"/>
+        <p:cNvPr id="1" name="Shape 118"/>
         <p:cNvGrpSpPr/>
         <p:nvPr/>
       </p:nvGrpSpPr>
@@ -1271,7 +1272,7 @@
       </p:grpSpPr>
       <p:sp>
         <p:nvSpPr>
-          <p:cNvPr id="181" name="Google Shape;181;p9:notes"/>
+          <p:cNvPr id="119" name="Google Shape;119;p4:notes"/>
           <p:cNvSpPr txBox="1">
             <a:spLocks noGrp="1"/>
           </p:cNvSpPr>
@@ -1309,7 +1310,7 @@
       </p:sp>
       <p:sp>
         <p:nvSpPr>
-          <p:cNvPr id="182" name="Google Shape;182;p9:notes"/>
+          <p:cNvPr id="120" name="Google Shape;120;p4:notes"/>
           <p:cNvSpPr>
             <a:spLocks noGrp="1" noRot="1" noChangeAspect="1"/>
           </p:cNvSpPr>
@@ -1357,6 +1358,214 @@
 </file>
 
 <file path=ppt/notesSlides/notesSlide7.xml><?xml version="1.0" encoding="utf-8"?>
+<p:notes xmlns:a="http://schemas.openxmlformats.org/drawingml/2006/main" xmlns:r="http://schemas.openxmlformats.org/officeDocument/2006/relationships" xmlns:p="http://schemas.openxmlformats.org/presentationml/2006/main" showMasterSp="0" showMasterPhAnim="0">
+  <p:cSld>
+    <p:spTree>
+      <p:nvGrpSpPr>
+        <p:cNvPr id="1" name="Shape 164"/>
+        <p:cNvGrpSpPr/>
+        <p:nvPr/>
+      </p:nvGrpSpPr>
+      <p:grpSpPr>
+        <a:xfrm>
+          <a:off x="0" y="0"/>
+          <a:ext cx="0" cy="0"/>
+          <a:chOff x="0" y="0"/>
+          <a:chExt cx="0" cy="0"/>
+        </a:xfrm>
+      </p:grpSpPr>
+      <p:sp>
+        <p:nvSpPr>
+          <p:cNvPr id="165" name="Google Shape;165;p8:notes"/>
+          <p:cNvSpPr txBox="1">
+            <a:spLocks noGrp="1"/>
+          </p:cNvSpPr>
+          <p:nvPr>
+            <p:ph type="body" idx="1"/>
+          </p:nvPr>
+        </p:nvSpPr>
+        <p:spPr>
+          <a:xfrm>
+            <a:off x="685800" y="4343400"/>
+            <a:ext cx="5486400" cy="4114800"/>
+          </a:xfrm>
+          <a:prstGeom prst="rect">
+            <a:avLst/>
+          </a:prstGeom>
+        </p:spPr>
+        <p:txBody>
+          <a:bodyPr spcFirstLastPara="1" wrap="square" lIns="91425" tIns="91425" rIns="91425" bIns="91425" anchor="t" anchorCtr="0">
+            <a:noAutofit/>
+          </a:bodyPr>
+          <a:lstStyle/>
+          <a:p>
+            <a:pPr marL="0" lvl="0" indent="0" algn="l" rtl="0">
+              <a:spcBef>
+                <a:spcPts val="0"/>
+              </a:spcBef>
+              <a:spcAft>
+                <a:spcPts val="0"/>
+              </a:spcAft>
+              <a:buNone/>
+            </a:pPr>
+            <a:endParaRPr/>
+          </a:p>
+        </p:txBody>
+      </p:sp>
+      <p:sp>
+        <p:nvSpPr>
+          <p:cNvPr id="166" name="Google Shape;166;p8:notes"/>
+          <p:cNvSpPr>
+            <a:spLocks noGrp="1" noRot="1" noChangeAspect="1"/>
+          </p:cNvSpPr>
+          <p:nvPr>
+            <p:ph type="sldImg" idx="2"/>
+          </p:nvPr>
+        </p:nvSpPr>
+        <p:spPr>
+          <a:xfrm>
+            <a:off x="381000" y="685800"/>
+            <a:ext cx="6096000" cy="3429000"/>
+          </a:xfrm>
+          <a:custGeom>
+            <a:avLst/>
+            <a:gdLst/>
+            <a:ahLst/>
+            <a:cxnLst/>
+            <a:rect l="l" t="t" r="r" b="b"/>
+            <a:pathLst>
+              <a:path w="120000" h="120000" extrusionOk="0">
+                <a:moveTo>
+                  <a:pt x="0" y="0"/>
+                </a:moveTo>
+                <a:lnTo>
+                  <a:pt x="120000" y="0"/>
+                </a:lnTo>
+                <a:lnTo>
+                  <a:pt x="120000" y="120000"/>
+                </a:lnTo>
+                <a:lnTo>
+                  <a:pt x="0" y="120000"/>
+                </a:lnTo>
+                <a:close/>
+              </a:path>
+            </a:pathLst>
+          </a:custGeom>
+        </p:spPr>
+      </p:sp>
+    </p:spTree>
+  </p:cSld>
+  <p:clrMapOvr>
+    <a:masterClrMapping/>
+  </p:clrMapOvr>
+</p:notes>
+</file>
+
+<file path=ppt/notesSlides/notesSlide8.xml><?xml version="1.0" encoding="utf-8"?>
+<p:notes xmlns:a="http://schemas.openxmlformats.org/drawingml/2006/main" xmlns:r="http://schemas.openxmlformats.org/officeDocument/2006/relationships" xmlns:p="http://schemas.openxmlformats.org/presentationml/2006/main" showMasterSp="0" showMasterPhAnim="0">
+  <p:cSld>
+    <p:spTree>
+      <p:nvGrpSpPr>
+        <p:cNvPr id="1" name="Shape 180"/>
+        <p:cNvGrpSpPr/>
+        <p:nvPr/>
+      </p:nvGrpSpPr>
+      <p:grpSpPr>
+        <a:xfrm>
+          <a:off x="0" y="0"/>
+          <a:ext cx="0" cy="0"/>
+          <a:chOff x="0" y="0"/>
+          <a:chExt cx="0" cy="0"/>
+        </a:xfrm>
+      </p:grpSpPr>
+      <p:sp>
+        <p:nvSpPr>
+          <p:cNvPr id="181" name="Google Shape;181;p9:notes"/>
+          <p:cNvSpPr txBox="1">
+            <a:spLocks noGrp="1"/>
+          </p:cNvSpPr>
+          <p:nvPr>
+            <p:ph type="body" idx="1"/>
+          </p:nvPr>
+        </p:nvSpPr>
+        <p:spPr>
+          <a:xfrm>
+            <a:off x="685800" y="4343400"/>
+            <a:ext cx="5486400" cy="4114800"/>
+          </a:xfrm>
+          <a:prstGeom prst="rect">
+            <a:avLst/>
+          </a:prstGeom>
+        </p:spPr>
+        <p:txBody>
+          <a:bodyPr spcFirstLastPara="1" wrap="square" lIns="91425" tIns="91425" rIns="91425" bIns="91425" anchor="t" anchorCtr="0">
+            <a:noAutofit/>
+          </a:bodyPr>
+          <a:lstStyle/>
+          <a:p>
+            <a:pPr marL="0" lvl="0" indent="0" algn="l" rtl="0">
+              <a:spcBef>
+                <a:spcPts val="0"/>
+              </a:spcBef>
+              <a:spcAft>
+                <a:spcPts val="0"/>
+              </a:spcAft>
+              <a:buNone/>
+            </a:pPr>
+            <a:endParaRPr/>
+          </a:p>
+        </p:txBody>
+      </p:sp>
+      <p:sp>
+        <p:nvSpPr>
+          <p:cNvPr id="182" name="Google Shape;182;p9:notes"/>
+          <p:cNvSpPr>
+            <a:spLocks noGrp="1" noRot="1" noChangeAspect="1"/>
+          </p:cNvSpPr>
+          <p:nvPr>
+            <p:ph type="sldImg" idx="2"/>
+          </p:nvPr>
+        </p:nvSpPr>
+        <p:spPr>
+          <a:xfrm>
+            <a:off x="381000" y="685800"/>
+            <a:ext cx="6096000" cy="3429000"/>
+          </a:xfrm>
+          <a:custGeom>
+            <a:avLst/>
+            <a:gdLst/>
+            <a:ahLst/>
+            <a:cxnLst/>
+            <a:rect l="l" t="t" r="r" b="b"/>
+            <a:pathLst>
+              <a:path w="120000" h="120000" extrusionOk="0">
+                <a:moveTo>
+                  <a:pt x="0" y="0"/>
+                </a:moveTo>
+                <a:lnTo>
+                  <a:pt x="120000" y="0"/>
+                </a:lnTo>
+                <a:lnTo>
+                  <a:pt x="120000" y="120000"/>
+                </a:lnTo>
+                <a:lnTo>
+                  <a:pt x="0" y="120000"/>
+                </a:lnTo>
+                <a:close/>
+              </a:path>
+            </a:pathLst>
+          </a:custGeom>
+        </p:spPr>
+      </p:sp>
+    </p:spTree>
+  </p:cSld>
+  <p:clrMapOvr>
+    <a:masterClrMapping/>
+  </p:clrMapOvr>
+</p:notes>
+</file>
+
+<file path=ppt/notesSlides/notesSlide9.xml><?xml version="1.0" encoding="utf-8"?>
 <p:notes xmlns:a="http://schemas.openxmlformats.org/drawingml/2006/main" xmlns:r="http://schemas.openxmlformats.org/officeDocument/2006/relationships" xmlns:p="http://schemas.openxmlformats.org/presentationml/2006/main" showMasterSp="0" showMasterPhAnim="0">
   <p:cSld>
     <p:spTree>
@@ -5224,6 +5433,441 @@
             <a:endParaRPr>
               <a:solidFill>
                 <a:schemeClr val="tx1"/>
+              </a:solidFill>
+            </a:endParaRPr>
+          </a:p>
+        </p:txBody>
+      </p:sp>
+    </p:spTree>
+  </p:cSld>
+  <p:clrMapOvr>
+    <a:masterClrMapping/>
+  </p:clrMapOvr>
+  <p:timing>
+    <p:tnLst>
+      <p:par>
+        <p:cTn id="1" dur="indefinite" restart="never" nodeType="tmRoot"/>
+      </p:par>
+    </p:tnLst>
+  </p:timing>
+</p:sld>
+</file>
+
+<file path=ppt/slides/slide10.xml><?xml version="1.0" encoding="utf-8"?>
+<p:sld xmlns:a="http://schemas.openxmlformats.org/drawingml/2006/main" xmlns:r="http://schemas.openxmlformats.org/officeDocument/2006/relationships" xmlns:p="http://schemas.openxmlformats.org/presentationml/2006/main">
+  <p:cSld>
+    <p:spTree>
+      <p:nvGrpSpPr>
+        <p:cNvPr id="1" name="Shape 188"/>
+        <p:cNvGrpSpPr/>
+        <p:nvPr/>
+      </p:nvGrpSpPr>
+      <p:grpSpPr>
+        <a:xfrm>
+          <a:off x="0" y="0"/>
+          <a:ext cx="0" cy="0"/>
+          <a:chOff x="0" y="0"/>
+          <a:chExt cx="0" cy="0"/>
+        </a:xfrm>
+      </p:grpSpPr>
+      <p:sp>
+        <p:nvSpPr>
+          <p:cNvPr id="189" name="Google Shape;189;p22"/>
+          <p:cNvSpPr txBox="1"/>
+          <p:nvPr/>
+        </p:nvSpPr>
+        <p:spPr>
+          <a:xfrm>
+            <a:off x="590204" y="548639"/>
+            <a:ext cx="11296571" cy="415498"/>
+          </a:xfrm>
+          <a:prstGeom prst="rect">
+            <a:avLst/>
+          </a:prstGeom>
+          <a:noFill/>
+          <a:ln>
+            <a:noFill/>
+          </a:ln>
+        </p:spPr>
+        <p:txBody>
+          <a:bodyPr spcFirstLastPara="1" wrap="square" lIns="0" tIns="0" rIns="0" bIns="0" anchor="t" anchorCtr="0">
+            <a:spAutoFit/>
+          </a:bodyPr>
+          <a:lstStyle/>
+          <a:p>
+            <a:pPr marL="0" marR="0" lvl="0" indent="0" rtl="0">
+              <a:spcBef>
+                <a:spcPts val="0"/>
+              </a:spcBef>
+              <a:spcAft>
+                <a:spcPts val="0"/>
+              </a:spcAft>
+              <a:buNone/>
+            </a:pPr>
+            <a:r>
+              <a:rPr lang="en-US" sz="2700" b="1" i="0" u="none" strike="noStrike" cap="none" dirty="0" err="1">
+                <a:solidFill>
+                  <a:schemeClr val="tx1"/>
+                </a:solidFill>
+                <a:latin typeface="Merriweather"/>
+                <a:ea typeface="Merriweather"/>
+                <a:cs typeface="Merriweather"/>
+                <a:sym typeface="Merriweather"/>
+              </a:rPr>
+              <a:t>Вывод</a:t>
+            </a:r>
+            <a:endParaRPr>
+              <a:solidFill>
+                <a:schemeClr val="tx1"/>
+              </a:solidFill>
+            </a:endParaRPr>
+          </a:p>
+        </p:txBody>
+      </p:sp>
+      <p:sp>
+        <p:nvSpPr>
+          <p:cNvPr id="191" name="Google Shape;191;p22"/>
+          <p:cNvSpPr txBox="1"/>
+          <p:nvPr/>
+        </p:nvSpPr>
+        <p:spPr>
+          <a:xfrm>
+            <a:off x="581025" y="1554480"/>
+            <a:ext cx="11030100" cy="969496"/>
+          </a:xfrm>
+          <a:prstGeom prst="rect">
+            <a:avLst/>
+          </a:prstGeom>
+          <a:noFill/>
+          <a:ln>
+            <a:noFill/>
+          </a:ln>
+        </p:spPr>
+        <p:txBody>
+          <a:bodyPr spcFirstLastPara="1" wrap="square" lIns="0" tIns="0" rIns="0" bIns="0" anchor="t" anchorCtr="0">
+            <a:spAutoFit/>
+          </a:bodyPr>
+          <a:lstStyle/>
+          <a:p>
+            <a:pPr marL="0" marR="0" lvl="0" indent="0" rtl="0">
+              <a:lnSpc>
+                <a:spcPct val="139958"/>
+              </a:lnSpc>
+              <a:spcBef>
+                <a:spcPts val="0"/>
+              </a:spcBef>
+              <a:spcAft>
+                <a:spcPts val="0"/>
+              </a:spcAft>
+              <a:buNone/>
+            </a:pPr>
+            <a:r>
+              <a:rPr lang="en-US" sz="1500" i="0" u="none" strike="noStrike" cap="none" dirty="0">
+                <a:solidFill>
+                  <a:schemeClr val="tx1"/>
+                </a:solidFill>
+                <a:latin typeface="Roboto"/>
+                <a:ea typeface="Roboto"/>
+                <a:cs typeface="Roboto"/>
+                <a:sym typeface="Roboto"/>
+              </a:rPr>
+              <a:t>В </a:t>
+            </a:r>
+            <a:r>
+              <a:rPr lang="en-US" sz="1500" i="0" u="none" strike="noStrike" cap="none" dirty="0" err="1">
+                <a:solidFill>
+                  <a:schemeClr val="tx1"/>
+                </a:solidFill>
+                <a:latin typeface="Roboto"/>
+                <a:ea typeface="Roboto"/>
+                <a:cs typeface="Roboto"/>
+                <a:sym typeface="Roboto"/>
+              </a:rPr>
+              <a:t>ходе</a:t>
+            </a:r>
+            <a:r>
+              <a:rPr lang="en-US" sz="1500" i="0" u="none" strike="noStrike" cap="none" dirty="0">
+                <a:solidFill>
+                  <a:schemeClr val="tx1"/>
+                </a:solidFill>
+                <a:latin typeface="Roboto"/>
+                <a:ea typeface="Roboto"/>
+                <a:cs typeface="Roboto"/>
+                <a:sym typeface="Roboto"/>
+              </a:rPr>
+              <a:t> </a:t>
+            </a:r>
+            <a:r>
+              <a:rPr lang="en-US" sz="1500" i="0" u="none" strike="noStrike" cap="none" dirty="0" err="1">
+                <a:solidFill>
+                  <a:schemeClr val="tx1"/>
+                </a:solidFill>
+                <a:latin typeface="Roboto"/>
+                <a:ea typeface="Roboto"/>
+                <a:cs typeface="Roboto"/>
+                <a:sym typeface="Roboto"/>
+              </a:rPr>
+              <a:t>проектной</a:t>
+            </a:r>
+            <a:r>
+              <a:rPr lang="en-US" sz="1500" i="0" u="none" strike="noStrike" cap="none" dirty="0">
+                <a:solidFill>
+                  <a:schemeClr val="tx1"/>
+                </a:solidFill>
+                <a:latin typeface="Roboto"/>
+                <a:ea typeface="Roboto"/>
+                <a:cs typeface="Roboto"/>
+                <a:sym typeface="Roboto"/>
+              </a:rPr>
+              <a:t> </a:t>
+            </a:r>
+            <a:r>
+              <a:rPr lang="en-US" sz="1500" i="0" u="none" strike="noStrike" cap="none" dirty="0" err="1">
+                <a:solidFill>
+                  <a:schemeClr val="tx1"/>
+                </a:solidFill>
+                <a:latin typeface="Roboto"/>
+                <a:ea typeface="Roboto"/>
+                <a:cs typeface="Roboto"/>
+                <a:sym typeface="Roboto"/>
+              </a:rPr>
+              <a:t>работы</a:t>
+            </a:r>
+            <a:r>
+              <a:rPr lang="en-US" sz="1500" i="0" u="none" strike="noStrike" cap="none" dirty="0">
+                <a:solidFill>
+                  <a:schemeClr val="tx1"/>
+                </a:solidFill>
+                <a:latin typeface="Roboto"/>
+                <a:ea typeface="Roboto"/>
+                <a:cs typeface="Roboto"/>
+                <a:sym typeface="Roboto"/>
+              </a:rPr>
+              <a:t> </a:t>
+            </a:r>
+            <a:r>
+              <a:rPr lang="en-US" sz="1500" i="0" u="none" strike="noStrike" cap="none" dirty="0" err="1" smtClean="0">
+                <a:solidFill>
+                  <a:schemeClr val="tx1"/>
+                </a:solidFill>
+                <a:latin typeface="Roboto"/>
+                <a:ea typeface="Roboto"/>
+                <a:cs typeface="Roboto"/>
+                <a:sym typeface="Roboto"/>
+              </a:rPr>
+              <a:t>был</a:t>
+            </a:r>
+            <a:r>
+              <a:rPr lang="ru-RU" sz="1500" i="0" u="none" strike="noStrike" cap="none" dirty="0" smtClean="0">
+                <a:solidFill>
+                  <a:schemeClr val="tx1"/>
+                </a:solidFill>
+                <a:latin typeface="Roboto"/>
+                <a:ea typeface="Roboto"/>
+                <a:cs typeface="Roboto"/>
+                <a:sym typeface="Roboto"/>
+              </a:rPr>
+              <a:t>о</a:t>
+            </a:r>
+            <a:r>
+              <a:rPr lang="en-US" sz="1500" i="0" u="none" strike="noStrike" cap="none" dirty="0" smtClean="0">
+                <a:solidFill>
+                  <a:schemeClr val="tx1"/>
+                </a:solidFill>
+                <a:latin typeface="Roboto"/>
+                <a:ea typeface="Roboto"/>
+                <a:cs typeface="Roboto"/>
+                <a:sym typeface="Roboto"/>
+              </a:rPr>
+              <a:t> </a:t>
+            </a:r>
+            <a:r>
+              <a:rPr lang="en-US" sz="1500" i="0" u="none" strike="noStrike" cap="none" dirty="0" err="1" smtClean="0">
+                <a:solidFill>
+                  <a:schemeClr val="tx1"/>
+                </a:solidFill>
+                <a:latin typeface="Roboto"/>
+                <a:ea typeface="Roboto"/>
+                <a:cs typeface="Roboto"/>
+                <a:sym typeface="Roboto"/>
+              </a:rPr>
+              <a:t>разработан</a:t>
+            </a:r>
+            <a:r>
+              <a:rPr lang="ru-RU" sz="1500" i="0" u="none" strike="noStrike" cap="none" dirty="0" smtClean="0">
+                <a:solidFill>
+                  <a:schemeClr val="tx1"/>
+                </a:solidFill>
+                <a:latin typeface="Roboto"/>
+                <a:ea typeface="Roboto"/>
+                <a:cs typeface="Roboto"/>
+                <a:sym typeface="Roboto"/>
+              </a:rPr>
+              <a:t>о</a:t>
+            </a:r>
+            <a:r>
+              <a:rPr lang="en-US" sz="1500" i="0" u="none" strike="noStrike" cap="none" dirty="0" smtClean="0">
+                <a:solidFill>
+                  <a:schemeClr val="tx1"/>
+                </a:solidFill>
+                <a:latin typeface="Roboto"/>
+                <a:ea typeface="Roboto"/>
+                <a:cs typeface="Roboto"/>
+                <a:sym typeface="Roboto"/>
+              </a:rPr>
+              <a:t> </a:t>
+            </a:r>
+            <a:r>
+              <a:rPr lang="en-US" sz="1500" i="0" u="none" strike="noStrike" cap="none" dirty="0" err="1" smtClean="0">
+                <a:solidFill>
+                  <a:schemeClr val="tx1"/>
+                </a:solidFill>
+                <a:latin typeface="Roboto"/>
+                <a:ea typeface="Roboto"/>
+                <a:cs typeface="Roboto"/>
+                <a:sym typeface="Roboto"/>
+              </a:rPr>
+              <a:t>полноценн</a:t>
+            </a:r>
+            <a:r>
+              <a:rPr lang="ru-RU" sz="1500" i="0" u="none" strike="noStrike" cap="none" dirty="0" err="1" smtClean="0">
+                <a:solidFill>
+                  <a:schemeClr val="tx1"/>
+                </a:solidFill>
+                <a:latin typeface="Roboto"/>
+                <a:ea typeface="Roboto"/>
+                <a:cs typeface="Roboto"/>
+                <a:sym typeface="Roboto"/>
+              </a:rPr>
+              <a:t>ое</a:t>
+            </a:r>
+            <a:r>
+              <a:rPr lang="ru-RU" sz="1500" i="0" u="none" strike="noStrike" cap="none" dirty="0" smtClean="0">
+                <a:solidFill>
+                  <a:schemeClr val="tx1"/>
+                </a:solidFill>
+                <a:latin typeface="Roboto"/>
+                <a:ea typeface="Roboto"/>
+                <a:cs typeface="Roboto"/>
+                <a:sym typeface="Roboto"/>
+              </a:rPr>
+              <a:t> </a:t>
+            </a:r>
+            <a:r>
+              <a:rPr lang="ru-RU" sz="1500" i="0" u="none" strike="noStrike" cap="none" dirty="0" err="1" smtClean="0">
+                <a:solidFill>
+                  <a:schemeClr val="tx1"/>
+                </a:solidFill>
+                <a:latin typeface="Roboto"/>
+                <a:ea typeface="Roboto"/>
+                <a:cs typeface="Roboto"/>
+                <a:sym typeface="Roboto"/>
+              </a:rPr>
+              <a:t>кроссплатформанное</a:t>
+            </a:r>
+            <a:r>
+              <a:rPr lang="ru-RU" sz="1500" i="0" u="none" strike="noStrike" cap="none" dirty="0" smtClean="0">
+                <a:solidFill>
+                  <a:schemeClr val="tx1"/>
+                </a:solidFill>
+                <a:latin typeface="Roboto"/>
+                <a:ea typeface="Roboto"/>
+                <a:cs typeface="Roboto"/>
+                <a:sym typeface="Roboto"/>
+              </a:rPr>
+              <a:t> приложение </a:t>
+            </a:r>
+          </a:p>
+          <a:p>
+            <a:pPr marL="0" marR="0" lvl="0" indent="0" rtl="0">
+              <a:lnSpc>
+                <a:spcPct val="139958"/>
+              </a:lnSpc>
+              <a:spcBef>
+                <a:spcPts val="0"/>
+              </a:spcBef>
+              <a:spcAft>
+                <a:spcPts val="0"/>
+              </a:spcAft>
+              <a:buNone/>
+            </a:pPr>
+            <a:r>
+              <a:rPr lang="ru-RU" sz="1500" i="0" u="none" strike="noStrike" cap="none" dirty="0" smtClean="0">
+                <a:solidFill>
+                  <a:schemeClr val="tx1"/>
+                </a:solidFill>
+                <a:latin typeface="Roboto"/>
+                <a:ea typeface="Roboto"/>
+                <a:cs typeface="Roboto"/>
+                <a:sym typeface="Roboto"/>
+              </a:rPr>
+              <a:t>«</a:t>
+            </a:r>
+            <a:r>
+              <a:rPr lang="en-US" sz="1500" i="0" u="none" strike="noStrike" cap="none" dirty="0" smtClean="0">
+                <a:solidFill>
+                  <a:schemeClr val="tx1"/>
+                </a:solidFill>
+                <a:latin typeface="Roboto"/>
+                <a:ea typeface="Roboto"/>
+                <a:cs typeface="Roboto"/>
+                <a:sym typeface="Roboto"/>
+              </a:rPr>
+              <a:t>My Diary</a:t>
+            </a:r>
+            <a:r>
+              <a:rPr lang="ru-RU" sz="1500" i="0" u="none" strike="noStrike" cap="none" dirty="0" smtClean="0">
+                <a:solidFill>
+                  <a:schemeClr val="tx1"/>
+                </a:solidFill>
+                <a:latin typeface="Roboto"/>
+                <a:ea typeface="Roboto"/>
+                <a:cs typeface="Roboto"/>
+                <a:sym typeface="Roboto"/>
+              </a:rPr>
+              <a:t>».</a:t>
+            </a:r>
+          </a:p>
+          <a:p>
+            <a:pPr marL="0" marR="0" lvl="0" indent="0" rtl="0">
+              <a:lnSpc>
+                <a:spcPct val="139958"/>
+              </a:lnSpc>
+              <a:spcBef>
+                <a:spcPts val="0"/>
+              </a:spcBef>
+              <a:spcAft>
+                <a:spcPts val="0"/>
+              </a:spcAft>
+              <a:buNone/>
+            </a:pPr>
+            <a:r>
+              <a:rPr lang="ru-RU" sz="1500" dirty="0" smtClean="0">
+                <a:solidFill>
+                  <a:schemeClr val="tx1"/>
+                </a:solidFill>
+                <a:latin typeface="Roboto"/>
+                <a:ea typeface="Roboto"/>
+                <a:cs typeface="Roboto"/>
+                <a:sym typeface="Roboto"/>
+              </a:rPr>
+              <a:t>В результате все цели достигнуты.</a:t>
+            </a:r>
+            <a:r>
+              <a:rPr lang="ru-RU" sz="1500" b="0" i="0" u="none" strike="noStrike" cap="none" dirty="0" smtClean="0">
+                <a:solidFill>
+                  <a:schemeClr val="tx1"/>
+                </a:solidFill>
+                <a:latin typeface="Roboto"/>
+                <a:ea typeface="Roboto"/>
+                <a:cs typeface="Roboto"/>
+                <a:sym typeface="Roboto"/>
+              </a:rPr>
+              <a:t> </a:t>
+            </a:r>
+            <a:endParaRPr sz="1500">
+              <a:solidFill>
+                <a:srgbClr val="108000"/>
               </a:solidFill>
             </a:endParaRPr>
           </a:p>
@@ -7946,7 +8590,7 @@
   <p:cSld>
     <p:spTree>
       <p:nvGrpSpPr>
-        <p:cNvPr id="1" name=""/>
+        <p:cNvPr id="1" name="Shape 121"/>
         <p:cNvGrpSpPr/>
         <p:nvPr/>
       </p:nvGrpSpPr>
@@ -7960,14 +8604,71 @@
       </p:grpSpPr>
       <p:sp>
         <p:nvSpPr>
-          <p:cNvPr id="2" name="Прямоугольник 1"/>
+          <p:cNvPr id="122" name="Google Shape;122;p16"/>
+          <p:cNvSpPr txBox="1"/>
+          <p:nvPr/>
+        </p:nvSpPr>
+        <p:spPr>
+          <a:xfrm>
+            <a:off x="723206" y="465513"/>
+            <a:ext cx="11163569" cy="415498"/>
+          </a:xfrm>
+          <a:prstGeom prst="rect">
+            <a:avLst/>
+          </a:prstGeom>
+          <a:noFill/>
+          <a:ln>
+            <a:noFill/>
+          </a:ln>
+        </p:spPr>
+        <p:txBody>
+          <a:bodyPr spcFirstLastPara="1" wrap="square" lIns="0" tIns="0" rIns="0" bIns="0" anchor="t" anchorCtr="0">
+            <a:spAutoFit/>
+          </a:bodyPr>
+          <a:lstStyle/>
+          <a:p>
+            <a:pPr marL="0" marR="0" lvl="0" indent="0" rtl="0">
+              <a:spcBef>
+                <a:spcPts val="0"/>
+              </a:spcBef>
+              <a:spcAft>
+                <a:spcPts val="0"/>
+              </a:spcAft>
+              <a:buNone/>
+            </a:pPr>
+            <a:r>
+              <a:rPr lang="ru-RU" sz="2700" b="1" dirty="0" smtClean="0">
+                <a:solidFill>
+                  <a:schemeClr val="tx1"/>
+                </a:solidFill>
+                <a:latin typeface="Merriweather" charset="0"/>
+                <a:ea typeface="Merriweather" charset="0"/>
+                <a:cs typeface="Merriweather" charset="0"/>
+                <a:sym typeface="Merriweather"/>
+              </a:rPr>
+              <a:t>Проектирование программного продукта</a:t>
+            </a:r>
+            <a:endParaRPr>
+              <a:solidFill>
+                <a:schemeClr val="tx1"/>
+              </a:solidFill>
+              <a:latin typeface="Merriweather" charset="0"/>
+              <a:ea typeface="Merriweather" charset="0"/>
+              <a:cs typeface="Merriweather" charset="0"/>
+            </a:endParaRPr>
+          </a:p>
+        </p:txBody>
+      </p:sp>
+      <p:sp>
+        <p:nvSpPr>
+          <p:cNvPr id="7" name="Прямоугольник 6"/>
           <p:cNvSpPr/>
           <p:nvPr/>
         </p:nvSpPr>
         <p:spPr>
           <a:xfrm>
-            <a:off x="615142" y="465513"/>
-            <a:ext cx="7564582" cy="507831"/>
+            <a:off x="723207" y="1571002"/>
+            <a:ext cx="10723418" cy="323165"/>
           </a:xfrm>
           <a:prstGeom prst="rect">
             <a:avLst/>
@@ -7979,26 +8680,22 @@
           </a:bodyPr>
           <a:lstStyle/>
           <a:p>
-            <a:pPr lvl="0"/>
-            <a:r>
-              <a:rPr lang="ru-RU" sz="2700" b="1" dirty="0" smtClean="0">
-                <a:solidFill>
-                  <a:schemeClr val="tx1"/>
-                </a:solidFill>
-                <a:latin typeface="Merriweather" charset="0"/>
-                <a:ea typeface="Merriweather" charset="0"/>
-                <a:cs typeface="Merriweather" charset="0"/>
-                <a:sym typeface="Merriweather"/>
-              </a:rPr>
-              <a:t>---</a:t>
-            </a:r>
-            <a:endParaRPr lang="ru-RU" sz="2700" b="1" dirty="0">
+            <a:r>
+              <a:rPr lang="ru-RU" sz="1500" dirty="0" smtClean="0">
+                <a:solidFill>
+                  <a:srgbClr val="FFA709"/>
+                </a:solidFill>
+                <a:latin typeface="Roboto" charset="0"/>
+                <a:ea typeface="Roboto" charset="0"/>
+              </a:rPr>
+              <a:t>Диаграмма вариантов использования                                                                                      Диаграмма деятельности</a:t>
+            </a:r>
+            <a:endParaRPr lang="ru-RU" sz="1500" dirty="0">
               <a:solidFill>
-                <a:schemeClr val="tx1"/>
+                <a:srgbClr val="FFA709"/>
               </a:solidFill>
-              <a:latin typeface="Merriweather" charset="0"/>
-              <a:ea typeface="Merriweather" charset="0"/>
-              <a:cs typeface="Merriweather" charset="0"/>
+              <a:latin typeface="Roboto" charset="0"/>
+              <a:ea typeface="Roboto" charset="0"/>
             </a:endParaRPr>
           </a:p>
         </p:txBody>
@@ -8019,6 +8716,156 @@
 </file>
 
 <file path=ppt/slides/slide6.xml><?xml version="1.0" encoding="utf-8"?>
+<p:sld xmlns:a="http://schemas.openxmlformats.org/drawingml/2006/main" xmlns:r="http://schemas.openxmlformats.org/officeDocument/2006/relationships" xmlns:p="http://schemas.openxmlformats.org/presentationml/2006/main">
+  <p:cSld>
+    <p:spTree>
+      <p:nvGrpSpPr>
+        <p:cNvPr id="1" name="Shape 121"/>
+        <p:cNvGrpSpPr/>
+        <p:nvPr/>
+      </p:nvGrpSpPr>
+      <p:grpSpPr>
+        <a:xfrm>
+          <a:off x="0" y="0"/>
+          <a:ext cx="0" cy="0"/>
+          <a:chOff x="0" y="0"/>
+          <a:chExt cx="0" cy="0"/>
+        </a:xfrm>
+      </p:grpSpPr>
+      <p:sp>
+        <p:nvSpPr>
+          <p:cNvPr id="122" name="Google Shape;122;p16"/>
+          <p:cNvSpPr txBox="1"/>
+          <p:nvPr/>
+        </p:nvSpPr>
+        <p:spPr>
+          <a:xfrm>
+            <a:off x="723206" y="465513"/>
+            <a:ext cx="11163569" cy="415498"/>
+          </a:xfrm>
+          <a:prstGeom prst="rect">
+            <a:avLst/>
+          </a:prstGeom>
+          <a:noFill/>
+          <a:ln>
+            <a:noFill/>
+          </a:ln>
+        </p:spPr>
+        <p:txBody>
+          <a:bodyPr spcFirstLastPara="1" wrap="square" lIns="0" tIns="0" rIns="0" bIns="0" anchor="t" anchorCtr="0">
+            <a:spAutoFit/>
+          </a:bodyPr>
+          <a:lstStyle/>
+          <a:p>
+            <a:pPr marL="0" marR="0" lvl="0" indent="0" rtl="0">
+              <a:spcBef>
+                <a:spcPts val="0"/>
+              </a:spcBef>
+              <a:spcAft>
+                <a:spcPts val="0"/>
+              </a:spcAft>
+              <a:buNone/>
+            </a:pPr>
+            <a:r>
+              <a:rPr lang="ru-RU" sz="2700" b="1" dirty="0" smtClean="0">
+                <a:solidFill>
+                  <a:schemeClr val="tx1"/>
+                </a:solidFill>
+                <a:latin typeface="Merriweather" charset="0"/>
+                <a:ea typeface="Merriweather" charset="0"/>
+                <a:cs typeface="Merriweather" charset="0"/>
+                <a:sym typeface="Merriweather"/>
+              </a:rPr>
+              <a:t>Проектирование базы данных</a:t>
+            </a:r>
+            <a:endParaRPr>
+              <a:solidFill>
+                <a:schemeClr val="tx1"/>
+              </a:solidFill>
+              <a:latin typeface="Merriweather" charset="0"/>
+              <a:ea typeface="Merriweather" charset="0"/>
+              <a:cs typeface="Merriweather" charset="0"/>
+            </a:endParaRPr>
+          </a:p>
+        </p:txBody>
+      </p:sp>
+      <p:sp>
+        <p:nvSpPr>
+          <p:cNvPr id="7" name="Прямоугольник 6"/>
+          <p:cNvSpPr/>
+          <p:nvPr/>
+        </p:nvSpPr>
+        <p:spPr>
+          <a:xfrm>
+            <a:off x="723207" y="1571002"/>
+            <a:ext cx="10723418" cy="323165"/>
+          </a:xfrm>
+          <a:prstGeom prst="rect">
+            <a:avLst/>
+          </a:prstGeom>
+        </p:spPr>
+        <p:txBody>
+          <a:bodyPr wrap="square">
+            <a:spAutoFit/>
+          </a:bodyPr>
+          <a:lstStyle/>
+          <a:p>
+            <a:r>
+              <a:rPr lang="ru-RU" sz="1500" dirty="0" smtClean="0">
+                <a:solidFill>
+                  <a:srgbClr val="FFA709"/>
+                </a:solidFill>
+                <a:latin typeface="Roboto" charset="0"/>
+                <a:ea typeface="Roboto" charset="0"/>
+              </a:rPr>
+              <a:t>Инфологическая модель                                                                                                                 </a:t>
+            </a:r>
+            <a:r>
+              <a:rPr lang="en-US" sz="1500" dirty="0" smtClean="0">
+                <a:solidFill>
+                  <a:srgbClr val="FFA709"/>
+                </a:solidFill>
+                <a:latin typeface="Roboto" charset="0"/>
+                <a:ea typeface="Roboto" charset="0"/>
+              </a:rPr>
+              <a:t>ER-</a:t>
+            </a:r>
+            <a:r>
+              <a:rPr lang="ru-RU" sz="1500" dirty="0" smtClean="0">
+                <a:solidFill>
+                  <a:srgbClr val="FFA709"/>
+                </a:solidFill>
+                <a:latin typeface="Roboto" charset="0"/>
+                <a:ea typeface="Roboto" charset="0"/>
+              </a:rPr>
+              <a:t>модель</a:t>
+            </a:r>
+            <a:endParaRPr lang="ru-RU" sz="1500" dirty="0">
+              <a:solidFill>
+                <a:srgbClr val="FFA709"/>
+              </a:solidFill>
+              <a:latin typeface="Roboto" charset="0"/>
+              <a:ea typeface="Roboto" charset="0"/>
+            </a:endParaRPr>
+          </a:p>
+        </p:txBody>
+      </p:sp>
+    </p:spTree>
+  </p:cSld>
+  <p:clrMapOvr>
+    <a:masterClrMapping/>
+  </p:clrMapOvr>
+  <p:timing>
+    <p:tnLst>
+      <p:par>
+        <p:cTn id="1" dur="indefinite" restart="never" nodeType="tmRoot"/>
+      </p:par>
+    </p:tnLst>
+  </p:timing>
+</p:sld>
+</file>
+
+<file path=ppt/slides/slide7.xml><?xml version="1.0" encoding="utf-8"?>
 <p:sld xmlns:a="http://schemas.openxmlformats.org/drawingml/2006/main" xmlns:r="http://schemas.openxmlformats.org/officeDocument/2006/relationships" xmlns:p="http://schemas.openxmlformats.org/presentationml/2006/main">
   <p:cSld>
     <p:spTree>
@@ -8546,7 +9393,7 @@
 </p:sld>
 </file>
 
-<file path=ppt/slides/slide7.xml><?xml version="1.0" encoding="utf-8"?>
+<file path=ppt/slides/slide8.xml><?xml version="1.0" encoding="utf-8"?>
 <p:sld xmlns:a="http://schemas.openxmlformats.org/drawingml/2006/main" xmlns:r="http://schemas.openxmlformats.org/officeDocument/2006/relationships" xmlns:p="http://schemas.openxmlformats.org/presentationml/2006/main">
   <p:cSld>
     <p:spTree>
@@ -9460,7 +10307,7 @@
 </p:sld>
 </file>
 
-<file path=ppt/slides/slide8.xml><?xml version="1.0" encoding="utf-8"?>
+<file path=ppt/slides/slide9.xml><?xml version="1.0" encoding="utf-8"?>
 <p:sld xmlns:a="http://schemas.openxmlformats.org/drawingml/2006/main" xmlns:r="http://schemas.openxmlformats.org/officeDocument/2006/relationships" xmlns:p="http://schemas.openxmlformats.org/presentationml/2006/main">
   <p:cSld>
     <p:spTree>
@@ -9578,441 +10425,6 @@
               <a:latin typeface="Merriweather" charset="0"/>
               <a:ea typeface="Merriweather" charset="0"/>
               <a:cs typeface="Merriweather" charset="0"/>
-            </a:endParaRPr>
-          </a:p>
-        </p:txBody>
-      </p:sp>
-    </p:spTree>
-  </p:cSld>
-  <p:clrMapOvr>
-    <a:masterClrMapping/>
-  </p:clrMapOvr>
-  <p:timing>
-    <p:tnLst>
-      <p:par>
-        <p:cTn id="1" dur="indefinite" restart="never" nodeType="tmRoot"/>
-      </p:par>
-    </p:tnLst>
-  </p:timing>
-</p:sld>
-</file>
-
-<file path=ppt/slides/slide9.xml><?xml version="1.0" encoding="utf-8"?>
-<p:sld xmlns:a="http://schemas.openxmlformats.org/drawingml/2006/main" xmlns:r="http://schemas.openxmlformats.org/officeDocument/2006/relationships" xmlns:p="http://schemas.openxmlformats.org/presentationml/2006/main">
-  <p:cSld>
-    <p:spTree>
-      <p:nvGrpSpPr>
-        <p:cNvPr id="1" name="Shape 188"/>
-        <p:cNvGrpSpPr/>
-        <p:nvPr/>
-      </p:nvGrpSpPr>
-      <p:grpSpPr>
-        <a:xfrm>
-          <a:off x="0" y="0"/>
-          <a:ext cx="0" cy="0"/>
-          <a:chOff x="0" y="0"/>
-          <a:chExt cx="0" cy="0"/>
-        </a:xfrm>
-      </p:grpSpPr>
-      <p:sp>
-        <p:nvSpPr>
-          <p:cNvPr id="189" name="Google Shape;189;p22"/>
-          <p:cNvSpPr txBox="1"/>
-          <p:nvPr/>
-        </p:nvSpPr>
-        <p:spPr>
-          <a:xfrm>
-            <a:off x="590204" y="548639"/>
-            <a:ext cx="11296571" cy="415498"/>
-          </a:xfrm>
-          <a:prstGeom prst="rect">
-            <a:avLst/>
-          </a:prstGeom>
-          <a:noFill/>
-          <a:ln>
-            <a:noFill/>
-          </a:ln>
-        </p:spPr>
-        <p:txBody>
-          <a:bodyPr spcFirstLastPara="1" wrap="square" lIns="0" tIns="0" rIns="0" bIns="0" anchor="t" anchorCtr="0">
-            <a:spAutoFit/>
-          </a:bodyPr>
-          <a:lstStyle/>
-          <a:p>
-            <a:pPr marL="0" marR="0" lvl="0" indent="0" rtl="0">
-              <a:spcBef>
-                <a:spcPts val="0"/>
-              </a:spcBef>
-              <a:spcAft>
-                <a:spcPts val="0"/>
-              </a:spcAft>
-              <a:buNone/>
-            </a:pPr>
-            <a:r>
-              <a:rPr lang="en-US" sz="2700" b="1" i="0" u="none" strike="noStrike" cap="none" dirty="0" err="1">
-                <a:solidFill>
-                  <a:schemeClr val="tx1"/>
-                </a:solidFill>
-                <a:latin typeface="Merriweather"/>
-                <a:ea typeface="Merriweather"/>
-                <a:cs typeface="Merriweather"/>
-                <a:sym typeface="Merriweather"/>
-              </a:rPr>
-              <a:t>Вывод</a:t>
-            </a:r>
-            <a:endParaRPr>
-              <a:solidFill>
-                <a:schemeClr val="tx1"/>
-              </a:solidFill>
-            </a:endParaRPr>
-          </a:p>
-        </p:txBody>
-      </p:sp>
-      <p:sp>
-        <p:nvSpPr>
-          <p:cNvPr id="191" name="Google Shape;191;p22"/>
-          <p:cNvSpPr txBox="1"/>
-          <p:nvPr/>
-        </p:nvSpPr>
-        <p:spPr>
-          <a:xfrm>
-            <a:off x="581025" y="1554480"/>
-            <a:ext cx="11030100" cy="969496"/>
-          </a:xfrm>
-          <a:prstGeom prst="rect">
-            <a:avLst/>
-          </a:prstGeom>
-          <a:noFill/>
-          <a:ln>
-            <a:noFill/>
-          </a:ln>
-        </p:spPr>
-        <p:txBody>
-          <a:bodyPr spcFirstLastPara="1" wrap="square" lIns="0" tIns="0" rIns="0" bIns="0" anchor="t" anchorCtr="0">
-            <a:spAutoFit/>
-          </a:bodyPr>
-          <a:lstStyle/>
-          <a:p>
-            <a:pPr marL="0" marR="0" lvl="0" indent="0" rtl="0">
-              <a:lnSpc>
-                <a:spcPct val="139958"/>
-              </a:lnSpc>
-              <a:spcBef>
-                <a:spcPts val="0"/>
-              </a:spcBef>
-              <a:spcAft>
-                <a:spcPts val="0"/>
-              </a:spcAft>
-              <a:buNone/>
-            </a:pPr>
-            <a:r>
-              <a:rPr lang="en-US" sz="1500" i="0" u="none" strike="noStrike" cap="none" dirty="0">
-                <a:solidFill>
-                  <a:schemeClr val="tx1"/>
-                </a:solidFill>
-                <a:latin typeface="Roboto"/>
-                <a:ea typeface="Roboto"/>
-                <a:cs typeface="Roboto"/>
-                <a:sym typeface="Roboto"/>
-              </a:rPr>
-              <a:t>В </a:t>
-            </a:r>
-            <a:r>
-              <a:rPr lang="en-US" sz="1500" i="0" u="none" strike="noStrike" cap="none" dirty="0" err="1">
-                <a:solidFill>
-                  <a:schemeClr val="tx1"/>
-                </a:solidFill>
-                <a:latin typeface="Roboto"/>
-                <a:ea typeface="Roboto"/>
-                <a:cs typeface="Roboto"/>
-                <a:sym typeface="Roboto"/>
-              </a:rPr>
-              <a:t>ходе</a:t>
-            </a:r>
-            <a:r>
-              <a:rPr lang="en-US" sz="1500" i="0" u="none" strike="noStrike" cap="none" dirty="0">
-                <a:solidFill>
-                  <a:schemeClr val="tx1"/>
-                </a:solidFill>
-                <a:latin typeface="Roboto"/>
-                <a:ea typeface="Roboto"/>
-                <a:cs typeface="Roboto"/>
-                <a:sym typeface="Roboto"/>
-              </a:rPr>
-              <a:t> </a:t>
-            </a:r>
-            <a:r>
-              <a:rPr lang="en-US" sz="1500" i="0" u="none" strike="noStrike" cap="none" dirty="0" err="1">
-                <a:solidFill>
-                  <a:schemeClr val="tx1"/>
-                </a:solidFill>
-                <a:latin typeface="Roboto"/>
-                <a:ea typeface="Roboto"/>
-                <a:cs typeface="Roboto"/>
-                <a:sym typeface="Roboto"/>
-              </a:rPr>
-              <a:t>проектной</a:t>
-            </a:r>
-            <a:r>
-              <a:rPr lang="en-US" sz="1500" i="0" u="none" strike="noStrike" cap="none" dirty="0">
-                <a:solidFill>
-                  <a:schemeClr val="tx1"/>
-                </a:solidFill>
-                <a:latin typeface="Roboto"/>
-                <a:ea typeface="Roboto"/>
-                <a:cs typeface="Roboto"/>
-                <a:sym typeface="Roboto"/>
-              </a:rPr>
-              <a:t> </a:t>
-            </a:r>
-            <a:r>
-              <a:rPr lang="en-US" sz="1500" i="0" u="none" strike="noStrike" cap="none" dirty="0" err="1">
-                <a:solidFill>
-                  <a:schemeClr val="tx1"/>
-                </a:solidFill>
-                <a:latin typeface="Roboto"/>
-                <a:ea typeface="Roboto"/>
-                <a:cs typeface="Roboto"/>
-                <a:sym typeface="Roboto"/>
-              </a:rPr>
-              <a:t>работы</a:t>
-            </a:r>
-            <a:r>
-              <a:rPr lang="en-US" sz="1500" i="0" u="none" strike="noStrike" cap="none" dirty="0">
-                <a:solidFill>
-                  <a:schemeClr val="tx1"/>
-                </a:solidFill>
-                <a:latin typeface="Roboto"/>
-                <a:ea typeface="Roboto"/>
-                <a:cs typeface="Roboto"/>
-                <a:sym typeface="Roboto"/>
-              </a:rPr>
-              <a:t> </a:t>
-            </a:r>
-            <a:r>
-              <a:rPr lang="en-US" sz="1500" i="0" u="none" strike="noStrike" cap="none" dirty="0" err="1" smtClean="0">
-                <a:solidFill>
-                  <a:schemeClr val="tx1"/>
-                </a:solidFill>
-                <a:latin typeface="Roboto"/>
-                <a:ea typeface="Roboto"/>
-                <a:cs typeface="Roboto"/>
-                <a:sym typeface="Roboto"/>
-              </a:rPr>
-              <a:t>был</a:t>
-            </a:r>
-            <a:r>
-              <a:rPr lang="ru-RU" sz="1500" i="0" u="none" strike="noStrike" cap="none" dirty="0" smtClean="0">
-                <a:solidFill>
-                  <a:schemeClr val="tx1"/>
-                </a:solidFill>
-                <a:latin typeface="Roboto"/>
-                <a:ea typeface="Roboto"/>
-                <a:cs typeface="Roboto"/>
-                <a:sym typeface="Roboto"/>
-              </a:rPr>
-              <a:t>о</a:t>
-            </a:r>
-            <a:r>
-              <a:rPr lang="en-US" sz="1500" i="0" u="none" strike="noStrike" cap="none" dirty="0" smtClean="0">
-                <a:solidFill>
-                  <a:schemeClr val="tx1"/>
-                </a:solidFill>
-                <a:latin typeface="Roboto"/>
-                <a:ea typeface="Roboto"/>
-                <a:cs typeface="Roboto"/>
-                <a:sym typeface="Roboto"/>
-              </a:rPr>
-              <a:t> </a:t>
-            </a:r>
-            <a:r>
-              <a:rPr lang="en-US" sz="1500" i="0" u="none" strike="noStrike" cap="none" dirty="0" err="1" smtClean="0">
-                <a:solidFill>
-                  <a:schemeClr val="tx1"/>
-                </a:solidFill>
-                <a:latin typeface="Roboto"/>
-                <a:ea typeface="Roboto"/>
-                <a:cs typeface="Roboto"/>
-                <a:sym typeface="Roboto"/>
-              </a:rPr>
-              <a:t>разработан</a:t>
-            </a:r>
-            <a:r>
-              <a:rPr lang="ru-RU" sz="1500" i="0" u="none" strike="noStrike" cap="none" dirty="0" smtClean="0">
-                <a:solidFill>
-                  <a:schemeClr val="tx1"/>
-                </a:solidFill>
-                <a:latin typeface="Roboto"/>
-                <a:ea typeface="Roboto"/>
-                <a:cs typeface="Roboto"/>
-                <a:sym typeface="Roboto"/>
-              </a:rPr>
-              <a:t>о</a:t>
-            </a:r>
-            <a:r>
-              <a:rPr lang="en-US" sz="1500" i="0" u="none" strike="noStrike" cap="none" dirty="0" smtClean="0">
-                <a:solidFill>
-                  <a:schemeClr val="tx1"/>
-                </a:solidFill>
-                <a:latin typeface="Roboto"/>
-                <a:ea typeface="Roboto"/>
-                <a:cs typeface="Roboto"/>
-                <a:sym typeface="Roboto"/>
-              </a:rPr>
-              <a:t> </a:t>
-            </a:r>
-            <a:r>
-              <a:rPr lang="en-US" sz="1500" i="0" u="none" strike="noStrike" cap="none" dirty="0" err="1" smtClean="0">
-                <a:solidFill>
-                  <a:schemeClr val="tx1"/>
-                </a:solidFill>
-                <a:latin typeface="Roboto"/>
-                <a:ea typeface="Roboto"/>
-                <a:cs typeface="Roboto"/>
-                <a:sym typeface="Roboto"/>
-              </a:rPr>
-              <a:t>полноценн</a:t>
-            </a:r>
-            <a:r>
-              <a:rPr lang="ru-RU" sz="1500" i="0" u="none" strike="noStrike" cap="none" dirty="0" err="1" smtClean="0">
-                <a:solidFill>
-                  <a:schemeClr val="tx1"/>
-                </a:solidFill>
-                <a:latin typeface="Roboto"/>
-                <a:ea typeface="Roboto"/>
-                <a:cs typeface="Roboto"/>
-                <a:sym typeface="Roboto"/>
-              </a:rPr>
-              <a:t>ое</a:t>
-            </a:r>
-            <a:r>
-              <a:rPr lang="ru-RU" sz="1500" i="0" u="none" strike="noStrike" cap="none" dirty="0" smtClean="0">
-                <a:solidFill>
-                  <a:schemeClr val="tx1"/>
-                </a:solidFill>
-                <a:latin typeface="Roboto"/>
-                <a:ea typeface="Roboto"/>
-                <a:cs typeface="Roboto"/>
-                <a:sym typeface="Roboto"/>
-              </a:rPr>
-              <a:t> </a:t>
-            </a:r>
-            <a:r>
-              <a:rPr lang="ru-RU" sz="1500" i="0" u="none" strike="noStrike" cap="none" dirty="0" err="1" smtClean="0">
-                <a:solidFill>
-                  <a:schemeClr val="tx1"/>
-                </a:solidFill>
-                <a:latin typeface="Roboto"/>
-                <a:ea typeface="Roboto"/>
-                <a:cs typeface="Roboto"/>
-                <a:sym typeface="Roboto"/>
-              </a:rPr>
-              <a:t>кроссплатформанное</a:t>
-            </a:r>
-            <a:r>
-              <a:rPr lang="ru-RU" sz="1500" i="0" u="none" strike="noStrike" cap="none" dirty="0" smtClean="0">
-                <a:solidFill>
-                  <a:schemeClr val="tx1"/>
-                </a:solidFill>
-                <a:latin typeface="Roboto"/>
-                <a:ea typeface="Roboto"/>
-                <a:cs typeface="Roboto"/>
-                <a:sym typeface="Roboto"/>
-              </a:rPr>
-              <a:t> приложение </a:t>
-            </a:r>
-          </a:p>
-          <a:p>
-            <a:pPr marL="0" marR="0" lvl="0" indent="0" rtl="0">
-              <a:lnSpc>
-                <a:spcPct val="139958"/>
-              </a:lnSpc>
-              <a:spcBef>
-                <a:spcPts val="0"/>
-              </a:spcBef>
-              <a:spcAft>
-                <a:spcPts val="0"/>
-              </a:spcAft>
-              <a:buNone/>
-            </a:pPr>
-            <a:r>
-              <a:rPr lang="ru-RU" sz="1500" i="0" u="none" strike="noStrike" cap="none" dirty="0" smtClean="0">
-                <a:solidFill>
-                  <a:schemeClr val="tx1"/>
-                </a:solidFill>
-                <a:latin typeface="Roboto"/>
-                <a:ea typeface="Roboto"/>
-                <a:cs typeface="Roboto"/>
-                <a:sym typeface="Roboto"/>
-              </a:rPr>
-              <a:t>«</a:t>
-            </a:r>
-            <a:r>
-              <a:rPr lang="en-US" sz="1500" i="0" u="none" strike="noStrike" cap="none" dirty="0" smtClean="0">
-                <a:solidFill>
-                  <a:schemeClr val="tx1"/>
-                </a:solidFill>
-                <a:latin typeface="Roboto"/>
-                <a:ea typeface="Roboto"/>
-                <a:cs typeface="Roboto"/>
-                <a:sym typeface="Roboto"/>
-              </a:rPr>
-              <a:t>My Diary</a:t>
-            </a:r>
-            <a:r>
-              <a:rPr lang="ru-RU" sz="1500" i="0" u="none" strike="noStrike" cap="none" dirty="0" smtClean="0">
-                <a:solidFill>
-                  <a:schemeClr val="tx1"/>
-                </a:solidFill>
-                <a:latin typeface="Roboto"/>
-                <a:ea typeface="Roboto"/>
-                <a:cs typeface="Roboto"/>
-                <a:sym typeface="Roboto"/>
-              </a:rPr>
-              <a:t>».</a:t>
-            </a:r>
-          </a:p>
-          <a:p>
-            <a:pPr marL="0" marR="0" lvl="0" indent="0" rtl="0">
-              <a:lnSpc>
-                <a:spcPct val="139958"/>
-              </a:lnSpc>
-              <a:spcBef>
-                <a:spcPts val="0"/>
-              </a:spcBef>
-              <a:spcAft>
-                <a:spcPts val="0"/>
-              </a:spcAft>
-              <a:buNone/>
-            </a:pPr>
-            <a:r>
-              <a:rPr lang="ru-RU" sz="1500" dirty="0" smtClean="0">
-                <a:solidFill>
-                  <a:schemeClr val="tx1"/>
-                </a:solidFill>
-                <a:latin typeface="Roboto"/>
-                <a:ea typeface="Roboto"/>
-                <a:cs typeface="Roboto"/>
-                <a:sym typeface="Roboto"/>
-              </a:rPr>
-              <a:t>В результате все цели достигнуты.</a:t>
-            </a:r>
-            <a:r>
-              <a:rPr lang="ru-RU" sz="1500" b="0" i="0" u="none" strike="noStrike" cap="none" dirty="0" smtClean="0">
-                <a:solidFill>
-                  <a:schemeClr val="tx1"/>
-                </a:solidFill>
-                <a:latin typeface="Roboto"/>
-                <a:ea typeface="Roboto"/>
-                <a:cs typeface="Roboto"/>
-                <a:sym typeface="Roboto"/>
-              </a:rPr>
-              <a:t> </a:t>
-            </a:r>
-            <a:endParaRPr sz="1500">
-              <a:solidFill>
-                <a:srgbClr val="108000"/>
-              </a:solidFill>
             </a:endParaRPr>
           </a:p>
         </p:txBody>

--- a/документация/Презентация My Diary (не доделана).pptx
+++ b/документация/Презентация My Diary (не доделана).pptx
@@ -275,7 +275,7 @@
   </p:defaultTextStyle>
   <p:extLst>
     <p:ext uri="{EFAFB233-063F-42B5-8137-9DF3F51BA10A}">
-      <p15:sldGuideLst xmlns="" xmlns:mc="http://schemas.openxmlformats.org/markup-compatibility/2006" xmlns:mv="urn:schemas-microsoft-com:mac:vml" xmlns:c="http://schemas.openxmlformats.org/drawingml/2006/chart" xmlns:dgm="http://schemas.openxmlformats.org/drawingml/2006/diagram" xmlns:o="urn:schemas-microsoft-com:office:office" xmlns:v="urn:schemas-microsoft-com:vml" xmlns:pvml="urn:schemas-microsoft-com:office:powerpoint" xmlns:com="http://schemas.openxmlformats.org/drawingml/2006/compatibility" xmlns:p14="http://schemas.microsoft.com/office/powerpoint/2010/main" xmlns:p15="http://schemas.microsoft.com/office/powerpoint/2012/main" xmlns:ahyp="http://schemas.microsoft.com/office/drawing/2018/hyperlinkcolor">
+      <p15:sldGuideLst xmlns:ahyp="http://schemas.microsoft.com/office/drawing/2018/hyperlinkcolor" xmlns:p15="http://schemas.microsoft.com/office/powerpoint/2012/main" xmlns:p14="http://schemas.microsoft.com/office/powerpoint/2010/main" xmlns:com="http://schemas.openxmlformats.org/drawingml/2006/compatibility" xmlns:pvml="urn:schemas-microsoft-com:office:powerpoint" xmlns:v="urn:schemas-microsoft-com:vml" xmlns:o="urn:schemas-microsoft-com:office:office" xmlns:dgm="http://schemas.openxmlformats.org/drawingml/2006/diagram" xmlns:c="http://schemas.openxmlformats.org/drawingml/2006/chart" xmlns:mv="urn:schemas-microsoft-com:mac:vml" xmlns:mc="http://schemas.openxmlformats.org/markup-compatibility/2006" xmlns="">
         <p15:guide id="1" orient="horz" pos="2160">
           <p15:clr>
             <a:srgbClr val="000000"/>
